--- a/presentations/2026-workshop/slides.pptx
+++ b/presentations/2026-workshop/slides.pptx
@@ -3923,7 +3923,7 @@
             </a:pPr>
             <a:r>
               <a:rPr/>
-              <a:t>The design: pennies-a-day framing</a:t>
+              <a:t>The design: temporal reframing</a:t>
             </a:r>
           </a:p>
         </p:txBody>
@@ -4385,7 +4385,7 @@
             <a:pPr lvl="0"/>
             <a:r>
               <a:rPr/>
-              <a:t>Case study: a “pennies-a-day” savings framing experiment, run twice (N=20, then N=400) and checked against a real published study</a:t>
+              <a:t>Case study: a temporal reframing savings experiment, run twice (N=20, then N=400) and checked against a real published study</a:t>
             </a:r>
           </a:p>
         </p:txBody>

--- a/presentations/2026-workshop/slides.pptx
+++ b/presentations/2026-workshop/slides.pptx
@@ -27,6 +27,12 @@
     <p:sldId id="275" r:id="rId21"/>
     <p:sldId id="276" r:id="rId22"/>
     <p:sldId id="277" r:id="rId23"/>
+    <p:sldId id="278" r:id="rId24"/>
+    <p:sldId id="279" r:id="rId25"/>
+    <p:sldId id="280" r:id="rId26"/>
+    <p:sldId id="281" r:id="rId27"/>
+    <p:sldId id="282" r:id="rId28"/>
+    <p:sldId id="283" r:id="rId29"/>
   </p:sldIdLst>
   <p:sldSz cx="9144000" cy="5143500" type="screen16x9"/>
   <p:notesSz cx="6858000" cy="9144000"/>
@@ -3244,7 +3250,7 @@
             </a:pPr>
             <a:r>
               <a:rPr/>
-              <a:t>Design principle: each stage is a Skill</a:t>
+              <a:t>The 9-stage behavioral research pipeline</a:t>
             </a:r>
           </a:p>
         </p:txBody>
@@ -3264,57 +3270,59 @@
           <a:bodyPr/>
           <a:lstStyle/>
           <a:p>
-            <a:pPr lvl="0"/>
-            <a:r>
-              <a:rPr/>
-              <a:t>A </a:t>
+            <a:pPr lvl="0" indent="-342900" marL="342900">
+              <a:buAutoNum type="arabicPeriod"/>
+            </a:pPr>
+            <a:r>
+              <a:rPr/>
+              <a:t>Behavioral audit 2. Solution ideation 3. </a:t>
             </a:r>
             <a:r>
               <a:rPr b="1"/>
-              <a:t>Skill</a:t>
-            </a:r>
-            <a:r>
-              <a:rPr/>
-              <a:t> = a markdown file (</a:t>
-            </a:r>
-            <a:r>
-              <a:rPr>
-                <a:latin typeface="Courier"/>
-              </a:rPr>
-              <a:t>SKILL.md</a:t>
-            </a:r>
-            <a:r>
-              <a:rPr/>
-              <a:t>) with a name, a description (when to use it), and instructions</a:t>
-            </a:r>
-          </a:p>
-          <a:p>
-            <a:pPr lvl="0"/>
-            <a:r>
-              <a:rPr/>
-              <a:t>Claude Code reads the skill and follows it like a checklist/procedure</a:t>
-            </a:r>
-          </a:p>
-          <a:p>
-            <a:pPr lvl="0"/>
-            <a:r>
-              <a:rPr/>
-              <a:t>Heavy lifting (statistics, sampling) lives in </a:t>
-            </a:r>
+              <a:t>Solution design</a:t>
+            </a:r>
+          </a:p>
+          <a:p>
+            <a:pPr lvl="0" indent="-342900" marL="342900">
+              <a:buAutoNum type="arabicPeriod"/>
+            </a:pPr>
             <a:r>
               <a:rPr b="1"/>
-              <a:t>Python scripts</a:t>
-            </a:r>
-            <a:r>
-              <a:rPr/>
-              <a:t> the skill calls out to</a:t>
-            </a:r>
-          </a:p>
-          <a:p>
-            <a:pPr lvl="0"/>
-            <a:r>
-              <a:rPr/>
-              <a:t>Why split it this way: skills handle judgment and conversation; scripts handle anything that needs to be exactly reproducible</a:t>
+              <a:t>Synthetic A/B test</a:t>
+            </a:r>
+            <a:r>
+              <a:rPr/>
+              <a:t> 5. </a:t>
+            </a:r>
+            <a:r>
+              <a:rPr b="1"/>
+              <a:t>Data analysis</a:t>
+            </a:r>
+            <a:r>
+              <a:rPr/>
+              <a:t> 6. Presentation</a:t>
+            </a:r>
+          </a:p>
+          <a:p>
+            <a:pPr lvl="0" indent="-342900" marL="342900">
+              <a:buAutoNum type="arabicPeriod"/>
+            </a:pPr>
+            <a:r>
+              <a:rPr b="1"/>
+              <a:t>Scientific writeup</a:t>
+            </a:r>
+            <a:r>
+              <a:rPr/>
+              <a:t> 8. Revised solution 9. Feedback</a:t>
+            </a:r>
+          </a:p>
+          <a:p>
+            <a:pPr lvl="0" indent="0" marL="0">
+              <a:buNone/>
+            </a:pPr>
+            <a:r>
+              <a:rPr/>
+              <a:t>Bold = built in this workshop’s environment</a:t>
             </a:r>
           </a:p>
         </p:txBody>
@@ -3361,7 +3369,7 @@
             </a:pPr>
             <a:r>
               <a:rPr/>
-              <a:t>Stage 3: design intake</a:t>
+              <a:t>Scoping calls: what we built, and why</a:t>
             </a:r>
           </a:p>
         </p:txBody>
@@ -3383,73 +3391,41 @@
           <a:p>
             <a:pPr lvl="0"/>
             <a:r>
-              <a:rPr/>
-              <a:t>Researcher provides: control stimulus, treatment stimulus, population description, outcome variable(s)</a:t>
-            </a:r>
-          </a:p>
-          <a:p>
-            <a:pPr lvl="0"/>
-            <a:r>
-              <a:rPr/>
-              <a:t>Skill validates completeness, asks only about genuine gaps</a:t>
-            </a:r>
-          </a:p>
-          <a:p>
-            <a:pPr lvl="0"/>
-            <a:r>
-              <a:rPr/>
-              <a:t>Produces a structured design package: </a:t>
-            </a:r>
-            <a:r>
-              <a:rPr>
-                <a:latin typeface="Courier"/>
-              </a:rPr>
-              <a:t>research_design.md</a:t>
-            </a:r>
-            <a:r>
-              <a:rPr/>
-              <a:t>, </a:t>
-            </a:r>
-            <a:r>
-              <a:rPr>
-                <a:latin typeface="Courier"/>
-              </a:rPr>
-              <a:t>stimuli/*.md</a:t>
-            </a:r>
-            <a:r>
-              <a:rPr/>
-              <a:t>, </a:t>
-            </a:r>
-            <a:r>
-              <a:rPr>
-                <a:latin typeface="Courier"/>
-              </a:rPr>
-              <a:t>population_spec.md</a:t>
-            </a:r>
-            <a:r>
-              <a:rPr/>
-              <a:t>, </a:t>
-            </a:r>
-            <a:r>
-              <a:rPr>
-                <a:latin typeface="Courier"/>
-              </a:rPr>
-              <a:t>variables_spec.md</a:t>
-            </a:r>
-          </a:p>
-          <a:p>
-            <a:pPr lvl="0"/>
-            <a:r>
-              <a:rPr/>
-              <a:t>Deliberately </a:t>
-            </a:r>
-            <a:r>
-              <a:rPr i="1"/>
-              <a:t>not</a:t>
-            </a:r>
-            <a:r>
-              <a:rPr/>
-              <a:t> a full ideation engine – this version assumes the researcher already knows what they want to test</a:t>
+              <a:rPr b="1"/>
+              <a:t>Built</a:t>
+            </a:r>
+            <a:r>
+              <a:rPr/>
+              <a:t>: Stages 3, 4, 5, 7 – the empirical core (design -&gt; test -&gt; analyze -&gt; write up)</a:t>
+            </a:r>
+          </a:p>
+          <a:p>
+            <a:pPr lvl="0"/>
+            <a:r>
+              <a:rPr b="1"/>
+              <a:t>Deferred</a:t>
+            </a:r>
+            <a:r>
+              <a:rPr/>
+              <a:t>: Stages 1, 2, 6, 8, 9 – audit/ideation/presentation/revision/feedback need more conversational nuance than a fixed pipeline</a:t>
+            </a:r>
+          </a:p>
+          <a:p>
+            <a:pPr lvl="0"/>
+            <a:r>
+              <a:rPr b="1"/>
+              <a:t>Deferred within Stage 5</a:t>
+            </a:r>
+            <a:r>
+              <a:rPr/>
+              <a:t>: mediation and moderation analysis – real methods (Query Theory, floodlight analysis), cut for v1 scope, not because they don’t matter</a:t>
+            </a:r>
+          </a:p>
+          <a:p>
+            <a:pPr lvl="0"/>
+            <a:r>
+              <a:rPr/>
+              <a:t>Lesson: scope a v1 tightly around what you can validate end-to-end</a:t>
             </a:r>
           </a:p>
         </p:txBody>
@@ -3496,7 +3472,7 @@
             </a:pPr>
             <a:r>
               <a:rPr/>
-              <a:t>Stage 4: population sampling</a:t>
+              <a:t>Design principle: each stage is a Skill</a:t>
             </a:r>
           </a:p>
         </p:txBody>
@@ -3519,36 +3495,54 @@
             <a:pPr lvl="0"/>
             <a:r>
               <a:rPr/>
-              <a:t>Demographics + individual differences sampled from researcher-specified means/SDs (age, income, financial literacy, numeracy…)</a:t>
-            </a:r>
-          </a:p>
-          <a:p>
-            <a:pPr lvl="0"/>
-            <a:r>
-              <a:rPr/>
-              <a:t>Correlated variables drawn via a </a:t>
+              <a:t>A </a:t>
             </a:r>
             <a:r>
               <a:rPr b="1"/>
-              <a:t>Gaussian copula</a:t>
-            </a:r>
-            <a:r>
-              <a:rPr/>
-              <a:t> so specified correlations (e.g. income &lt;-&gt; financial literacy) are respected</a:t>
-            </a:r>
-          </a:p>
-          <a:p>
-            <a:pPr lvl="0"/>
-            <a:r>
-              <a:rPr/>
-              <a:t>Ordinal/count variables (income bracket, literacy score) rounded to valid values</a:t>
-            </a:r>
-          </a:p>
-          <a:p>
-            <a:pPr lvl="0"/>
-            <a:r>
-              <a:rPr/>
-              <a:t>Random, independent assignment to condition – same mechanics as a real RCT</a:t>
+              <a:t>Skill</a:t>
+            </a:r>
+            <a:r>
+              <a:rPr/>
+              <a:t> = a markdown file (</a:t>
+            </a:r>
+            <a:r>
+              <a:rPr>
+                <a:latin typeface="Courier"/>
+              </a:rPr>
+              <a:t>SKILL.md</a:t>
+            </a:r>
+            <a:r>
+              <a:rPr/>
+              <a:t>) with a name, a description (when to use it), and instructions</a:t>
+            </a:r>
+          </a:p>
+          <a:p>
+            <a:pPr lvl="0"/>
+            <a:r>
+              <a:rPr/>
+              <a:t>Claude Code reads the skill and follows it like a checklist/procedure</a:t>
+            </a:r>
+          </a:p>
+          <a:p>
+            <a:pPr lvl="0"/>
+            <a:r>
+              <a:rPr/>
+              <a:t>Heavy lifting (statistics, sampling) lives in </a:t>
+            </a:r>
+            <a:r>
+              <a:rPr b="1"/>
+              <a:t>Python scripts</a:t>
+            </a:r>
+            <a:r>
+              <a:rPr/>
+              <a:t> the skill calls out to</a:t>
+            </a:r>
+          </a:p>
+          <a:p>
+            <a:pPr lvl="0"/>
+            <a:r>
+              <a:rPr/>
+              <a:t>Why split it this way: skills handle judgment and conversation; scripts handle anything that needs to be exactly reproducible</a:t>
             </a:r>
           </a:p>
         </p:txBody>
@@ -3595,78 +3589,69 @@
             </a:pPr>
             <a:r>
               <a:rPr/>
-              <a:t>Stage 4: subagent batching + blinding</a:t>
-            </a:r>
-          </a:p>
-        </p:txBody>
-      </p:sp>
-      <p:sp>
-        <p:nvSpPr>
-          <p:cNvPr id="3" name="Content Placeholder 2"/>
-          <p:cNvSpPr>
-            <a:spLocks noGrp="1"/>
-          </p:cNvSpPr>
+              <a:t>Stage 3 in practice</a:t>
+            </a:r>
+          </a:p>
+        </p:txBody>
+      </p:sp>
+      <p:pic>
+        <p:nvPicPr>
+          <p:cNvPr descr="assets/mockup_stage3.png" id="0" name="Picture 1"/>
+          <p:cNvPicPr>
+            <a:picLocks noGrp="1" noChangeAspect="1"/>
+          </p:cNvPicPr>
+          <p:nvPr/>
+        </p:nvPicPr>
+        <p:blipFill>
+          <a:blip r:embed="rId2"/>
+          <a:stretch>
+            <a:fillRect/>
+          </a:stretch>
+        </p:blipFill>
+        <p:spPr bwMode="auto">
+          <a:xfrm>
+            <a:off x="2247900" y="1193800"/>
+            <a:ext cx="4648200" cy="2882900"/>
+          </a:xfrm>
+          <a:prstGeom prst="rect">
+            <a:avLst/>
+          </a:prstGeom>
+          <a:noFill/>
+          <a:ln w="9525">
+            <a:noFill/>
+            <a:headEnd/>
+            <a:tailEnd/>
+          </a:ln>
+        </p:spPr>
+      </p:pic>
+      <p:sp>
+        <p:nvSpPr>
+          <p:cNvPr id="1" name="TextBox 3"/>
+          <p:cNvSpPr txBox="1"/>
           <p:nvPr>
             <p:ph idx="1"/>
           </p:nvPr>
         </p:nvSpPr>
-        <p:spPr/>
-        <p:txBody>
-          <a:bodyPr/>
-          <a:lstStyle/>
-          <a:p>
-            <a:pPr lvl="0"/>
-            <a:r>
-              <a:rPr/>
-              <a:t>Each </a:t>
-            </a:r>
-            <a:r>
-              <a:rPr b="1"/>
-              <a:t>subagent</a:t>
-            </a:r>
-            <a:r>
-              <a:rPr/>
-              <a:t> simulates a batch of ~10 subjects in one call – batching matters:</a:t>
-            </a:r>
-          </a:p>
-          <a:p>
-            <a:pPr lvl="1"/>
-            <a:r>
-              <a:rPr/>
-              <a:t>Batch size 2: ~9,875 tokens/subject</a:t>
-            </a:r>
-          </a:p>
-          <a:p>
-            <a:pPr lvl="1"/>
-            <a:r>
-              <a:rPr/>
-              <a:t>Batch size 10: ~2,588 tokens/subject (</a:t>
-            </a:r>
-            <a:r>
-              <a:rPr b="1"/>
-              <a:t>~4x more efficient</a:t>
-            </a:r>
-            <a:r>
-              <a:rPr/>
-              <a:t>)</a:t>
-            </a:r>
-          </a:p>
-          <a:p>
-            <a:pPr lvl="0"/>
-            <a:r>
-              <a:rPr/>
-              <a:t>Subjects respond in-persona based on their sampled profile, not as “an AI”</a:t>
-            </a:r>
-          </a:p>
-          <a:p>
-            <a:pPr lvl="0"/>
-            <a:r>
-              <a:rPr b="1"/>
-              <a:t>Blinding feature</a:t>
-            </a:r>
-            <a:r>
-              <a:rPr/>
-              <a:t>: conditions can be tracked under neutral labels (Condition A/B) until the researcher chooses to reveal which is treatment – avoids analyst bias</a:t>
+        <p:spPr>
+          <a:xfrm>
+            <a:off x="457200" y="4076700"/>
+            <a:ext cx="8229600" cy="508000"/>
+          </a:xfrm>
+          <a:prstGeom prst="rect">
+            <a:avLst/>
+          </a:prstGeom>
+          <a:noFill/>
+        </p:spPr>
+        <p:txBody>
+          <a:bodyPr/>
+          <a:lstStyle/>
+          <a:p>
+            <a:pPr lvl="0" indent="0" marL="0" algn="ctr">
+              <a:buNone/>
+            </a:pPr>
+            <a:r>
+              <a:rPr/>
+              <a:t>You describe your stimuli, population, and outcome in plain language – Claude Code turns it into a structured design package. No file formats to learn.</a:t>
             </a:r>
           </a:p>
         </p:txBody>
@@ -3713,7 +3698,11 @@
             </a:pPr>
             <a:r>
               <a:rPr/>
-              <a:t>Stage 5: analysis pipeline</a:t>
+              <a:t>Stage 3: design intake </a:t>
+            </a:r>
+            <a:r>
+              <a:rPr i="1"/>
+              <a:t>(under the hood)</a:t>
             </a:r>
           </a:p>
         </p:txBody>
@@ -3735,41 +3724,73 @@
           <a:p>
             <a:pPr lvl="0"/>
             <a:r>
-              <a:rPr b="1"/>
-              <a:t>Balance check</a:t>
-            </a:r>
-            <a:r>
-              <a:rPr/>
-              <a:t> – are demographics/individual differences actually balanced across conditions? (chi-sq, F-test, Bartlett’s)</a:t>
-            </a:r>
-          </a:p>
-          <a:p>
-            <a:pPr lvl="0"/>
-            <a:r>
-              <a:rPr b="1"/>
-              <a:t>Regression</a:t>
-            </a:r>
-            <a:r>
-              <a:rPr/>
-              <a:t> – OLS or logit, with/without controls, on the primary and secondary outcomes</a:t>
-            </a:r>
-          </a:p>
-          <a:p>
-            <a:pPr lvl="0"/>
-            <a:r>
-              <a:rPr b="1"/>
-              <a:t>Charts</a:t>
-            </a:r>
-            <a:r>
-              <a:rPr/>
-              <a:t> – outcome-by-condition bar charts with standard errors</a:t>
-            </a:r>
-          </a:p>
-          <a:p>
-            <a:pPr lvl="0"/>
-            <a:r>
-              <a:rPr/>
-              <a:t>A real bug caught here: pandas 3.0’s new string dtype silently broke a dtype check – always verify assumptions on real output, don’t trust silently</a:t>
+              <a:rPr/>
+              <a:t>Researcher provides: control stimulus, treatment stimulus, population description, outcome variable(s)</a:t>
+            </a:r>
+          </a:p>
+          <a:p>
+            <a:pPr lvl="0"/>
+            <a:r>
+              <a:rPr/>
+              <a:t>Skill validates completeness, asks only about genuine gaps</a:t>
+            </a:r>
+          </a:p>
+          <a:p>
+            <a:pPr lvl="0"/>
+            <a:r>
+              <a:rPr/>
+              <a:t>Produces a structured design package: </a:t>
+            </a:r>
+            <a:r>
+              <a:rPr>
+                <a:latin typeface="Courier"/>
+              </a:rPr>
+              <a:t>research_design.md</a:t>
+            </a:r>
+            <a:r>
+              <a:rPr/>
+              <a:t>, </a:t>
+            </a:r>
+            <a:r>
+              <a:rPr>
+                <a:latin typeface="Courier"/>
+              </a:rPr>
+              <a:t>stimuli/*.md</a:t>
+            </a:r>
+            <a:r>
+              <a:rPr/>
+              <a:t>, </a:t>
+            </a:r>
+            <a:r>
+              <a:rPr>
+                <a:latin typeface="Courier"/>
+              </a:rPr>
+              <a:t>population_spec.md</a:t>
+            </a:r>
+            <a:r>
+              <a:rPr/>
+              <a:t>, </a:t>
+            </a:r>
+            <a:r>
+              <a:rPr>
+                <a:latin typeface="Courier"/>
+              </a:rPr>
+              <a:t>variables_spec.md</a:t>
+            </a:r>
+          </a:p>
+          <a:p>
+            <a:pPr lvl="0"/>
+            <a:r>
+              <a:rPr/>
+              <a:t>Deliberately </a:t>
+            </a:r>
+            <a:r>
+              <a:rPr i="1"/>
+              <a:t>not</a:t>
+            </a:r>
+            <a:r>
+              <a:rPr/>
+              <a:t> a full ideation engine – this version assumes the researcher already knows what they want to test</a:t>
             </a:r>
           </a:p>
         </p:txBody>
@@ -3816,67 +3837,69 @@
             </a:pPr>
             <a:r>
               <a:rPr/>
-              <a:t>Stage 7: writeup + reference comparison</a:t>
-            </a:r>
-          </a:p>
-        </p:txBody>
-      </p:sp>
-      <p:sp>
-        <p:nvSpPr>
-          <p:cNvPr id="3" name="Content Placeholder 2"/>
-          <p:cNvSpPr>
-            <a:spLocks noGrp="1"/>
-          </p:cNvSpPr>
+              <a:t>Stage 4 in practice</a:t>
+            </a:r>
+          </a:p>
+        </p:txBody>
+      </p:sp>
+      <p:pic>
+        <p:nvPicPr>
+          <p:cNvPr descr="assets/mockup_stage4.png" id="0" name="Picture 1"/>
+          <p:cNvPicPr>
+            <a:picLocks noGrp="1" noChangeAspect="1"/>
+          </p:cNvPicPr>
+          <p:nvPr/>
+        </p:nvPicPr>
+        <p:blipFill>
+          <a:blip r:embed="rId2"/>
+          <a:stretch>
+            <a:fillRect/>
+          </a:stretch>
+        </p:blipFill>
+        <p:spPr bwMode="auto">
+          <a:xfrm>
+            <a:off x="2247900" y="1193800"/>
+            <a:ext cx="4648200" cy="2882900"/>
+          </a:xfrm>
+          <a:prstGeom prst="rect">
+            <a:avLst/>
+          </a:prstGeom>
+          <a:noFill/>
+          <a:ln w="9525">
+            <a:noFill/>
+            <a:headEnd/>
+            <a:tailEnd/>
+          </a:ln>
+        </p:spPr>
+      </p:pic>
+      <p:sp>
+        <p:nvSpPr>
+          <p:cNvPr id="1" name="TextBox 3"/>
+          <p:cNvSpPr txBox="1"/>
           <p:nvPr>
             <p:ph idx="1"/>
           </p:nvPr>
         </p:nvSpPr>
-        <p:spPr/>
-        <p:txBody>
-          <a:bodyPr/>
-          <a:lstStyle/>
-          <a:p>
-            <a:pPr lvl="0"/>
-            <a:r>
-              <a:rPr/>
-              <a:t>Assembles Method, Balance, and Results sections from the Stage 5 outputs into a single document</a:t>
-            </a:r>
-          </a:p>
-          <a:p>
-            <a:pPr lvl="0"/>
-            <a:r>
-              <a:rPr/>
-              <a:t>Markdown -&gt; </a:t>
-            </a:r>
-            <a:r>
-              <a:rPr b="1"/>
-              <a:t>pandoc</a:t>
-            </a:r>
-            <a:r>
-              <a:rPr/>
-              <a:t> -&gt; Word (.docx)</a:t>
-            </a:r>
-          </a:p>
-          <a:p>
-            <a:pPr lvl="0"/>
-            <a:r>
-              <a:rPr/>
-              <a:t>Optional section: compare this run’s statistics against a </a:t>
-            </a:r>
-            <a:r>
-              <a:rPr b="1"/>
-              <a:t>published reference study</a:t>
-            </a:r>
-            <a:r>
-              <a:rPr/>
-              <a:t>, with an explicit, stated classification rule (replicates / partially replicates / does not replicate)</a:t>
-            </a:r>
-          </a:p>
-          <a:p>
-            <a:pPr lvl="0"/>
-            <a:r>
-              <a:rPr/>
-              <a:t>Mediation/moderation excluded, matching Stage 5’s scope</a:t>
+        <p:spPr>
+          <a:xfrm>
+            <a:off x="457200" y="4076700"/>
+            <a:ext cx="8229600" cy="508000"/>
+          </a:xfrm>
+          <a:prstGeom prst="rect">
+            <a:avLst/>
+          </a:prstGeom>
+          <a:noFill/>
+        </p:spPr>
+        <p:txBody>
+          <a:bodyPr/>
+          <a:lstStyle/>
+          <a:p>
+            <a:pPr lvl="0" indent="0" marL="0" algn="ctr">
+              <a:buNone/>
+            </a:pPr>
+            <a:r>
+              <a:rPr/>
+              <a:t>You state a sample size and let Claude Code handle sampling and simulation – behind this one message: population sampling, condition assignment, and dozens of simulated subject batches.</a:t>
             </a:r>
           </a:p>
         </p:txBody>
@@ -3923,7 +3946,11 @@
             </a:pPr>
             <a:r>
               <a:rPr/>
-              <a:t>The design: temporal reframing</a:t>
+              <a:t>Stage 4: population sampling </a:t>
+            </a:r>
+            <a:r>
+              <a:rPr i="1"/>
+              <a:t>(under the hood)</a:t>
             </a:r>
           </a:p>
         </p:txBody>
@@ -3943,59 +3970,39 @@
           <a:bodyPr/>
           <a:lstStyle/>
           <a:p>
-            <a:pPr lvl="0" indent="0" marL="1270000">
-              <a:buNone/>
-            </a:pPr>
-            <a:r>
-              <a:rPr sz="2000"/>
-              <a:t>“Investing on a regular basis is one of the best ways to grow your wealth. You can get started with </a:t>
-            </a:r>
-            <a:r>
-              <a:rPr sz="2000" b="1"/>
-              <a:t>$5 a day</a:t>
-            </a:r>
-            <a:r>
-              <a:rPr sz="2000"/>
-              <a:t> today.” </a:t>
-            </a:r>
-            <a:r>
-              <a:rPr sz="2000" i="1"/>
-              <a:t>(treatment)</a:t>
-            </a:r>
-          </a:p>
-          <a:p>
-            <a:pPr lvl="0" indent="0" marL="1270000">
-              <a:buNone/>
-            </a:pPr>
-            <a:r>
-              <a:rPr sz="2000"/>
-              <a:t>“…with </a:t>
-            </a:r>
-            <a:r>
-              <a:rPr sz="2000" b="1"/>
-              <a:t>$150 a month</a:t>
-            </a:r>
-            <a:r>
-              <a:rPr sz="2000"/>
-              <a:t> today.” </a:t>
-            </a:r>
-            <a:r>
-              <a:rPr sz="2000" i="1"/>
-              <a:t>(control)</a:t>
-            </a:r>
-          </a:p>
-          <a:p>
-            <a:pPr lvl="0"/>
-            <a:r>
-              <a:rPr/>
-              <a:t>Same underlying amount ($5/day ~= $150/month), different framing granularity</a:t>
-            </a:r>
-          </a:p>
-          <a:p>
-            <a:pPr lvl="0"/>
-            <a:r>
-              <a:rPr/>
-              <a:t>Outcome: sign-up decision + self-reported affordability + self-reported understandability (both 1-7 Likert)</a:t>
+            <a:pPr lvl="0"/>
+            <a:r>
+              <a:rPr/>
+              <a:t>Demographics + individual differences sampled from researcher-specified means/SDs (age, income, financial literacy, numeracy…)</a:t>
+            </a:r>
+          </a:p>
+          <a:p>
+            <a:pPr lvl="0"/>
+            <a:r>
+              <a:rPr/>
+              <a:t>Correlated variables drawn via a </a:t>
+            </a:r>
+            <a:r>
+              <a:rPr b="1"/>
+              <a:t>Gaussian copula</a:t>
+            </a:r>
+            <a:r>
+              <a:rPr/>
+              <a:t> so specified correlations (e.g. income &lt;-&gt; financial literacy) are respected</a:t>
+            </a:r>
+          </a:p>
+          <a:p>
+            <a:pPr lvl="0"/>
+            <a:r>
+              <a:rPr/>
+              <a:t>Ordinal/count variables (income bracket, literacy score) rounded to valid values</a:t>
+            </a:r>
+          </a:p>
+          <a:p>
+            <a:pPr lvl="0"/>
+            <a:r>
+              <a:rPr/>
+              <a:t>Random, independent assignment to condition – same mechanics as a real RCT</a:t>
             </a:r>
           </a:p>
         </p:txBody>
@@ -4042,7 +4049,11 @@
             </a:pPr>
             <a:r>
               <a:rPr/>
-              <a:t>Pilot: N=20, blinded</a:t>
+              <a:t>Stage 4: subagent batching + blinding </a:t>
+            </a:r>
+            <a:r>
+              <a:rPr i="1"/>
+              <a:t>(under the hood)</a:t>
             </a:r>
           </a:p>
         </p:txBody>
@@ -4065,21 +4076,55 @@
             <a:pPr lvl="0"/>
             <a:r>
               <a:rPr/>
-              <a:t>10 subjects/condition, subagent mode, condition labels withheld from the analyst</a:t>
-            </a:r>
-          </a:p>
-          <a:p>
-            <a:pPr lvl="0"/>
-            <a:r>
-              <a:rPr/>
-              <a:t>Sign-up rate: 80% vs. 40% – directionally large, but only marginal at this N (p ~ .08 across all three outcomes)</a:t>
-            </a:r>
-          </a:p>
-          <a:p>
-            <a:pPr lvl="0"/>
-            <a:r>
-              <a:rPr/>
-              <a:t>Purpose of a pilot: catch pipeline problems and get a directional read cheaply before committing to a larger run</a:t>
+              <a:t>Each </a:t>
+            </a:r>
+            <a:r>
+              <a:rPr b="1"/>
+              <a:t>subagent</a:t>
+            </a:r>
+            <a:r>
+              <a:rPr/>
+              <a:t> simulates a batch of ~10 subjects in one call – batching matters:</a:t>
+            </a:r>
+          </a:p>
+          <a:p>
+            <a:pPr lvl="1"/>
+            <a:r>
+              <a:rPr/>
+              <a:t>Batch size 2: ~9,875 tokens/subject</a:t>
+            </a:r>
+          </a:p>
+          <a:p>
+            <a:pPr lvl="1"/>
+            <a:r>
+              <a:rPr/>
+              <a:t>Batch size 10: ~2,588 tokens/subject (</a:t>
+            </a:r>
+            <a:r>
+              <a:rPr b="1"/>
+              <a:t>~4x more efficient</a:t>
+            </a:r>
+            <a:r>
+              <a:rPr/>
+              <a:t>)</a:t>
+            </a:r>
+          </a:p>
+          <a:p>
+            <a:pPr lvl="0"/>
+            <a:r>
+              <a:rPr/>
+              <a:t>Subjects respond in-persona based on their sampled profile, not as “an AI”</a:t>
+            </a:r>
+          </a:p>
+          <a:p>
+            <a:pPr lvl="0"/>
+            <a:r>
+              <a:rPr b="1"/>
+              <a:t>Blinding feature</a:t>
+            </a:r>
+            <a:r>
+              <a:rPr/>
+              <a:t>: conditions can be tracked under neutral labels (Condition A/B) until the researcher chooses to reveal which is treatment – avoids analyst bias</a:t>
             </a:r>
           </a:p>
         </p:txBody>
@@ -4126,44 +4171,69 @@
             </a:pPr>
             <a:r>
               <a:rPr/>
-              <a:t>Unblind, then decide to scale</a:t>
-            </a:r>
-          </a:p>
-        </p:txBody>
-      </p:sp>
-      <p:sp>
-        <p:nvSpPr>
-          <p:cNvPr id="3" name="Content Placeholder 2"/>
-          <p:cNvSpPr>
-            <a:spLocks noGrp="1"/>
-          </p:cNvSpPr>
+              <a:t>Stage 5 in practice</a:t>
+            </a:r>
+          </a:p>
+        </p:txBody>
+      </p:sp>
+      <p:pic>
+        <p:nvPicPr>
+          <p:cNvPr descr="assets/mockup_stage5.png" id="0" name="Picture 1"/>
+          <p:cNvPicPr>
+            <a:picLocks noGrp="1" noChangeAspect="1"/>
+          </p:cNvPicPr>
+          <p:nvPr/>
+        </p:nvPicPr>
+        <p:blipFill>
+          <a:blip r:embed="rId2"/>
+          <a:stretch>
+            <a:fillRect/>
+          </a:stretch>
+        </p:blipFill>
+        <p:spPr bwMode="auto">
+          <a:xfrm>
+            <a:off x="2247900" y="1193800"/>
+            <a:ext cx="4648200" cy="2882900"/>
+          </a:xfrm>
+          <a:prstGeom prst="rect">
+            <a:avLst/>
+          </a:prstGeom>
+          <a:noFill/>
+          <a:ln w="9525">
+            <a:noFill/>
+            <a:headEnd/>
+            <a:tailEnd/>
+          </a:ln>
+        </p:spPr>
+      </p:pic>
+      <p:sp>
+        <p:nvSpPr>
+          <p:cNvPr id="1" name="TextBox 3"/>
+          <p:cNvSpPr txBox="1"/>
           <p:nvPr>
             <p:ph idx="1"/>
           </p:nvPr>
         </p:nvSpPr>
-        <p:spPr/>
-        <p:txBody>
-          <a:bodyPr/>
-          <a:lstStyle/>
-          <a:p>
-            <a:pPr lvl="0"/>
-            <a:r>
-              <a:rPr/>
-              <a:t>Researcher reveals: Condition 1 = treatment ($5/day), Condition 2 = control ($150/month)</a:t>
-            </a:r>
-          </a:p>
-          <a:p>
-            <a:pPr lvl="0"/>
-            <a:r>
-              <a:rPr/>
-              <a:t>Re-run regressions with the correct reference category – coefficients flip sign as expected, same magnitude</a:t>
-            </a:r>
-          </a:p>
-          <a:p>
-            <a:pPr lvl="0"/>
-            <a:r>
-              <a:rPr/>
-              <a:t>Decision: scale to N=400 (200/condition) to get a properly powered read</a:t>
+        <p:spPr>
+          <a:xfrm>
+            <a:off x="457200" y="4076700"/>
+            <a:ext cx="8229600" cy="508000"/>
+          </a:xfrm>
+          <a:prstGeom prst="rect">
+            <a:avLst/>
+          </a:prstGeom>
+          <a:noFill/>
+        </p:spPr>
+        <p:txBody>
+          <a:bodyPr/>
+          <a:lstStyle/>
+          <a:p>
+            <a:pPr lvl="0" indent="0" marL="0" algn="ctr">
+              <a:buNone/>
+            </a:pPr>
+            <a:r>
+              <a:rPr/>
+              <a:t>One message gets you a balance check, a regression, and a chart – plain-English results first, statistical detail if you want it.</a:t>
             </a:r>
           </a:p>
         </p:txBody>
@@ -4210,7 +4280,11 @@
             </a:pPr>
             <a:r>
               <a:rPr/>
-              <a:t>Full-scale results (N=400)</a:t>
+              <a:t>Stage 5: analysis pipeline </a:t>
+            </a:r>
+            <a:r>
+              <a:rPr i="1"/>
+              <a:t>(under the hood)</a:t>
             </a:r>
           </a:p>
         </p:txBody>
@@ -4232,61 +4306,41 @@
           <a:p>
             <a:pPr lvl="0"/>
             <a:r>
-              <a:rPr/>
-              <a:t>Sign-up rate: </a:t>
-            </a:r>
-            <a:r>
               <a:rPr b="1"/>
-              <a:t>64.5% (treatment) vs. 45.5% (control)</a:t>
-            </a:r>
-            <a:r>
-              <a:rPr/>
-              <a:t>, logit B=0.82, </a:t>
-            </a:r>
-            <a:r>
-              <a:rPr i="1"/>
-              <a:t>p</a:t>
-            </a:r>
-            <a:r>
-              <a:rPr/>
-              <a:t>&lt;.001</a:t>
-            </a:r>
-          </a:p>
-          <a:p>
-            <a:pPr lvl="0"/>
-            <a:r>
-              <a:rPr/>
-              <a:t>Affordability rating: 4.66 vs. 4.05, </a:t>
-            </a:r>
-            <a:r>
-              <a:rPr i="1"/>
-              <a:t>p</a:t>
-            </a:r>
-            <a:r>
-              <a:rPr/>
-              <a:t>&lt;.001</a:t>
-            </a:r>
-          </a:p>
-          <a:p>
-            <a:pPr lvl="0"/>
-            <a:r>
-              <a:rPr/>
-              <a:t>Understandability rating: 5.35 vs. 5.31, </a:t>
-            </a:r>
-            <a:r>
-              <a:rPr i="1"/>
-              <a:t>p</a:t>
-            </a:r>
-            <a:r>
-              <a:rPr/>
-              <a:t>=.70 (no effect)</a:t>
-            </a:r>
-          </a:p>
-          <a:p>
-            <a:pPr lvl="0"/>
-            <a:r>
-              <a:rPr/>
-              <a:t>Balance check flagged gender as imbalanced (p=.035) – across 6 tests, ~26% chance of at least one false positive; verified main results hold with a gender control</a:t>
+              <a:t>Balance check</a:t>
+            </a:r>
+            <a:r>
+              <a:rPr/>
+              <a:t> – are demographics/individual differences actually balanced across conditions? (chi-sq, F-test, Bartlett’s)</a:t>
+            </a:r>
+          </a:p>
+          <a:p>
+            <a:pPr lvl="0"/>
+            <a:r>
+              <a:rPr b="1"/>
+              <a:t>Regression</a:t>
+            </a:r>
+            <a:r>
+              <a:rPr/>
+              <a:t> – OLS or logit, with/without controls, on the primary and secondary outcomes</a:t>
+            </a:r>
+          </a:p>
+          <a:p>
+            <a:pPr lvl="0"/>
+            <a:r>
+              <a:rPr b="1"/>
+              <a:t>Charts</a:t>
+            </a:r>
+            <a:r>
+              <a:rPr/>
+              <a:t> – outcome-by-condition bar charts with standard errors</a:t>
+            </a:r>
+          </a:p>
+          <a:p>
+            <a:pPr lvl="0"/>
+            <a:r>
+              <a:rPr/>
+              <a:t>A real bug caught here: pandas 3.0’s new string dtype silently broke a dtype check – always verify assumptions on real output, don’t trust silently</a:t>
             </a:r>
           </a:p>
         </p:txBody>
@@ -4396,6 +4450,636 @@
 </file>
 
 <file path=ppt/slides/slide20.xml><?xml version="1.0" encoding="utf-8"?>
+<p:sld xmlns:a="http://schemas.openxmlformats.org/drawingml/2006/main" xmlns:r="http://schemas.openxmlformats.org/officeDocument/2006/relationships" xmlns:p="http://schemas.openxmlformats.org/presentationml/2006/main">
+  <p:cSld>
+    <p:spTree>
+      <p:nvGrpSpPr>
+        <p:cNvPr id="1" name=""/>
+        <p:cNvGrpSpPr/>
+        <p:nvPr/>
+      </p:nvGrpSpPr>
+      <p:grpSpPr>
+        <a:xfrm>
+          <a:off x="0" y="0"/>
+          <a:ext cx="0" cy="0"/>
+          <a:chOff x="0" y="0"/>
+          <a:chExt cx="0" cy="0"/>
+        </a:xfrm>
+      </p:grpSpPr>
+      <p:sp>
+        <p:nvSpPr>
+          <p:cNvPr id="2" name="Title 1"/>
+          <p:cNvSpPr>
+            <a:spLocks noGrp="1"/>
+          </p:cNvSpPr>
+          <p:nvPr>
+            <p:ph type="title"/>
+          </p:nvPr>
+        </p:nvSpPr>
+        <p:spPr/>
+        <p:txBody>
+          <a:bodyPr/>
+          <a:lstStyle/>
+          <a:p>
+            <a:pPr lvl="0" indent="0" marL="0">
+              <a:buNone/>
+            </a:pPr>
+            <a:r>
+              <a:rPr/>
+              <a:t>Stage 7 in practice</a:t>
+            </a:r>
+          </a:p>
+        </p:txBody>
+      </p:sp>
+      <p:pic>
+        <p:nvPicPr>
+          <p:cNvPr descr="assets/mockup_stage7.png" id="0" name="Picture 1"/>
+          <p:cNvPicPr>
+            <a:picLocks noGrp="1" noChangeAspect="1"/>
+          </p:cNvPicPr>
+          <p:nvPr/>
+        </p:nvPicPr>
+        <p:blipFill>
+          <a:blip r:embed="rId2"/>
+          <a:stretch>
+            <a:fillRect/>
+          </a:stretch>
+        </p:blipFill>
+        <p:spPr bwMode="auto">
+          <a:xfrm>
+            <a:off x="2247900" y="1193800"/>
+            <a:ext cx="4648200" cy="2882900"/>
+          </a:xfrm>
+          <a:prstGeom prst="rect">
+            <a:avLst/>
+          </a:prstGeom>
+          <a:noFill/>
+          <a:ln w="9525">
+            <a:noFill/>
+            <a:headEnd/>
+            <a:tailEnd/>
+          </a:ln>
+        </p:spPr>
+      </p:pic>
+      <p:sp>
+        <p:nvSpPr>
+          <p:cNvPr id="1" name="TextBox 3"/>
+          <p:cNvSpPr txBox="1"/>
+          <p:nvPr>
+            <p:ph idx="1"/>
+          </p:nvPr>
+        </p:nvSpPr>
+        <p:spPr>
+          <a:xfrm>
+            <a:off x="457200" y="4076700"/>
+            <a:ext cx="8229600" cy="508000"/>
+          </a:xfrm>
+          <a:prstGeom prst="rect">
+            <a:avLst/>
+          </a:prstGeom>
+          <a:noFill/>
+        </p:spPr>
+        <p:txBody>
+          <a:bodyPr/>
+          <a:lstStyle/>
+          <a:p>
+            <a:pPr lvl="0" indent="0" marL="0" algn="ctr">
+              <a:buNone/>
+            </a:pPr>
+            <a:r>
+              <a:rPr/>
+              <a:t>One message produces a Word-ready document you can open, edit, and share – optionally compared against a published study’s statistics.</a:t>
+            </a:r>
+          </a:p>
+        </p:txBody>
+      </p:sp>
+    </p:spTree>
+  </p:cSld>
+</p:sld>
+</file>
+
+<file path=ppt/slides/slide21.xml><?xml version="1.0" encoding="utf-8"?>
+<p:sld xmlns:a="http://schemas.openxmlformats.org/drawingml/2006/main" xmlns:r="http://schemas.openxmlformats.org/officeDocument/2006/relationships" xmlns:p="http://schemas.openxmlformats.org/presentationml/2006/main">
+  <p:cSld>
+    <p:spTree>
+      <p:nvGrpSpPr>
+        <p:cNvPr id="1" name=""/>
+        <p:cNvGrpSpPr/>
+        <p:nvPr/>
+      </p:nvGrpSpPr>
+      <p:grpSpPr>
+        <a:xfrm>
+          <a:off x="0" y="0"/>
+          <a:ext cx="0" cy="0"/>
+          <a:chOff x="0" y="0"/>
+          <a:chExt cx="0" cy="0"/>
+        </a:xfrm>
+      </p:grpSpPr>
+      <p:sp>
+        <p:nvSpPr>
+          <p:cNvPr id="2" name="Title 1"/>
+          <p:cNvSpPr>
+            <a:spLocks noGrp="1"/>
+          </p:cNvSpPr>
+          <p:nvPr>
+            <p:ph type="title"/>
+          </p:nvPr>
+        </p:nvSpPr>
+        <p:spPr/>
+        <p:txBody>
+          <a:bodyPr/>
+          <a:lstStyle/>
+          <a:p>
+            <a:pPr lvl="0" indent="0" marL="0">
+              <a:buNone/>
+            </a:pPr>
+            <a:r>
+              <a:rPr/>
+              <a:t>Stage 7: writeup + reference comparison </a:t>
+            </a:r>
+            <a:r>
+              <a:rPr i="1"/>
+              <a:t>(under the hood)</a:t>
+            </a:r>
+          </a:p>
+        </p:txBody>
+      </p:sp>
+      <p:sp>
+        <p:nvSpPr>
+          <p:cNvPr id="3" name="Content Placeholder 2"/>
+          <p:cNvSpPr>
+            <a:spLocks noGrp="1"/>
+          </p:cNvSpPr>
+          <p:nvPr>
+            <p:ph idx="1"/>
+          </p:nvPr>
+        </p:nvSpPr>
+        <p:spPr/>
+        <p:txBody>
+          <a:bodyPr/>
+          <a:lstStyle/>
+          <a:p>
+            <a:pPr lvl="0"/>
+            <a:r>
+              <a:rPr/>
+              <a:t>Assembles Method, Balance, and Results sections from the Stage 5 outputs into a single document</a:t>
+            </a:r>
+          </a:p>
+          <a:p>
+            <a:pPr lvl="0"/>
+            <a:r>
+              <a:rPr/>
+              <a:t>Markdown -&gt; </a:t>
+            </a:r>
+            <a:r>
+              <a:rPr b="1"/>
+              <a:t>pandoc</a:t>
+            </a:r>
+            <a:r>
+              <a:rPr/>
+              <a:t> -&gt; Word (.docx)</a:t>
+            </a:r>
+          </a:p>
+          <a:p>
+            <a:pPr lvl="0"/>
+            <a:r>
+              <a:rPr/>
+              <a:t>Optional section: compare this run’s statistics against a </a:t>
+            </a:r>
+            <a:r>
+              <a:rPr b="1"/>
+              <a:t>published reference study</a:t>
+            </a:r>
+            <a:r>
+              <a:rPr/>
+              <a:t>, with an explicit, stated classification rule (replicates / partially replicates / does not replicate)</a:t>
+            </a:r>
+          </a:p>
+          <a:p>
+            <a:pPr lvl="0"/>
+            <a:r>
+              <a:rPr/>
+              <a:t>Mediation/moderation excluded, matching Stage 5’s scope</a:t>
+            </a:r>
+          </a:p>
+        </p:txBody>
+      </p:sp>
+    </p:spTree>
+  </p:cSld>
+</p:sld>
+</file>
+
+<file path=ppt/slides/slide22.xml><?xml version="1.0" encoding="utf-8"?>
+<p:sld xmlns:a="http://schemas.openxmlformats.org/drawingml/2006/main" xmlns:r="http://schemas.openxmlformats.org/officeDocument/2006/relationships" xmlns:p="http://schemas.openxmlformats.org/presentationml/2006/main">
+  <p:cSld>
+    <p:spTree>
+      <p:nvGrpSpPr>
+        <p:cNvPr id="1" name=""/>
+        <p:cNvGrpSpPr/>
+        <p:nvPr/>
+      </p:nvGrpSpPr>
+      <p:grpSpPr>
+        <a:xfrm>
+          <a:off x="0" y="0"/>
+          <a:ext cx="0" cy="0"/>
+          <a:chOff x="0" y="0"/>
+          <a:chExt cx="0" cy="0"/>
+        </a:xfrm>
+      </p:grpSpPr>
+      <p:sp>
+        <p:nvSpPr>
+          <p:cNvPr id="2" name="Title 1"/>
+          <p:cNvSpPr>
+            <a:spLocks noGrp="1"/>
+          </p:cNvSpPr>
+          <p:nvPr>
+            <p:ph type="title"/>
+          </p:nvPr>
+        </p:nvSpPr>
+        <p:spPr/>
+        <p:txBody>
+          <a:bodyPr/>
+          <a:lstStyle/>
+          <a:p>
+            <a:pPr lvl="0" indent="0" marL="0">
+              <a:buNone/>
+            </a:pPr>
+            <a:r>
+              <a:rPr/>
+              <a:t>The design: temporal reframing</a:t>
+            </a:r>
+          </a:p>
+        </p:txBody>
+      </p:sp>
+      <p:sp>
+        <p:nvSpPr>
+          <p:cNvPr id="3" name="Content Placeholder 2"/>
+          <p:cNvSpPr>
+            <a:spLocks noGrp="1"/>
+          </p:cNvSpPr>
+          <p:nvPr>
+            <p:ph idx="1"/>
+          </p:nvPr>
+        </p:nvSpPr>
+        <p:spPr/>
+        <p:txBody>
+          <a:bodyPr/>
+          <a:lstStyle/>
+          <a:p>
+            <a:pPr lvl="0" indent="0" marL="1270000">
+              <a:buNone/>
+            </a:pPr>
+            <a:r>
+              <a:rPr sz="2000"/>
+              <a:t>“Investing on a regular basis is one of the best ways to grow your wealth. You can get started with </a:t>
+            </a:r>
+            <a:r>
+              <a:rPr sz="2000" b="1"/>
+              <a:t>$5 a day</a:t>
+            </a:r>
+            <a:r>
+              <a:rPr sz="2000"/>
+              <a:t> today.” </a:t>
+            </a:r>
+            <a:r>
+              <a:rPr sz="2000" i="1"/>
+              <a:t>(treatment)</a:t>
+            </a:r>
+          </a:p>
+          <a:p>
+            <a:pPr lvl="0" indent="0" marL="1270000">
+              <a:buNone/>
+            </a:pPr>
+            <a:r>
+              <a:rPr sz="2000"/>
+              <a:t>“…with </a:t>
+            </a:r>
+            <a:r>
+              <a:rPr sz="2000" b="1"/>
+              <a:t>$150 a month</a:t>
+            </a:r>
+            <a:r>
+              <a:rPr sz="2000"/>
+              <a:t> today.” </a:t>
+            </a:r>
+            <a:r>
+              <a:rPr sz="2000" i="1"/>
+              <a:t>(control)</a:t>
+            </a:r>
+          </a:p>
+          <a:p>
+            <a:pPr lvl="0"/>
+            <a:r>
+              <a:rPr/>
+              <a:t>Same underlying amount ($5/day ~= $150/month), different framing granularity</a:t>
+            </a:r>
+          </a:p>
+          <a:p>
+            <a:pPr lvl="0"/>
+            <a:r>
+              <a:rPr/>
+              <a:t>Outcome: sign-up decision + self-reported affordability + self-reported understandability (both 1-7 Likert)</a:t>
+            </a:r>
+          </a:p>
+        </p:txBody>
+      </p:sp>
+    </p:spTree>
+  </p:cSld>
+</p:sld>
+</file>
+
+<file path=ppt/slides/slide23.xml><?xml version="1.0" encoding="utf-8"?>
+<p:sld xmlns:a="http://schemas.openxmlformats.org/drawingml/2006/main" xmlns:r="http://schemas.openxmlformats.org/officeDocument/2006/relationships" xmlns:p="http://schemas.openxmlformats.org/presentationml/2006/main">
+  <p:cSld>
+    <p:spTree>
+      <p:nvGrpSpPr>
+        <p:cNvPr id="1" name=""/>
+        <p:cNvGrpSpPr/>
+        <p:nvPr/>
+      </p:nvGrpSpPr>
+      <p:grpSpPr>
+        <a:xfrm>
+          <a:off x="0" y="0"/>
+          <a:ext cx="0" cy="0"/>
+          <a:chOff x="0" y="0"/>
+          <a:chExt cx="0" cy="0"/>
+        </a:xfrm>
+      </p:grpSpPr>
+      <p:sp>
+        <p:nvSpPr>
+          <p:cNvPr id="2" name="Title 1"/>
+          <p:cNvSpPr>
+            <a:spLocks noGrp="1"/>
+          </p:cNvSpPr>
+          <p:nvPr>
+            <p:ph type="title"/>
+          </p:nvPr>
+        </p:nvSpPr>
+        <p:spPr/>
+        <p:txBody>
+          <a:bodyPr/>
+          <a:lstStyle/>
+          <a:p>
+            <a:pPr lvl="0" indent="0" marL="0">
+              <a:buNone/>
+            </a:pPr>
+            <a:r>
+              <a:rPr/>
+              <a:t>Pilot: N=20, blinded</a:t>
+            </a:r>
+          </a:p>
+        </p:txBody>
+      </p:sp>
+      <p:sp>
+        <p:nvSpPr>
+          <p:cNvPr id="3" name="Content Placeholder 2"/>
+          <p:cNvSpPr>
+            <a:spLocks noGrp="1"/>
+          </p:cNvSpPr>
+          <p:nvPr>
+            <p:ph idx="1"/>
+          </p:nvPr>
+        </p:nvSpPr>
+        <p:spPr/>
+        <p:txBody>
+          <a:bodyPr/>
+          <a:lstStyle/>
+          <a:p>
+            <a:pPr lvl="0"/>
+            <a:r>
+              <a:rPr/>
+              <a:t>10 subjects/condition, subagent mode, condition labels withheld from the analyst</a:t>
+            </a:r>
+          </a:p>
+          <a:p>
+            <a:pPr lvl="0"/>
+            <a:r>
+              <a:rPr/>
+              <a:t>Sign-up rate: 80% vs. 40% – directionally large, but only marginal at this N (p ~ .08 across all three outcomes)</a:t>
+            </a:r>
+          </a:p>
+          <a:p>
+            <a:pPr lvl="0"/>
+            <a:r>
+              <a:rPr/>
+              <a:t>Purpose of a pilot: catch pipeline problems and get a directional read cheaply before committing to a larger run</a:t>
+            </a:r>
+          </a:p>
+        </p:txBody>
+      </p:sp>
+    </p:spTree>
+  </p:cSld>
+</p:sld>
+</file>
+
+<file path=ppt/slides/slide24.xml><?xml version="1.0" encoding="utf-8"?>
+<p:sld xmlns:a="http://schemas.openxmlformats.org/drawingml/2006/main" xmlns:r="http://schemas.openxmlformats.org/officeDocument/2006/relationships" xmlns:p="http://schemas.openxmlformats.org/presentationml/2006/main">
+  <p:cSld>
+    <p:spTree>
+      <p:nvGrpSpPr>
+        <p:cNvPr id="1" name=""/>
+        <p:cNvGrpSpPr/>
+        <p:nvPr/>
+      </p:nvGrpSpPr>
+      <p:grpSpPr>
+        <a:xfrm>
+          <a:off x="0" y="0"/>
+          <a:ext cx="0" cy="0"/>
+          <a:chOff x="0" y="0"/>
+          <a:chExt cx="0" cy="0"/>
+        </a:xfrm>
+      </p:grpSpPr>
+      <p:sp>
+        <p:nvSpPr>
+          <p:cNvPr id="2" name="Title 1"/>
+          <p:cNvSpPr>
+            <a:spLocks noGrp="1"/>
+          </p:cNvSpPr>
+          <p:nvPr>
+            <p:ph type="title"/>
+          </p:nvPr>
+        </p:nvSpPr>
+        <p:spPr/>
+        <p:txBody>
+          <a:bodyPr/>
+          <a:lstStyle/>
+          <a:p>
+            <a:pPr lvl="0" indent="0" marL="0">
+              <a:buNone/>
+            </a:pPr>
+            <a:r>
+              <a:rPr/>
+              <a:t>Unblind, then decide to scale</a:t>
+            </a:r>
+          </a:p>
+        </p:txBody>
+      </p:sp>
+      <p:sp>
+        <p:nvSpPr>
+          <p:cNvPr id="3" name="Content Placeholder 2"/>
+          <p:cNvSpPr>
+            <a:spLocks noGrp="1"/>
+          </p:cNvSpPr>
+          <p:nvPr>
+            <p:ph idx="1"/>
+          </p:nvPr>
+        </p:nvSpPr>
+        <p:spPr/>
+        <p:txBody>
+          <a:bodyPr/>
+          <a:lstStyle/>
+          <a:p>
+            <a:pPr lvl="0"/>
+            <a:r>
+              <a:rPr/>
+              <a:t>Researcher reveals: Condition 1 = treatment ($5/day), Condition 2 = control ($150/month)</a:t>
+            </a:r>
+          </a:p>
+          <a:p>
+            <a:pPr lvl="0"/>
+            <a:r>
+              <a:rPr/>
+              <a:t>Re-run regressions with the correct reference category – coefficients flip sign as expected, same magnitude</a:t>
+            </a:r>
+          </a:p>
+          <a:p>
+            <a:pPr lvl="0"/>
+            <a:r>
+              <a:rPr/>
+              <a:t>Decision: scale to N=400 (200/condition) to get a properly powered read</a:t>
+            </a:r>
+          </a:p>
+        </p:txBody>
+      </p:sp>
+    </p:spTree>
+  </p:cSld>
+</p:sld>
+</file>
+
+<file path=ppt/slides/slide25.xml><?xml version="1.0" encoding="utf-8"?>
+<p:sld xmlns:a="http://schemas.openxmlformats.org/drawingml/2006/main" xmlns:r="http://schemas.openxmlformats.org/officeDocument/2006/relationships" xmlns:p="http://schemas.openxmlformats.org/presentationml/2006/main">
+  <p:cSld>
+    <p:spTree>
+      <p:nvGrpSpPr>
+        <p:cNvPr id="1" name=""/>
+        <p:cNvGrpSpPr/>
+        <p:nvPr/>
+      </p:nvGrpSpPr>
+      <p:grpSpPr>
+        <a:xfrm>
+          <a:off x="0" y="0"/>
+          <a:ext cx="0" cy="0"/>
+          <a:chOff x="0" y="0"/>
+          <a:chExt cx="0" cy="0"/>
+        </a:xfrm>
+      </p:grpSpPr>
+      <p:sp>
+        <p:nvSpPr>
+          <p:cNvPr id="2" name="Title 1"/>
+          <p:cNvSpPr>
+            <a:spLocks noGrp="1"/>
+          </p:cNvSpPr>
+          <p:nvPr>
+            <p:ph type="title"/>
+          </p:nvPr>
+        </p:nvSpPr>
+        <p:spPr/>
+        <p:txBody>
+          <a:bodyPr/>
+          <a:lstStyle/>
+          <a:p>
+            <a:pPr lvl="0" indent="0" marL="0">
+              <a:buNone/>
+            </a:pPr>
+            <a:r>
+              <a:rPr/>
+              <a:t>Full-scale results (N=400)</a:t>
+            </a:r>
+          </a:p>
+        </p:txBody>
+      </p:sp>
+      <p:sp>
+        <p:nvSpPr>
+          <p:cNvPr id="3" name="Content Placeholder 2"/>
+          <p:cNvSpPr>
+            <a:spLocks noGrp="1"/>
+          </p:cNvSpPr>
+          <p:nvPr>
+            <p:ph idx="1"/>
+          </p:nvPr>
+        </p:nvSpPr>
+        <p:spPr/>
+        <p:txBody>
+          <a:bodyPr/>
+          <a:lstStyle/>
+          <a:p>
+            <a:pPr lvl="0"/>
+            <a:r>
+              <a:rPr/>
+              <a:t>Sign-up rate: </a:t>
+            </a:r>
+            <a:r>
+              <a:rPr b="1"/>
+              <a:t>64.5% (treatment) vs. 45.5% (control)</a:t>
+            </a:r>
+            <a:r>
+              <a:rPr/>
+              <a:t>, logit B=0.82, </a:t>
+            </a:r>
+            <a:r>
+              <a:rPr i="1"/>
+              <a:t>p</a:t>
+            </a:r>
+            <a:r>
+              <a:rPr/>
+              <a:t>&lt;.001</a:t>
+            </a:r>
+          </a:p>
+          <a:p>
+            <a:pPr lvl="0"/>
+            <a:r>
+              <a:rPr/>
+              <a:t>Affordability rating: 4.66 vs. 4.05, </a:t>
+            </a:r>
+            <a:r>
+              <a:rPr i="1"/>
+              <a:t>p</a:t>
+            </a:r>
+            <a:r>
+              <a:rPr/>
+              <a:t>&lt;.001</a:t>
+            </a:r>
+          </a:p>
+          <a:p>
+            <a:pPr lvl="0"/>
+            <a:r>
+              <a:rPr/>
+              <a:t>Understandability rating: 5.35 vs. 5.31, </a:t>
+            </a:r>
+            <a:r>
+              <a:rPr i="1"/>
+              <a:t>p</a:t>
+            </a:r>
+            <a:r>
+              <a:rPr/>
+              <a:t>=.70 (no effect)</a:t>
+            </a:r>
+          </a:p>
+          <a:p>
+            <a:pPr lvl="0"/>
+            <a:r>
+              <a:rPr/>
+              <a:t>Balance check flagged gender as imbalanced (p=.035) – across 6 tests, ~26% chance of at least one false positive; verified main results hold with a gender control</a:t>
+            </a:r>
+          </a:p>
+        </p:txBody>
+      </p:sp>
+    </p:spTree>
+  </p:cSld>
+</p:sld>
+</file>
+
+<file path=ppt/slides/slide26.xml><?xml version="1.0" encoding="utf-8"?>
 <p:sld xmlns:a="http://schemas.openxmlformats.org/drawingml/2006/main" xmlns:r="http://schemas.openxmlformats.org/officeDocument/2006/relationships" xmlns:p="http://schemas.openxmlformats.org/presentationml/2006/main">
   <p:cSld>
     <p:spTree>
@@ -4712,7 +5396,7 @@
 </p:sld>
 </file>
 
-<file path=ppt/slides/slide21.xml><?xml version="1.0" encoding="utf-8"?>
+<file path=ppt/slides/slide27.xml><?xml version="1.0" encoding="utf-8"?>
 <p:sld xmlns:a="http://schemas.openxmlformats.org/drawingml/2006/main" xmlns:r="http://schemas.openxmlformats.org/officeDocument/2006/relationships" xmlns:p="http://schemas.openxmlformats.org/presentationml/2006/main">
   <p:cSld>
     <p:spTree>
@@ -4827,7 +5511,7 @@
 </p:sld>
 </file>
 
-<file path=ppt/slides/slide22.xml><?xml version="1.0" encoding="utf-8"?>
+<file path=ppt/slides/slide28.xml><?xml version="1.0" encoding="utf-8"?>
 <p:sld xmlns:a="http://schemas.openxmlformats.org/drawingml/2006/main" xmlns:r="http://schemas.openxmlformats.org/officeDocument/2006/relationships" xmlns:p="http://schemas.openxmlformats.org/presentationml/2006/main">
   <p:cSld>
     <p:spTree>
@@ -5157,82 +5841,69 @@
             </a:pPr>
             <a:r>
               <a:rPr/>
-              <a:t>Tooling stack</a:t>
-            </a:r>
-          </a:p>
-        </p:txBody>
-      </p:sp>
-      <p:sp>
-        <p:nvSpPr>
-          <p:cNvPr id="3" name="Content Placeholder 2"/>
-          <p:cNvSpPr>
-            <a:spLocks noGrp="1"/>
-          </p:cNvSpPr>
+              <a:t>What it looks like in practice</a:t>
+            </a:r>
+          </a:p>
+        </p:txBody>
+      </p:sp>
+      <p:pic>
+        <p:nvPicPr>
+          <p:cNvPr descr="assets/mockup_setup.png" id="0" name="Picture 1"/>
+          <p:cNvPicPr>
+            <a:picLocks noGrp="1" noChangeAspect="1"/>
+          </p:cNvPicPr>
+          <p:nvPr/>
+        </p:nvPicPr>
+        <p:blipFill>
+          <a:blip r:embed="rId2"/>
+          <a:stretch>
+            <a:fillRect/>
+          </a:stretch>
+        </p:blipFill>
+        <p:spPr bwMode="auto">
+          <a:xfrm>
+            <a:off x="2247900" y="1193800"/>
+            <a:ext cx="4648200" cy="2882900"/>
+          </a:xfrm>
+          <a:prstGeom prst="rect">
+            <a:avLst/>
+          </a:prstGeom>
+          <a:noFill/>
+          <a:ln w="9525">
+            <a:noFill/>
+            <a:headEnd/>
+            <a:tailEnd/>
+          </a:ln>
+        </p:spPr>
+      </p:pic>
+      <p:sp>
+        <p:nvSpPr>
+          <p:cNvPr id="1" name="TextBox 3"/>
+          <p:cNvSpPr txBox="1"/>
           <p:nvPr>
             <p:ph idx="1"/>
           </p:nvPr>
         </p:nvSpPr>
-        <p:spPr/>
-        <p:txBody>
-          <a:bodyPr/>
-          <a:lstStyle/>
-          <a:p>
-            <a:pPr lvl="0"/>
-            <a:r>
-              <a:rPr b="1"/>
-              <a:t>Python</a:t>
-            </a:r>
-            <a:r>
-              <a:rPr/>
-              <a:t> – sampling, statistics, chart generation (pandas, numpy, scipy, statsmodels, matplotlib)</a:t>
-            </a:r>
-          </a:p>
-          <a:p>
-            <a:pPr lvl="0"/>
-            <a:r>
-              <a:rPr b="1"/>
-              <a:t>git + GitHub</a:t>
-            </a:r>
-            <a:r>
-              <a:rPr/>
-              <a:t> – version control, collaboration, backup</a:t>
-            </a:r>
-          </a:p>
-          <a:p>
-            <a:pPr lvl="0"/>
-            <a:r>
-              <a:rPr b="1"/>
-              <a:t>VS Code + Claude Code</a:t>
-            </a:r>
-            <a:r>
-              <a:rPr/>
-              <a:t> – the environment this all runs in</a:t>
-            </a:r>
-          </a:p>
-          <a:p>
-            <a:pPr lvl="0"/>
-            <a:r>
-              <a:rPr b="1"/>
-              <a:t>pandoc</a:t>
-            </a:r>
-            <a:r>
-              <a:rPr/>
-              <a:t> – converts markdown into docx / pptx / pdf (used for writeups, this deck, and the workbook)</a:t>
-            </a:r>
-          </a:p>
-          <a:p>
-            <a:pPr lvl="0"/>
-            <a:r>
-              <a:rPr/>
-              <a:t>All of it installed and configured </a:t>
-            </a:r>
-            <a:r>
-              <a:rPr i="1"/>
-              <a:t>by</a:t>
-            </a:r>
-            <a:r>
-              <a:rPr/>
-              <a:t> Claude Code, conversationally</a:t>
+        <p:spPr>
+          <a:xfrm>
+            <a:off x="457200" y="4076700"/>
+            <a:ext cx="8229600" cy="508000"/>
+          </a:xfrm>
+          <a:prstGeom prst="rect">
+            <a:avLst/>
+          </a:prstGeom>
+          <a:noFill/>
+        </p:spPr>
+        <p:txBody>
+          <a:bodyPr/>
+          <a:lstStyle/>
+          <a:p>
+            <a:pPr lvl="0" indent="0" marL="0" algn="ctr">
+              <a:buNone/>
+            </a:pPr>
+            <a:r>
+              <a:rPr/>
+              <a:t>No shell commands to memorize – you describe the goal in the chat panel and Claude Code does the work.</a:t>
             </a:r>
           </a:p>
         </p:txBody>
@@ -5279,7 +5950,7 @@
             </a:pPr>
             <a:r>
               <a:rPr/>
-              <a:t>Concrete setup, warts and all</a:t>
+              <a:t>How to read the rest of this deck</a:t>
             </a:r>
           </a:p>
         </p:txBody>
@@ -5301,93 +5972,30 @@
           <a:p>
             <a:pPr lvl="0"/>
             <a:r>
-              <a:rPr>
-                <a:latin typeface="Courier"/>
-              </a:rPr>
-              <a:t>python -m venv .venv</a:t>
-            </a:r>
-            <a:r>
-              <a:rPr/>
-              <a:t> then </a:t>
-            </a:r>
-            <a:r>
-              <a:rPr>
-                <a:latin typeface="Courier"/>
-              </a:rPr>
-              <a:t>pip install -r scripts/requirements.txt</a:t>
-            </a:r>
-          </a:p>
-          <a:p>
-            <a:pPr lvl="0"/>
-            <a:r>
-              <a:rPr>
-                <a:latin typeface="Courier"/>
-              </a:rPr>
-              <a:t>git init</a:t>
-            </a:r>
-            <a:r>
-              <a:rPr/>
-              <a:t>, then </a:t>
-            </a:r>
-            <a:r>
-              <a:rPr>
-                <a:latin typeface="Courier"/>
-              </a:rPr>
-              <a:t>gh repo create --private --source=. --push</a:t>
-            </a:r>
-          </a:p>
-          <a:p>
-            <a:pPr lvl="0"/>
-            <a:r>
-              <a:rPr/>
-              <a:t>Real snags hit along the way (useful to know, not just theory):</a:t>
-            </a:r>
-          </a:p>
-          <a:p>
-            <a:pPr lvl="1"/>
-            <a:r>
-              <a:rPr>
-                <a:latin typeface="Courier"/>
-              </a:rPr>
-              <a:t>winget install</a:t>
-            </a:r>
-            <a:r>
-              <a:rPr/>
-              <a:t> needed </a:t>
-            </a:r>
-            <a:r>
-              <a:rPr>
-                <a:latin typeface="Courier"/>
-              </a:rPr>
-              <a:t>--scope user</a:t>
-            </a:r>
-            <a:r>
-              <a:rPr/>
-              <a:t> to dodge an admin-elevation prompt that silently failed in a non-interactive shell</a:t>
-            </a:r>
-          </a:p>
-          <a:p>
-            <a:pPr lvl="1"/>
-            <a:r>
-              <a:rPr/>
-              <a:t>PATH changes don’t persist between separate terminal commands – each one needs its own PATH refresh</a:t>
-            </a:r>
-          </a:p>
-          <a:p>
-            <a:pPr lvl="1"/>
-            <a:r>
-              <a:rPr/>
-              <a:t>pandoc needs </a:t>
-            </a:r>
-            <a:r>
-              <a:rPr>
-                <a:latin typeface="Courier"/>
-              </a:rPr>
-              <a:t>--resource-path</a:t>
-            </a:r>
-            <a:r>
-              <a:rPr/>
-              <a:t> to find images referenced by relative path</a:t>
+              <a:rPr/>
+              <a:t>The next few slides show this same pattern for every research stage: a chat mockup first, plain and simple</a:t>
+            </a:r>
+          </a:p>
+          <a:p>
+            <a:pPr lvl="0"/>
+            <a:r>
+              <a:rPr/>
+              <a:t>Slides marked </a:t>
+            </a:r>
+            <a:r>
+              <a:rPr i="1"/>
+              <a:t>“Under the hood”</a:t>
+            </a:r>
+            <a:r>
+              <a:rPr/>
+              <a:t> are optional depth for the curious – skip them if plain English is all you need</a:t>
+            </a:r>
+          </a:p>
+          <a:p>
+            <a:pPr lvl="0"/>
+            <a:r>
+              <a:rPr/>
+              <a:t>Nothing under the hood is required reading to use the workflow yourself</a:t>
             </a:r>
           </a:p>
         </p:txBody>
@@ -5434,7 +6042,11 @@
             </a:pPr>
             <a:r>
               <a:rPr/>
-              <a:t>Resulting project layout</a:t>
+              <a:t>Tooling stack </a:t>
+            </a:r>
+            <a:r>
+              <a:rPr i="1"/>
+              <a:t>(under the hood)</a:t>
             </a:r>
           </a:p>
         </p:txBody>
@@ -5454,24 +6066,62 @@
           <a:bodyPr/>
           <a:lstStyle/>
           <a:p>
-            <a:pPr lvl="0" indent="0">
-              <a:buNone/>
-            </a:pPr>
-            <a:r>
-              <a:rPr>
-                <a:latin typeface="Courier"/>
-              </a:rPr>
-              <a:t>behavioral-research-env/
-  .claude/skills/          &lt;- one SKILL.md per workflow stage
-  scripts/
-    synthetic_sample/      &lt;- population sampling, batch building
-    analysis/               &lt;- balance check, regression, charts
-  projects/
-    &lt;study-slug&gt;/
-      03_design/            &lt;- stimuli, population spec, variables
-      04_synthetic_test/    &lt;- sampled subjects, responses, data
-      05_analysis/          &lt;- balance report, regressions, charts
-      07_writeup/           &lt;- generated writeup (md + docx)</a:t>
+            <a:pPr lvl="0"/>
+            <a:r>
+              <a:rPr b="1"/>
+              <a:t>Python</a:t>
+            </a:r>
+            <a:r>
+              <a:rPr/>
+              <a:t> – sampling, statistics, chart generation (pandas, numpy, scipy, statsmodels, matplotlib)</a:t>
+            </a:r>
+          </a:p>
+          <a:p>
+            <a:pPr lvl="0"/>
+            <a:r>
+              <a:rPr b="1"/>
+              <a:t>git + GitHub</a:t>
+            </a:r>
+            <a:r>
+              <a:rPr/>
+              <a:t> – version control, collaboration, backup</a:t>
+            </a:r>
+          </a:p>
+          <a:p>
+            <a:pPr lvl="0"/>
+            <a:r>
+              <a:rPr b="1"/>
+              <a:t>VS Code + Claude Code</a:t>
+            </a:r>
+            <a:r>
+              <a:rPr/>
+              <a:t> – the environment this all runs in</a:t>
+            </a:r>
+          </a:p>
+          <a:p>
+            <a:pPr lvl="0"/>
+            <a:r>
+              <a:rPr b="1"/>
+              <a:t>pandoc</a:t>
+            </a:r>
+            <a:r>
+              <a:rPr/>
+              <a:t> – converts markdown into docx / pptx / pdf (used for writeups, this deck, and the workbook)</a:t>
+            </a:r>
+          </a:p>
+          <a:p>
+            <a:pPr lvl="0"/>
+            <a:r>
+              <a:rPr/>
+              <a:t>All of it installed and configured </a:t>
+            </a:r>
+            <a:r>
+              <a:rPr i="1"/>
+              <a:t>by</a:t>
+            </a:r>
+            <a:r>
+              <a:rPr/>
+              <a:t> Claude Code, conversationally – you don’t have to type any of what follows yourself</a:t>
             </a:r>
           </a:p>
         </p:txBody>
@@ -5518,7 +6168,11 @@
             </a:pPr>
             <a:r>
               <a:rPr/>
-              <a:t>The 9-stage behavioral research pipeline</a:t>
+              <a:t>Concrete setup, warts and all </a:t>
+            </a:r>
+            <a:r>
+              <a:rPr i="1"/>
+              <a:t>(under the hood)</a:t>
             </a:r>
           </a:p>
         </p:txBody>
@@ -5538,59 +6192,95 @@
           <a:bodyPr/>
           <a:lstStyle/>
           <a:p>
-            <a:pPr lvl="0" indent="-342900" marL="342900">
-              <a:buAutoNum type="arabicPeriod"/>
-            </a:pPr>
-            <a:r>
-              <a:rPr/>
-              <a:t>Behavioral audit 2. Solution ideation 3. </a:t>
-            </a:r>
-            <a:r>
-              <a:rPr b="1"/>
-              <a:t>Solution design</a:t>
-            </a:r>
-          </a:p>
-          <a:p>
-            <a:pPr lvl="0" indent="-342900" marL="342900">
-              <a:buAutoNum type="arabicPeriod"/>
-            </a:pPr>
-            <a:r>
-              <a:rPr b="1"/>
-              <a:t>Synthetic A/B test</a:t>
-            </a:r>
-            <a:r>
-              <a:rPr/>
-              <a:t> 5. </a:t>
-            </a:r>
-            <a:r>
-              <a:rPr b="1"/>
-              <a:t>Data analysis</a:t>
-            </a:r>
-            <a:r>
-              <a:rPr/>
-              <a:t> 6. Presentation</a:t>
-            </a:r>
-          </a:p>
-          <a:p>
-            <a:pPr lvl="0" indent="-342900" marL="342900">
-              <a:buAutoNum type="arabicPeriod"/>
-            </a:pPr>
-            <a:r>
-              <a:rPr b="1"/>
-              <a:t>Scientific writeup</a:t>
-            </a:r>
-            <a:r>
-              <a:rPr/>
-              <a:t> 8. Revised solution 9. Feedback</a:t>
-            </a:r>
-          </a:p>
-          <a:p>
-            <a:pPr lvl="0" indent="0" marL="0">
-              <a:buNone/>
-            </a:pPr>
-            <a:r>
-              <a:rPr/>
-              <a:t>Bold = built in this workshop’s environment</a:t>
+            <a:pPr lvl="0"/>
+            <a:r>
+              <a:rPr>
+                <a:latin typeface="Courier"/>
+              </a:rPr>
+              <a:t>python -m venv .venv</a:t>
+            </a:r>
+            <a:r>
+              <a:rPr/>
+              <a:t> then </a:t>
+            </a:r>
+            <a:r>
+              <a:rPr>
+                <a:latin typeface="Courier"/>
+              </a:rPr>
+              <a:t>pip install -r scripts/requirements.txt</a:t>
+            </a:r>
+          </a:p>
+          <a:p>
+            <a:pPr lvl="0"/>
+            <a:r>
+              <a:rPr>
+                <a:latin typeface="Courier"/>
+              </a:rPr>
+              <a:t>git init</a:t>
+            </a:r>
+            <a:r>
+              <a:rPr/>
+              <a:t>, then </a:t>
+            </a:r>
+            <a:r>
+              <a:rPr>
+                <a:latin typeface="Courier"/>
+              </a:rPr>
+              <a:t>gh repo create --private --source=. --push</a:t>
+            </a:r>
+          </a:p>
+          <a:p>
+            <a:pPr lvl="0"/>
+            <a:r>
+              <a:rPr/>
+              <a:t>Real snags hit along the way (useful to know, not just theory):</a:t>
+            </a:r>
+          </a:p>
+          <a:p>
+            <a:pPr lvl="1"/>
+            <a:r>
+              <a:rPr>
+                <a:latin typeface="Courier"/>
+              </a:rPr>
+              <a:t>winget install</a:t>
+            </a:r>
+            <a:r>
+              <a:rPr/>
+              <a:t> needed </a:t>
+            </a:r>
+            <a:r>
+              <a:rPr>
+                <a:latin typeface="Courier"/>
+              </a:rPr>
+              <a:t>--scope user</a:t>
+            </a:r>
+            <a:r>
+              <a:rPr/>
+              <a:t> to dodge an admin-elevation prompt that silently failed in a non-interactive shell</a:t>
+            </a:r>
+          </a:p>
+          <a:p>
+            <a:pPr lvl="1"/>
+            <a:r>
+              <a:rPr/>
+              <a:t>PATH changes don’t persist between separate terminal commands – each one needs its own PATH refresh</a:t>
+            </a:r>
+          </a:p>
+          <a:p>
+            <a:pPr lvl="1"/>
+            <a:r>
+              <a:rPr/>
+              <a:t>pandoc needs </a:t>
+            </a:r>
+            <a:r>
+              <a:rPr>
+                <a:latin typeface="Courier"/>
+              </a:rPr>
+              <a:t>--resource-path</a:t>
+            </a:r>
+            <a:r>
+              <a:rPr/>
+              <a:t> to find images referenced by relative path</a:t>
             </a:r>
           </a:p>
         </p:txBody>
@@ -5637,7 +6327,11 @@
             </a:pPr>
             <a:r>
               <a:rPr/>
-              <a:t>Scoping calls: what we built, and why</a:t>
+              <a:t>Resulting project layout </a:t>
+            </a:r>
+            <a:r>
+              <a:rPr i="1"/>
+              <a:t>(under the hood)</a:t>
             </a:r>
           </a:p>
         </p:txBody>
@@ -5657,43 +6351,24 @@
           <a:bodyPr/>
           <a:lstStyle/>
           <a:p>
-            <a:pPr lvl="0"/>
-            <a:r>
-              <a:rPr b="1"/>
-              <a:t>Built</a:t>
-            </a:r>
-            <a:r>
-              <a:rPr/>
-              <a:t>: Stages 3, 4, 5, 7 – the empirical core (design -&gt; test -&gt; analyze -&gt; write up)</a:t>
-            </a:r>
-          </a:p>
-          <a:p>
-            <a:pPr lvl="0"/>
-            <a:r>
-              <a:rPr b="1"/>
-              <a:t>Deferred</a:t>
-            </a:r>
-            <a:r>
-              <a:rPr/>
-              <a:t>: Stages 1, 2, 6, 8, 9 – audit/ideation/presentation/revision/feedback need more conversational nuance than a fixed pipeline</a:t>
-            </a:r>
-          </a:p>
-          <a:p>
-            <a:pPr lvl="0"/>
-            <a:r>
-              <a:rPr b="1"/>
-              <a:t>Deferred within Stage 5</a:t>
-            </a:r>
-            <a:r>
-              <a:rPr/>
-              <a:t>: mediation and moderation analysis – real methods (Query Theory, floodlight analysis), cut for v1 scope, not because they don’t matter</a:t>
-            </a:r>
-          </a:p>
-          <a:p>
-            <a:pPr lvl="0"/>
-            <a:r>
-              <a:rPr/>
-              <a:t>Lesson: scope a v1 tightly around what you can validate end-to-end</a:t>
+            <a:pPr lvl="0" indent="0">
+              <a:buNone/>
+            </a:pPr>
+            <a:r>
+              <a:rPr>
+                <a:latin typeface="Courier"/>
+              </a:rPr>
+              <a:t>behavioral-research-env/
+  .claude/skills/          &lt;- one SKILL.md per workflow stage
+  scripts/
+    synthetic_sample/      &lt;- population sampling, batch building
+    analysis/               &lt;- balance check, regression, charts
+  projects/
+    &lt;study-slug&gt;/
+      03_design/            &lt;- stimuli, population spec, variables
+      04_synthetic_test/    &lt;- sampled subjects, responses, data
+      05_analysis/          &lt;- balance report, regressions, charts
+      07_writeup/           &lt;- generated writeup (md + docx)</a:t>
             </a:r>
           </a:p>
         </p:txBody>

--- a/presentations/2026-workshop/slides.pptx
+++ b/presentations/2026-workshop/slides.pptx
@@ -33,6 +33,8 @@
     <p:sldId id="281" r:id="rId27"/>
     <p:sldId id="282" r:id="rId28"/>
     <p:sldId id="283" r:id="rId29"/>
+    <p:sldId id="284" r:id="rId30"/>
+    <p:sldId id="285" r:id="rId31"/>
   </p:sldIdLst>
   <p:sldSz cx="9144000" cy="5143500" type="screen16x9"/>
   <p:notesSz cx="6858000" cy="9144000"/>
@@ -3255,78 +3257,36 @@
           </a:p>
         </p:txBody>
       </p:sp>
-      <p:sp>
-        <p:nvSpPr>
-          <p:cNvPr id="3" name="Content Placeholder 2"/>
-          <p:cNvSpPr>
-            <a:spLocks noGrp="1"/>
-          </p:cNvSpPr>
-          <p:nvPr>
-            <p:ph idx="1"/>
-          </p:nvPr>
-        </p:nvSpPr>
-        <p:spPr/>
-        <p:txBody>
-          <a:bodyPr/>
-          <a:lstStyle/>
-          <a:p>
-            <a:pPr lvl="0" indent="-342900" marL="342900">
-              <a:buAutoNum type="arabicPeriod"/>
-            </a:pPr>
-            <a:r>
-              <a:rPr/>
-              <a:t>Behavioral audit 2. Solution ideation 3. </a:t>
-            </a:r>
-            <a:r>
-              <a:rPr b="1"/>
-              <a:t>Solution design</a:t>
-            </a:r>
-          </a:p>
-          <a:p>
-            <a:pPr lvl="0" indent="-342900" marL="342900">
-              <a:buAutoNum type="arabicPeriod"/>
-            </a:pPr>
-            <a:r>
-              <a:rPr b="1"/>
-              <a:t>Synthetic A/B test</a:t>
-            </a:r>
-            <a:r>
-              <a:rPr/>
-              <a:t> 5. </a:t>
-            </a:r>
-            <a:r>
-              <a:rPr b="1"/>
-              <a:t>Data analysis</a:t>
-            </a:r>
-            <a:r>
-              <a:rPr/>
-              <a:t> 6. Presentation</a:t>
-            </a:r>
-          </a:p>
-          <a:p>
-            <a:pPr lvl="0" indent="-342900" marL="342900">
-              <a:buAutoNum type="arabicPeriod"/>
-            </a:pPr>
-            <a:r>
-              <a:rPr b="1"/>
-              <a:t>Scientific writeup</a:t>
-            </a:r>
-            <a:r>
-              <a:rPr/>
-              <a:t> 8. Revised solution 9. Feedback</a:t>
-            </a:r>
-          </a:p>
-          <a:p>
-            <a:pPr lvl="0" indent="0" marL="0">
-              <a:buNone/>
-            </a:pPr>
-            <a:r>
-              <a:rPr/>
-              <a:t>Bold = built in this workshop’s environment</a:t>
-            </a:r>
-          </a:p>
-        </p:txBody>
-      </p:sp>
+      <p:pic>
+        <p:nvPicPr>
+          <p:cNvPr descr="assets/pipeline_diagram.png" id="0" name="Picture 1"/>
+          <p:cNvPicPr>
+            <a:picLocks noGrp="1" noChangeAspect="1"/>
+          </p:cNvPicPr>
+          <p:nvPr/>
+        </p:nvPicPr>
+        <p:blipFill>
+          <a:blip r:embed="rId2"/>
+          <a:stretch>
+            <a:fillRect/>
+          </a:stretch>
+        </p:blipFill>
+        <p:spPr bwMode="auto">
+          <a:xfrm>
+            <a:off x="876300" y="1193800"/>
+            <a:ext cx="7404100" cy="3390900"/>
+          </a:xfrm>
+          <a:prstGeom prst="rect">
+            <a:avLst/>
+          </a:prstGeom>
+          <a:noFill/>
+          <a:ln w="9525">
+            <a:noFill/>
+            <a:headEnd/>
+            <a:tailEnd/>
+          </a:ln>
+        </p:spPr>
+      </p:pic>
     </p:spTree>
   </p:cSld>
 </p:sld>
@@ -3553,6 +3513,148 @@
 </file>
 
 <file path=ppt/slides/slide13.xml><?xml version="1.0" encoding="utf-8"?>
+<p:sld xmlns:a="http://schemas.openxmlformats.org/drawingml/2006/main" xmlns:r="http://schemas.openxmlformats.org/officeDocument/2006/relationships" xmlns:p="http://schemas.openxmlformats.org/presentationml/2006/main">
+  <p:cSld>
+    <p:spTree>
+      <p:nvGrpSpPr>
+        <p:cNvPr id="1" name=""/>
+        <p:cNvGrpSpPr/>
+        <p:nvPr/>
+      </p:nvGrpSpPr>
+      <p:grpSpPr>
+        <a:xfrm>
+          <a:off x="0" y="0"/>
+          <a:ext cx="0" cy="0"/>
+          <a:chOff x="0" y="0"/>
+          <a:chExt cx="0" cy="0"/>
+        </a:xfrm>
+      </p:grpSpPr>
+      <p:sp>
+        <p:nvSpPr>
+          <p:cNvPr id="2" name="Title 1"/>
+          <p:cNvSpPr>
+            <a:spLocks noGrp="1"/>
+          </p:cNvSpPr>
+          <p:nvPr>
+            <p:ph type="title"/>
+          </p:nvPr>
+        </p:nvSpPr>
+        <p:spPr/>
+        <p:txBody>
+          <a:bodyPr/>
+          <a:lstStyle/>
+          <a:p>
+            <a:pPr lvl="0" indent="0" marL="0">
+              <a:buNone/>
+            </a:pPr>
+            <a:r>
+              <a:rPr/>
+              <a:t>What a Skill actually looks like</a:t>
+            </a:r>
+          </a:p>
+        </p:txBody>
+      </p:sp>
+      <p:sp>
+        <p:nvSpPr>
+          <p:cNvPr id="3" name="Content Placeholder 2"/>
+          <p:cNvSpPr>
+            <a:spLocks noGrp="1"/>
+          </p:cNvSpPr>
+          <p:nvPr>
+            <p:ph idx="1"/>
+          </p:nvPr>
+        </p:nvSpPr>
+        <p:spPr/>
+        <p:txBody>
+          <a:bodyPr/>
+          <a:lstStyle/>
+          <a:p>
+            <a:pPr lvl="0" indent="0" marL="0">
+              <a:buNone/>
+            </a:pPr>
+            <a:r>
+              <a:rPr/>
+              <a:t>This project’s real </a:t>
+            </a:r>
+            <a:r>
+              <a:rPr>
+                <a:latin typeface="Courier"/>
+              </a:rPr>
+              <a:t>behavioral-design/SKILL.md</a:t>
+            </a:r>
+            <a:r>
+              <a:rPr/>
+              <a:t> (trimmed):</a:t>
+            </a:r>
+          </a:p>
+          <a:p>
+            <a:pPr lvl="0" indent="0">
+              <a:buNone/>
+            </a:pPr>
+            <a:r>
+              <a:rPr>
+                <a:latin typeface="Courier"/>
+              </a:rPr>
+              <a:t>---
+name: behavioral-design
+description: Stage 3 of the behavioral research workflow. Use when
+  the user wants to set up a control-vs-treatment behavioral test...
+---
+## Required inputs
+1. Control condition stimulus
+2. Treatment condition stimulus
+3. Population to sample
+4. Outcome variable
+Do not ask about idea generation, alternative conditions, or design
+strategy -- there is exactly one control and one treatment condition.</a:t>
+            </a:r>
+          </a:p>
+          <a:p>
+            <a:pPr lvl="0"/>
+            <a:r>
+              <a:rPr>
+                <a:latin typeface="Courier"/>
+              </a:rPr>
+              <a:t>name</a:t>
+            </a:r>
+            <a:r>
+              <a:rPr/>
+              <a:t> + </a:t>
+            </a:r>
+            <a:r>
+              <a:rPr>
+                <a:latin typeface="Courier"/>
+              </a:rPr>
+              <a:t>description</a:t>
+            </a:r>
+            <a:r>
+              <a:rPr/>
+              <a:t> tell Claude Code </a:t>
+            </a:r>
+            <a:r>
+              <a:rPr i="1"/>
+              <a:t>when</a:t>
+            </a:r>
+            <a:r>
+              <a:rPr/>
+              <a:t> to use this skill</a:t>
+            </a:r>
+          </a:p>
+          <a:p>
+            <a:pPr lvl="0"/>
+            <a:r>
+              <a:rPr/>
+              <a:t>The body is plain-English instructions – not code</a:t>
+            </a:r>
+          </a:p>
+        </p:txBody>
+      </p:sp>
+    </p:spTree>
+  </p:cSld>
+</p:sld>
+</file>
+
+<file path=ppt/slides/slide14.xml><?xml version="1.0" encoding="utf-8"?>
 <p:sld xmlns:a="http://schemas.openxmlformats.org/drawingml/2006/main" xmlns:r="http://schemas.openxmlformats.org/officeDocument/2006/relationships" xmlns:p="http://schemas.openxmlformats.org/presentationml/2006/main">
   <p:cSld>
     <p:spTree>
@@ -3661,7 +3763,7 @@
 </p:sld>
 </file>
 
-<file path=ppt/slides/slide14.xml><?xml version="1.0" encoding="utf-8"?>
+<file path=ppt/slides/slide15.xml><?xml version="1.0" encoding="utf-8"?>
 <p:sld xmlns:a="http://schemas.openxmlformats.org/drawingml/2006/main" xmlns:r="http://schemas.openxmlformats.org/officeDocument/2006/relationships" xmlns:p="http://schemas.openxmlformats.org/presentationml/2006/main">
   <p:cSld>
     <p:spTree>
@@ -3800,7 +3902,7 @@
 </p:sld>
 </file>
 
-<file path=ppt/slides/slide15.xml><?xml version="1.0" encoding="utf-8"?>
+<file path=ppt/slides/slide16.xml><?xml version="1.0" encoding="utf-8"?>
 <p:sld xmlns:a="http://schemas.openxmlformats.org/drawingml/2006/main" xmlns:r="http://schemas.openxmlformats.org/officeDocument/2006/relationships" xmlns:p="http://schemas.openxmlformats.org/presentationml/2006/main">
   <p:cSld>
     <p:spTree>
@@ -3909,109 +4011,6 @@
 </p:sld>
 </file>
 
-<file path=ppt/slides/slide16.xml><?xml version="1.0" encoding="utf-8"?>
-<p:sld xmlns:a="http://schemas.openxmlformats.org/drawingml/2006/main" xmlns:r="http://schemas.openxmlformats.org/officeDocument/2006/relationships" xmlns:p="http://schemas.openxmlformats.org/presentationml/2006/main">
-  <p:cSld>
-    <p:spTree>
-      <p:nvGrpSpPr>
-        <p:cNvPr id="1" name=""/>
-        <p:cNvGrpSpPr/>
-        <p:nvPr/>
-      </p:nvGrpSpPr>
-      <p:grpSpPr>
-        <a:xfrm>
-          <a:off x="0" y="0"/>
-          <a:ext cx="0" cy="0"/>
-          <a:chOff x="0" y="0"/>
-          <a:chExt cx="0" cy="0"/>
-        </a:xfrm>
-      </p:grpSpPr>
-      <p:sp>
-        <p:nvSpPr>
-          <p:cNvPr id="2" name="Title 1"/>
-          <p:cNvSpPr>
-            <a:spLocks noGrp="1"/>
-          </p:cNvSpPr>
-          <p:nvPr>
-            <p:ph type="title"/>
-          </p:nvPr>
-        </p:nvSpPr>
-        <p:spPr/>
-        <p:txBody>
-          <a:bodyPr/>
-          <a:lstStyle/>
-          <a:p>
-            <a:pPr lvl="0" indent="0" marL="0">
-              <a:buNone/>
-            </a:pPr>
-            <a:r>
-              <a:rPr/>
-              <a:t>Stage 4: population sampling </a:t>
-            </a:r>
-            <a:r>
-              <a:rPr i="1"/>
-              <a:t>(under the hood)</a:t>
-            </a:r>
-          </a:p>
-        </p:txBody>
-      </p:sp>
-      <p:sp>
-        <p:nvSpPr>
-          <p:cNvPr id="3" name="Content Placeholder 2"/>
-          <p:cNvSpPr>
-            <a:spLocks noGrp="1"/>
-          </p:cNvSpPr>
-          <p:nvPr>
-            <p:ph idx="1"/>
-          </p:nvPr>
-        </p:nvSpPr>
-        <p:spPr/>
-        <p:txBody>
-          <a:bodyPr/>
-          <a:lstStyle/>
-          <a:p>
-            <a:pPr lvl="0"/>
-            <a:r>
-              <a:rPr/>
-              <a:t>Demographics + individual differences sampled from researcher-specified means/SDs (age, income, financial literacy, numeracy…)</a:t>
-            </a:r>
-          </a:p>
-          <a:p>
-            <a:pPr lvl="0"/>
-            <a:r>
-              <a:rPr/>
-              <a:t>Correlated variables drawn via a </a:t>
-            </a:r>
-            <a:r>
-              <a:rPr b="1"/>
-              <a:t>Gaussian copula</a:t>
-            </a:r>
-            <a:r>
-              <a:rPr/>
-              <a:t> so specified correlations (e.g. income &lt;-&gt; financial literacy) are respected</a:t>
-            </a:r>
-          </a:p>
-          <a:p>
-            <a:pPr lvl="0"/>
-            <a:r>
-              <a:rPr/>
-              <a:t>Ordinal/count variables (income bracket, literacy score) rounded to valid values</a:t>
-            </a:r>
-          </a:p>
-          <a:p>
-            <a:pPr lvl="0"/>
-            <a:r>
-              <a:rPr/>
-              <a:t>Random, independent assignment to condition – same mechanics as a real RCT</a:t>
-            </a:r>
-          </a:p>
-        </p:txBody>
-      </p:sp>
-    </p:spTree>
-  </p:cSld>
-</p:sld>
-</file>
-
 <file path=ppt/slides/slide17.xml><?xml version="1.0" encoding="utf-8"?>
 <p:sld xmlns:a="http://schemas.openxmlformats.org/drawingml/2006/main" xmlns:r="http://schemas.openxmlformats.org/officeDocument/2006/relationships" xmlns:p="http://schemas.openxmlformats.org/presentationml/2006/main">
   <p:cSld>
@@ -4049,7 +4048,7 @@
             </a:pPr>
             <a:r>
               <a:rPr/>
-              <a:t>Stage 4: subagent batching + blinding </a:t>
+              <a:t>Stage 4: population sampling </a:t>
             </a:r>
             <a:r>
               <a:rPr i="1"/>
@@ -4076,55 +4075,36 @@
             <a:pPr lvl="0"/>
             <a:r>
               <a:rPr/>
-              <a:t>Each </a:t>
+              <a:t>Demographics + individual differences sampled from researcher-specified means/SDs (age, income, financial literacy, numeracy…)</a:t>
+            </a:r>
+          </a:p>
+          <a:p>
+            <a:pPr lvl="0"/>
+            <a:r>
+              <a:rPr/>
+              <a:t>Correlated variables drawn via a </a:t>
             </a:r>
             <a:r>
               <a:rPr b="1"/>
-              <a:t>subagent</a:t>
-            </a:r>
-            <a:r>
-              <a:rPr/>
-              <a:t> simulates a batch of ~10 subjects in one call – batching matters:</a:t>
-            </a:r>
-          </a:p>
-          <a:p>
-            <a:pPr lvl="1"/>
-            <a:r>
-              <a:rPr/>
-              <a:t>Batch size 2: ~9,875 tokens/subject</a:t>
-            </a:r>
-          </a:p>
-          <a:p>
-            <a:pPr lvl="1"/>
-            <a:r>
-              <a:rPr/>
-              <a:t>Batch size 10: ~2,588 tokens/subject (</a:t>
-            </a:r>
-            <a:r>
-              <a:rPr b="1"/>
-              <a:t>~4x more efficient</a:t>
-            </a:r>
-            <a:r>
-              <a:rPr/>
-              <a:t>)</a:t>
-            </a:r>
-          </a:p>
-          <a:p>
-            <a:pPr lvl="0"/>
-            <a:r>
-              <a:rPr/>
-              <a:t>Subjects respond in-persona based on their sampled profile, not as “an AI”</a:t>
-            </a:r>
-          </a:p>
-          <a:p>
-            <a:pPr lvl="0"/>
-            <a:r>
-              <a:rPr b="1"/>
-              <a:t>Blinding feature</a:t>
-            </a:r>
-            <a:r>
-              <a:rPr/>
-              <a:t>: conditions can be tracked under neutral labels (Condition A/B) until the researcher chooses to reveal which is treatment – avoids analyst bias</a:t>
+              <a:t>Gaussian copula</a:t>
+            </a:r>
+            <a:r>
+              <a:rPr/>
+              <a:t> so specified correlations (e.g. income &lt;-&gt; financial literacy) are respected</a:t>
+            </a:r>
+          </a:p>
+          <a:p>
+            <a:pPr lvl="0"/>
+            <a:r>
+              <a:rPr/>
+              <a:t>Ordinal/count variables (income bracket, literacy score) rounded to valid values</a:t>
+            </a:r>
+          </a:p>
+          <a:p>
+            <a:pPr lvl="0"/>
+            <a:r>
+              <a:rPr/>
+              <a:t>Random, independent assignment to condition – same mechanics as a real RCT</a:t>
             </a:r>
           </a:p>
         </p:txBody>
@@ -4135,6 +4115,632 @@
 </file>
 
 <file path=ppt/slides/slide18.xml><?xml version="1.0" encoding="utf-8"?>
+<p:sld xmlns:a="http://schemas.openxmlformats.org/drawingml/2006/main" xmlns:r="http://schemas.openxmlformats.org/officeDocument/2006/relationships" xmlns:p="http://schemas.openxmlformats.org/presentationml/2006/main">
+  <p:cSld>
+    <p:spTree>
+      <p:nvGrpSpPr>
+        <p:cNvPr id="1" name=""/>
+        <p:cNvGrpSpPr/>
+        <p:nvPr/>
+      </p:nvGrpSpPr>
+      <p:grpSpPr>
+        <a:xfrm>
+          <a:off x="0" y="0"/>
+          <a:ext cx="0" cy="0"/>
+          <a:chOff x="0" y="0"/>
+          <a:chExt cx="0" cy="0"/>
+        </a:xfrm>
+      </p:grpSpPr>
+      <p:sp>
+        <p:nvSpPr>
+          <p:cNvPr id="2" name="Title 1"/>
+          <p:cNvSpPr>
+            <a:spLocks noGrp="1"/>
+          </p:cNvSpPr>
+          <p:nvPr>
+            <p:ph type="title"/>
+          </p:nvPr>
+        </p:nvSpPr>
+        <p:spPr/>
+        <p:txBody>
+          <a:bodyPr/>
+          <a:lstStyle/>
+          <a:p>
+            <a:pPr lvl="0" indent="0" marL="0">
+              <a:buNone/>
+            </a:pPr>
+            <a:r>
+              <a:rPr/>
+              <a:t>Stage 4: subagent batching + blinding </a:t>
+            </a:r>
+            <a:r>
+              <a:rPr i="1"/>
+              <a:t>(under the hood)</a:t>
+            </a:r>
+          </a:p>
+        </p:txBody>
+      </p:sp>
+      <p:sp>
+        <p:nvSpPr>
+          <p:cNvPr id="3" name="Content Placeholder 2"/>
+          <p:cNvSpPr>
+            <a:spLocks noGrp="1"/>
+          </p:cNvSpPr>
+          <p:nvPr>
+            <p:ph idx="1"/>
+          </p:nvPr>
+        </p:nvSpPr>
+        <p:spPr/>
+        <p:txBody>
+          <a:bodyPr/>
+          <a:lstStyle/>
+          <a:p>
+            <a:pPr lvl="0"/>
+            <a:r>
+              <a:rPr/>
+              <a:t>Each </a:t>
+            </a:r>
+            <a:r>
+              <a:rPr b="1"/>
+              <a:t>subagent</a:t>
+            </a:r>
+            <a:r>
+              <a:rPr/>
+              <a:t> simulates a batch of ~10 subjects in one call – batching matters:</a:t>
+            </a:r>
+          </a:p>
+          <a:p>
+            <a:pPr lvl="1"/>
+            <a:r>
+              <a:rPr/>
+              <a:t>Batch size 2: ~9,875 tokens/subject</a:t>
+            </a:r>
+          </a:p>
+          <a:p>
+            <a:pPr lvl="1"/>
+            <a:r>
+              <a:rPr/>
+              <a:t>Batch size 10: ~2,588 tokens/subject (</a:t>
+            </a:r>
+            <a:r>
+              <a:rPr b="1"/>
+              <a:t>~4x more efficient</a:t>
+            </a:r>
+            <a:r>
+              <a:rPr/>
+              <a:t>)</a:t>
+            </a:r>
+          </a:p>
+          <a:p>
+            <a:pPr lvl="0"/>
+            <a:r>
+              <a:rPr/>
+              <a:t>Subjects respond in-persona based on their sampled profile, not as “an AI”</a:t>
+            </a:r>
+          </a:p>
+          <a:p>
+            <a:pPr lvl="0"/>
+            <a:r>
+              <a:rPr b="1"/>
+              <a:t>Blinding feature</a:t>
+            </a:r>
+            <a:r>
+              <a:rPr/>
+              <a:t>: conditions can be tracked under neutral labels (Condition A/B) until the researcher chooses to reveal which is treatment – avoids analyst bias</a:t>
+            </a:r>
+          </a:p>
+        </p:txBody>
+      </p:sp>
+    </p:spTree>
+  </p:cSld>
+</p:sld>
+</file>
+
+<file path=ppt/slides/slide19.xml><?xml version="1.0" encoding="utf-8"?>
+<p:sld xmlns:a="http://schemas.openxmlformats.org/drawingml/2006/main" xmlns:r="http://schemas.openxmlformats.org/officeDocument/2006/relationships" xmlns:p="http://schemas.openxmlformats.org/presentationml/2006/main">
+  <p:cSld>
+    <p:spTree>
+      <p:nvGrpSpPr>
+        <p:cNvPr id="1" name=""/>
+        <p:cNvGrpSpPr/>
+        <p:nvPr/>
+      </p:nvGrpSpPr>
+      <p:grpSpPr>
+        <a:xfrm>
+          <a:off x="0" y="0"/>
+          <a:ext cx="0" cy="0"/>
+          <a:chOff x="0" y="0"/>
+          <a:chExt cx="0" cy="0"/>
+        </a:xfrm>
+      </p:grpSpPr>
+      <p:sp>
+        <p:nvSpPr>
+          <p:cNvPr id="2" name="Title 1"/>
+          <p:cNvSpPr>
+            <a:spLocks noGrp="1"/>
+          </p:cNvSpPr>
+          <p:nvPr>
+            <p:ph type="title"/>
+          </p:nvPr>
+        </p:nvSpPr>
+        <p:spPr>
+          <a:xfrm>
+            <a:off x="457201" y="204787"/>
+            <a:ext cx="3008313" cy="871538"/>
+          </a:xfrm>
+        </p:spPr>
+        <p:txBody>
+          <a:bodyPr/>
+          <a:lstStyle/>
+          <a:p>
+            <a:pPr lvl="0" indent="0" marL="0">
+              <a:buNone/>
+            </a:pPr>
+            <a:r>
+              <a:rPr/>
+              <a:t>Stage 4: what the data actually looks like </a:t>
+            </a:r>
+            <a:r>
+              <a:rPr i="1"/>
+              <a:t>(under the hood)</a:t>
+            </a:r>
+          </a:p>
+        </p:txBody>
+      </p:sp>
+      <p:sp>
+        <p:nvSpPr>
+          <p:cNvPr id="4" name="Text Placeholder 3"/>
+          <p:cNvSpPr>
+            <a:spLocks noGrp="1"/>
+          </p:cNvSpPr>
+          <p:nvPr>
+            <p:ph idx="2" sz="half" type="body"/>
+          </p:nvPr>
+        </p:nvSpPr>
+        <p:spPr/>
+        <p:txBody>
+          <a:bodyPr/>
+          <a:lstStyle/>
+          <a:p>
+            <a:pPr lvl="0" indent="0" marL="0">
+              <a:buNone/>
+            </a:pPr>
+            <a:r>
+              <a:rPr/>
+              <a:t>Every simulated subject becomes one row of </a:t>
+            </a:r>
+            <a:r>
+              <a:rPr>
+                <a:latin typeface="Courier"/>
+              </a:rPr>
+              <a:t>subjects_data.csv</a:t>
+            </a:r>
+            <a:r>
+              <a:rPr/>
+              <a:t> (real rows shown, from this workshop’s own N=400 run):</a:t>
+            </a:r>
+          </a:p>
+        </p:txBody>
+      </p:sp>
+      <p:graphicFrame>
+        <p:nvGraphicFramePr>
+          <p:cNvPr id="6" name="Content Placeholder 5"/>
+          <p:cNvGraphicFramePr>
+            <a:graphicFrameLocks noGrp="1"/>
+          </p:cNvGraphicFramePr>
+          <p:nvPr>
+            <p:ph idx="1"/>
+          </p:nvPr>
+        </p:nvGraphicFramePr>
+        <p:xfrm>
+          <a:off x="3568700" y="203200"/>
+          <a:ext cx="5105400" cy="4381500"/>
+        </p:xfrm>
+        <a:graphic>
+          <a:graphicData uri="http://schemas.openxmlformats.org/drawingml/2006/table">
+            <a:tbl>
+              <a:tblPr firstRow="1" bandRow="1">
+                <a:tableStyleId>{5C22544A-7EE6-4342-B048-85BDC9FD1C3A}</a:tableStyleId>
+              </a:tblPr>
+              <a:tblGrid>
+                <a:gridCol w="850900"/>
+                <a:gridCol w="850900"/>
+                <a:gridCol w="850900"/>
+                <a:gridCol w="850900"/>
+                <a:gridCol w="850900"/>
+                <a:gridCol w="850900"/>
+              </a:tblGrid>
+              <a:tr h="0">
+                <a:tc>
+                  <a:txBody>
+                    <a:bodyPr/>
+                    <a:lstStyle/>
+                    <a:p>
+                      <a:pPr lvl="0" indent="0" marL="0">
+                        <a:buNone/>
+                      </a:pPr>
+                      <a:r>
+                        <a:rPr/>
+                        <a:t>subject_id</a:t>
+                      </a:r>
+                    </a:p>
+                  </a:txBody>
+                  <a:tcPr/>
+                </a:tc>
+                <a:tc>
+                  <a:txBody>
+                    <a:bodyPr/>
+                    <a:lstStyle/>
+                    <a:p>
+                      <a:pPr lvl="0" indent="0" marL="0">
+                        <a:buNone/>
+                      </a:pPr>
+                      <a:r>
+                        <a:rPr/>
+                        <a:t>age</a:t>
+                      </a:r>
+                    </a:p>
+                  </a:txBody>
+                  <a:tcPr/>
+                </a:tc>
+                <a:tc>
+                  <a:txBody>
+                    <a:bodyPr/>
+                    <a:lstStyle/>
+                    <a:p>
+                      <a:pPr lvl="0" indent="0" marL="0">
+                        <a:buNone/>
+                      </a:pPr>
+                      <a:r>
+                        <a:rPr/>
+                        <a:t>condition</a:t>
+                      </a:r>
+                    </a:p>
+                  </a:txBody>
+                  <a:tcPr/>
+                </a:tc>
+                <a:tc>
+                  <a:txBody>
+                    <a:bodyPr/>
+                    <a:lstStyle/>
+                    <a:p>
+                      <a:pPr lvl="0" indent="0" marL="0">
+                        <a:buNone/>
+                      </a:pPr>
+                      <a:r>
+                        <a:rPr/>
+                        <a:t>choice</a:t>
+                      </a:r>
+                    </a:p>
+                  </a:txBody>
+                  <a:tcPr/>
+                </a:tc>
+                <a:tc>
+                  <a:txBody>
+                    <a:bodyPr/>
+                    <a:lstStyle/>
+                    <a:p>
+                      <a:pPr lvl="0" indent="0" marL="0">
+                        <a:buNone/>
+                      </a:pPr>
+                      <a:r>
+                        <a:rPr/>
+                        <a:t>affordability</a:t>
+                      </a:r>
+                    </a:p>
+                  </a:txBody>
+                  <a:tcPr/>
+                </a:tc>
+                <a:tc>
+                  <a:txBody>
+                    <a:bodyPr/>
+                    <a:lstStyle/>
+                    <a:p>
+                      <a:pPr lvl="0" indent="0" marL="0">
+                        <a:buNone/>
+                      </a:pPr>
+                      <a:r>
+                        <a:rPr/>
+                        <a:t>clarity</a:t>
+                      </a:r>
+                    </a:p>
+                  </a:txBody>
+                  <a:tcPr/>
+                </a:tc>
+              </a:tr>
+              <a:tr h="0">
+                <a:tc>
+                  <a:txBody>
+                    <a:bodyPr/>
+                    <a:lstStyle/>
+                    <a:p>
+                      <a:pPr lvl="0" indent="0" marL="0">
+                        <a:buNone/>
+                      </a:pPr>
+                      <a:r>
+                        <a:rPr/>
+                        <a:t>S00001</a:t>
+                      </a:r>
+                    </a:p>
+                  </a:txBody>
+                </a:tc>
+                <a:tc>
+                  <a:txBody>
+                    <a:bodyPr/>
+                    <a:lstStyle/>
+                    <a:p>
+                      <a:pPr lvl="0" indent="0" marL="0">
+                        <a:buNone/>
+                      </a:pPr>
+                      <a:r>
+                        <a:rPr/>
+                        <a:t>32.3</a:t>
+                      </a:r>
+                    </a:p>
+                  </a:txBody>
+                </a:tc>
+                <a:tc>
+                  <a:txBody>
+                    <a:bodyPr/>
+                    <a:lstStyle/>
+                    <a:p>
+                      <a:pPr lvl="0" indent="0" marL="0">
+                        <a:buNone/>
+                      </a:pPr>
+                      <a:r>
+                        <a:rPr/>
+                        <a:t>condition_1 (treatment)</a:t>
+                      </a:r>
+                    </a:p>
+                  </a:txBody>
+                </a:tc>
+                <a:tc>
+                  <a:txBody>
+                    <a:bodyPr/>
+                    <a:lstStyle/>
+                    <a:p>
+                      <a:pPr lvl="0" indent="0" marL="0">
+                        <a:buNone/>
+                      </a:pPr>
+                      <a:r>
+                        <a:rPr/>
+                        <a:t>Yes, start saving</a:t>
+                      </a:r>
+                    </a:p>
+                  </a:txBody>
+                </a:tc>
+                <a:tc>
+                  <a:txBody>
+                    <a:bodyPr/>
+                    <a:lstStyle/>
+                    <a:p>
+                      <a:pPr lvl="0" indent="0" marL="0">
+                        <a:buNone/>
+                      </a:pPr>
+                      <a:r>
+                        <a:rPr/>
+                        <a:t>5</a:t>
+                      </a:r>
+                    </a:p>
+                  </a:txBody>
+                </a:tc>
+                <a:tc>
+                  <a:txBody>
+                    <a:bodyPr/>
+                    <a:lstStyle/>
+                    <a:p>
+                      <a:pPr lvl="0" indent="0" marL="0">
+                        <a:buNone/>
+                      </a:pPr>
+                      <a:r>
+                        <a:rPr/>
+                        <a:t>6</a:t>
+                      </a:r>
+                    </a:p>
+                  </a:txBody>
+                </a:tc>
+              </a:tr>
+              <a:tr h="0">
+                <a:tc>
+                  <a:txBody>
+                    <a:bodyPr/>
+                    <a:lstStyle/>
+                    <a:p>
+                      <a:pPr lvl="0" indent="0" marL="0">
+                        <a:buNone/>
+                      </a:pPr>
+                      <a:r>
+                        <a:rPr/>
+                        <a:t>S00005</a:t>
+                      </a:r>
+                    </a:p>
+                  </a:txBody>
+                </a:tc>
+                <a:tc>
+                  <a:txBody>
+                    <a:bodyPr/>
+                    <a:lstStyle/>
+                    <a:p>
+                      <a:pPr lvl="0" indent="0" marL="0">
+                        <a:buNone/>
+                      </a:pPr>
+                      <a:r>
+                        <a:rPr/>
+                        <a:t>28.9</a:t>
+                      </a:r>
+                    </a:p>
+                  </a:txBody>
+                </a:tc>
+                <a:tc>
+                  <a:txBody>
+                    <a:bodyPr/>
+                    <a:lstStyle/>
+                    <a:p>
+                      <a:pPr lvl="0" indent="0" marL="0">
+                        <a:buNone/>
+                      </a:pPr>
+                      <a:r>
+                        <a:rPr/>
+                        <a:t>condition_2 (control)</a:t>
+                      </a:r>
+                    </a:p>
+                  </a:txBody>
+                </a:tc>
+                <a:tc>
+                  <a:txBody>
+                    <a:bodyPr/>
+                    <a:lstStyle/>
+                    <a:p>
+                      <a:pPr lvl="0" indent="0" marL="0">
+                        <a:buNone/>
+                      </a:pPr>
+                      <a:r>
+                        <a:rPr/>
+                        <a:t>Not now</a:t>
+                      </a:r>
+                    </a:p>
+                  </a:txBody>
+                </a:tc>
+                <a:tc>
+                  <a:txBody>
+                    <a:bodyPr/>
+                    <a:lstStyle/>
+                    <a:p>
+                      <a:pPr lvl="0" indent="0" marL="0">
+                        <a:buNone/>
+                      </a:pPr>
+                      <a:r>
+                        <a:rPr/>
+                        <a:t>3</a:t>
+                      </a:r>
+                    </a:p>
+                  </a:txBody>
+                </a:tc>
+                <a:tc>
+                  <a:txBody>
+                    <a:bodyPr/>
+                    <a:lstStyle/>
+                    <a:p>
+                      <a:pPr lvl="0" indent="0" marL="0">
+                        <a:buNone/>
+                      </a:pPr>
+                      <a:r>
+                        <a:rPr/>
+                        <a:t>4</a:t>
+                      </a:r>
+                    </a:p>
+                  </a:txBody>
+                </a:tc>
+              </a:tr>
+            </a:tbl>
+          </a:graphicData>
+        </a:graphic>
+      </p:graphicFrame>
+    </p:spTree>
+  </p:cSld>
+</p:sld>
+</file>
+
+<file path=ppt/slides/slide2.xml><?xml version="1.0" encoding="utf-8"?>
+<p:sld xmlns:a="http://schemas.openxmlformats.org/drawingml/2006/main" xmlns:r="http://schemas.openxmlformats.org/officeDocument/2006/relationships" xmlns:p="http://schemas.openxmlformats.org/presentationml/2006/main">
+  <p:cSld>
+    <p:spTree>
+      <p:nvGrpSpPr>
+        <p:cNvPr id="1" name=""/>
+        <p:cNvGrpSpPr/>
+        <p:nvPr/>
+      </p:nvGrpSpPr>
+      <p:grpSpPr>
+        <a:xfrm>
+          <a:off x="0" y="0"/>
+          <a:ext cx="0" cy="0"/>
+          <a:chOff x="0" y="0"/>
+          <a:chExt cx="0" cy="0"/>
+        </a:xfrm>
+      </p:grpSpPr>
+      <p:sp>
+        <p:nvSpPr>
+          <p:cNvPr id="2" name="Title 1"/>
+          <p:cNvSpPr>
+            <a:spLocks noGrp="1"/>
+          </p:cNvSpPr>
+          <p:nvPr>
+            <p:ph type="title"/>
+          </p:nvPr>
+        </p:nvSpPr>
+        <p:spPr/>
+        <p:txBody>
+          <a:bodyPr/>
+          <a:lstStyle/>
+          <a:p>
+            <a:pPr lvl="0" indent="0" marL="0">
+              <a:buNone/>
+            </a:pPr>
+            <a:r>
+              <a:rPr/>
+              <a:t>Why simulate behavioral experiments with LLM agents?</a:t>
+            </a:r>
+          </a:p>
+        </p:txBody>
+      </p:sp>
+      <p:sp>
+        <p:nvSpPr>
+          <p:cNvPr id="3" name="Content Placeholder 2"/>
+          <p:cNvSpPr>
+            <a:spLocks noGrp="1"/>
+          </p:cNvSpPr>
+          <p:nvPr>
+            <p:ph idx="1"/>
+          </p:nvPr>
+        </p:nvSpPr>
+        <p:spPr/>
+        <p:txBody>
+          <a:bodyPr/>
+          <a:lstStyle/>
+          <a:p>
+            <a:pPr lvl="0"/>
+            <a:r>
+              <a:rPr/>
+              <a:t>Real human studies are slow and costly to iterate on</a:t>
+            </a:r>
+          </a:p>
+          <a:p>
+            <a:pPr lvl="0"/>
+            <a:r>
+              <a:rPr/>
+              <a:t>LLM-simulated subjects let you pressure-test a design </a:t>
+            </a:r>
+            <a:r>
+              <a:rPr i="1"/>
+              <a:t>before</a:t>
+            </a:r>
+            <a:r>
+              <a:rPr/>
+              <a:t> spending money on real recruitment</a:t>
+            </a:r>
+          </a:p>
+          <a:p>
+            <a:pPr lvl="0"/>
+            <a:r>
+              <a:rPr/>
+              <a:t>Question we’ll answer today: does a synthetic sample actually behave like a real one?</a:t>
+            </a:r>
+          </a:p>
+          <a:p>
+            <a:pPr lvl="0"/>
+            <a:r>
+              <a:rPr/>
+              <a:t>Case study: a temporal reframing savings experiment, run twice (N=20, then N=400) and checked against a real published study</a:t>
+            </a:r>
+          </a:p>
+        </p:txBody>
+      </p:sp>
+    </p:spTree>
+  </p:cSld>
+</p:sld>
+</file>
+
+<file path=ppt/slides/slide20.xml><?xml version="1.0" encoding="utf-8"?>
 <p:sld xmlns:a="http://schemas.openxmlformats.org/drawingml/2006/main" xmlns:r="http://schemas.openxmlformats.org/officeDocument/2006/relationships" xmlns:p="http://schemas.openxmlformats.org/presentationml/2006/main">
   <p:cSld>
     <p:spTree>
@@ -4243,7 +4849,7 @@
 </p:sld>
 </file>
 
-<file path=ppt/slides/slide19.xml><?xml version="1.0" encoding="utf-8"?>
+<file path=ppt/slides/slide21.xml><?xml version="1.0" encoding="utf-8"?>
 <p:sld xmlns:a="http://schemas.openxmlformats.org/drawingml/2006/main" xmlns:r="http://schemas.openxmlformats.org/officeDocument/2006/relationships" xmlns:p="http://schemas.openxmlformats.org/presentationml/2006/main">
   <p:cSld>
     <p:spTree>
@@ -4350,106 +4956,7 @@
 </p:sld>
 </file>
 
-<file path=ppt/slides/slide2.xml><?xml version="1.0" encoding="utf-8"?>
-<p:sld xmlns:a="http://schemas.openxmlformats.org/drawingml/2006/main" xmlns:r="http://schemas.openxmlformats.org/officeDocument/2006/relationships" xmlns:p="http://schemas.openxmlformats.org/presentationml/2006/main">
-  <p:cSld>
-    <p:spTree>
-      <p:nvGrpSpPr>
-        <p:cNvPr id="1" name=""/>
-        <p:cNvGrpSpPr/>
-        <p:nvPr/>
-      </p:nvGrpSpPr>
-      <p:grpSpPr>
-        <a:xfrm>
-          <a:off x="0" y="0"/>
-          <a:ext cx="0" cy="0"/>
-          <a:chOff x="0" y="0"/>
-          <a:chExt cx="0" cy="0"/>
-        </a:xfrm>
-      </p:grpSpPr>
-      <p:sp>
-        <p:nvSpPr>
-          <p:cNvPr id="2" name="Title 1"/>
-          <p:cNvSpPr>
-            <a:spLocks noGrp="1"/>
-          </p:cNvSpPr>
-          <p:nvPr>
-            <p:ph type="title"/>
-          </p:nvPr>
-        </p:nvSpPr>
-        <p:spPr/>
-        <p:txBody>
-          <a:bodyPr/>
-          <a:lstStyle/>
-          <a:p>
-            <a:pPr lvl="0" indent="0" marL="0">
-              <a:buNone/>
-            </a:pPr>
-            <a:r>
-              <a:rPr/>
-              <a:t>Why simulate behavioral experiments with LLM agents?</a:t>
-            </a:r>
-          </a:p>
-        </p:txBody>
-      </p:sp>
-      <p:sp>
-        <p:nvSpPr>
-          <p:cNvPr id="3" name="Content Placeholder 2"/>
-          <p:cNvSpPr>
-            <a:spLocks noGrp="1"/>
-          </p:cNvSpPr>
-          <p:nvPr>
-            <p:ph idx="1"/>
-          </p:nvPr>
-        </p:nvSpPr>
-        <p:spPr/>
-        <p:txBody>
-          <a:bodyPr/>
-          <a:lstStyle/>
-          <a:p>
-            <a:pPr lvl="0"/>
-            <a:r>
-              <a:rPr/>
-              <a:t>Real human studies are slow and costly to iterate on</a:t>
-            </a:r>
-          </a:p>
-          <a:p>
-            <a:pPr lvl="0"/>
-            <a:r>
-              <a:rPr/>
-              <a:t>LLM-simulated subjects let you pressure-test a design </a:t>
-            </a:r>
-            <a:r>
-              <a:rPr i="1"/>
-              <a:t>before</a:t>
-            </a:r>
-            <a:r>
-              <a:rPr/>
-              <a:t> spending money on real recruitment</a:t>
-            </a:r>
-          </a:p>
-          <a:p>
-            <a:pPr lvl="0"/>
-            <a:r>
-              <a:rPr/>
-              <a:t>Question we’ll answer today: does a synthetic sample actually behave like a real one?</a:t>
-            </a:r>
-          </a:p>
-          <a:p>
-            <a:pPr lvl="0"/>
-            <a:r>
-              <a:rPr/>
-              <a:t>Case study: a temporal reframing savings experiment, run twice (N=20, then N=400) and checked against a real published study</a:t>
-            </a:r>
-          </a:p>
-        </p:txBody>
-      </p:sp>
-    </p:spTree>
-  </p:cSld>
-</p:sld>
-</file>
-
-<file path=ppt/slides/slide20.xml><?xml version="1.0" encoding="utf-8"?>
+<file path=ppt/slides/slide22.xml><?xml version="1.0" encoding="utf-8"?>
 <p:sld xmlns:a="http://schemas.openxmlformats.org/drawingml/2006/main" xmlns:r="http://schemas.openxmlformats.org/officeDocument/2006/relationships" xmlns:p="http://schemas.openxmlformats.org/presentationml/2006/main">
   <p:cSld>
     <p:spTree>
@@ -4558,236 +5065,6 @@
 </p:sld>
 </file>
 
-<file path=ppt/slides/slide21.xml><?xml version="1.0" encoding="utf-8"?>
-<p:sld xmlns:a="http://schemas.openxmlformats.org/drawingml/2006/main" xmlns:r="http://schemas.openxmlformats.org/officeDocument/2006/relationships" xmlns:p="http://schemas.openxmlformats.org/presentationml/2006/main">
-  <p:cSld>
-    <p:spTree>
-      <p:nvGrpSpPr>
-        <p:cNvPr id="1" name=""/>
-        <p:cNvGrpSpPr/>
-        <p:nvPr/>
-      </p:nvGrpSpPr>
-      <p:grpSpPr>
-        <a:xfrm>
-          <a:off x="0" y="0"/>
-          <a:ext cx="0" cy="0"/>
-          <a:chOff x="0" y="0"/>
-          <a:chExt cx="0" cy="0"/>
-        </a:xfrm>
-      </p:grpSpPr>
-      <p:sp>
-        <p:nvSpPr>
-          <p:cNvPr id="2" name="Title 1"/>
-          <p:cNvSpPr>
-            <a:spLocks noGrp="1"/>
-          </p:cNvSpPr>
-          <p:nvPr>
-            <p:ph type="title"/>
-          </p:nvPr>
-        </p:nvSpPr>
-        <p:spPr/>
-        <p:txBody>
-          <a:bodyPr/>
-          <a:lstStyle/>
-          <a:p>
-            <a:pPr lvl="0" indent="0" marL="0">
-              <a:buNone/>
-            </a:pPr>
-            <a:r>
-              <a:rPr/>
-              <a:t>Stage 7: writeup + reference comparison </a:t>
-            </a:r>
-            <a:r>
-              <a:rPr i="1"/>
-              <a:t>(under the hood)</a:t>
-            </a:r>
-          </a:p>
-        </p:txBody>
-      </p:sp>
-      <p:sp>
-        <p:nvSpPr>
-          <p:cNvPr id="3" name="Content Placeholder 2"/>
-          <p:cNvSpPr>
-            <a:spLocks noGrp="1"/>
-          </p:cNvSpPr>
-          <p:nvPr>
-            <p:ph idx="1"/>
-          </p:nvPr>
-        </p:nvSpPr>
-        <p:spPr/>
-        <p:txBody>
-          <a:bodyPr/>
-          <a:lstStyle/>
-          <a:p>
-            <a:pPr lvl="0"/>
-            <a:r>
-              <a:rPr/>
-              <a:t>Assembles Method, Balance, and Results sections from the Stage 5 outputs into a single document</a:t>
-            </a:r>
-          </a:p>
-          <a:p>
-            <a:pPr lvl="0"/>
-            <a:r>
-              <a:rPr/>
-              <a:t>Markdown -&gt; </a:t>
-            </a:r>
-            <a:r>
-              <a:rPr b="1"/>
-              <a:t>pandoc</a:t>
-            </a:r>
-            <a:r>
-              <a:rPr/>
-              <a:t> -&gt; Word (.docx)</a:t>
-            </a:r>
-          </a:p>
-          <a:p>
-            <a:pPr lvl="0"/>
-            <a:r>
-              <a:rPr/>
-              <a:t>Optional section: compare this run’s statistics against a </a:t>
-            </a:r>
-            <a:r>
-              <a:rPr b="1"/>
-              <a:t>published reference study</a:t>
-            </a:r>
-            <a:r>
-              <a:rPr/>
-              <a:t>, with an explicit, stated classification rule (replicates / partially replicates / does not replicate)</a:t>
-            </a:r>
-          </a:p>
-          <a:p>
-            <a:pPr lvl="0"/>
-            <a:r>
-              <a:rPr/>
-              <a:t>Mediation/moderation excluded, matching Stage 5’s scope</a:t>
-            </a:r>
-          </a:p>
-        </p:txBody>
-      </p:sp>
-    </p:spTree>
-  </p:cSld>
-</p:sld>
-</file>
-
-<file path=ppt/slides/slide22.xml><?xml version="1.0" encoding="utf-8"?>
-<p:sld xmlns:a="http://schemas.openxmlformats.org/drawingml/2006/main" xmlns:r="http://schemas.openxmlformats.org/officeDocument/2006/relationships" xmlns:p="http://schemas.openxmlformats.org/presentationml/2006/main">
-  <p:cSld>
-    <p:spTree>
-      <p:nvGrpSpPr>
-        <p:cNvPr id="1" name=""/>
-        <p:cNvGrpSpPr/>
-        <p:nvPr/>
-      </p:nvGrpSpPr>
-      <p:grpSpPr>
-        <a:xfrm>
-          <a:off x="0" y="0"/>
-          <a:ext cx="0" cy="0"/>
-          <a:chOff x="0" y="0"/>
-          <a:chExt cx="0" cy="0"/>
-        </a:xfrm>
-      </p:grpSpPr>
-      <p:sp>
-        <p:nvSpPr>
-          <p:cNvPr id="2" name="Title 1"/>
-          <p:cNvSpPr>
-            <a:spLocks noGrp="1"/>
-          </p:cNvSpPr>
-          <p:nvPr>
-            <p:ph type="title"/>
-          </p:nvPr>
-        </p:nvSpPr>
-        <p:spPr/>
-        <p:txBody>
-          <a:bodyPr/>
-          <a:lstStyle/>
-          <a:p>
-            <a:pPr lvl="0" indent="0" marL="0">
-              <a:buNone/>
-            </a:pPr>
-            <a:r>
-              <a:rPr/>
-              <a:t>The design: temporal reframing</a:t>
-            </a:r>
-          </a:p>
-        </p:txBody>
-      </p:sp>
-      <p:sp>
-        <p:nvSpPr>
-          <p:cNvPr id="3" name="Content Placeholder 2"/>
-          <p:cNvSpPr>
-            <a:spLocks noGrp="1"/>
-          </p:cNvSpPr>
-          <p:nvPr>
-            <p:ph idx="1"/>
-          </p:nvPr>
-        </p:nvSpPr>
-        <p:spPr/>
-        <p:txBody>
-          <a:bodyPr/>
-          <a:lstStyle/>
-          <a:p>
-            <a:pPr lvl="0" indent="0" marL="1270000">
-              <a:buNone/>
-            </a:pPr>
-            <a:r>
-              <a:rPr sz="2000"/>
-              <a:t>“Investing on a regular basis is one of the best ways to grow your wealth. You can get started with </a:t>
-            </a:r>
-            <a:r>
-              <a:rPr sz="2000" b="1"/>
-              <a:t>$5 a day</a:t>
-            </a:r>
-            <a:r>
-              <a:rPr sz="2000"/>
-              <a:t> today.” </a:t>
-            </a:r>
-            <a:r>
-              <a:rPr sz="2000" i="1"/>
-              <a:t>(treatment)</a:t>
-            </a:r>
-          </a:p>
-          <a:p>
-            <a:pPr lvl="0" indent="0" marL="1270000">
-              <a:buNone/>
-            </a:pPr>
-            <a:r>
-              <a:rPr sz="2000"/>
-              <a:t>“…with </a:t>
-            </a:r>
-            <a:r>
-              <a:rPr sz="2000" b="1"/>
-              <a:t>$150 a month</a:t>
-            </a:r>
-            <a:r>
-              <a:rPr sz="2000"/>
-              <a:t> today.” </a:t>
-            </a:r>
-            <a:r>
-              <a:rPr sz="2000" i="1"/>
-              <a:t>(control)</a:t>
-            </a:r>
-          </a:p>
-          <a:p>
-            <a:pPr lvl="0"/>
-            <a:r>
-              <a:rPr/>
-              <a:t>Same underlying amount ($5/day ~= $150/month), different framing granularity</a:t>
-            </a:r>
-          </a:p>
-          <a:p>
-            <a:pPr lvl="0"/>
-            <a:r>
-              <a:rPr/>
-              <a:t>Outcome: sign-up decision + self-reported affordability + self-reported understandability (both 1-7 Likert)</a:t>
-            </a:r>
-          </a:p>
-        </p:txBody>
-      </p:sp>
-    </p:spTree>
-  </p:cSld>
-</p:sld>
-</file>
-
 <file path=ppt/slides/slide23.xml><?xml version="1.0" encoding="utf-8"?>
 <p:sld xmlns:a="http://schemas.openxmlformats.org/drawingml/2006/main" xmlns:r="http://schemas.openxmlformats.org/officeDocument/2006/relationships" xmlns:p="http://schemas.openxmlformats.org/presentationml/2006/main">
   <p:cSld>
@@ -4825,7 +5102,11 @@
             </a:pPr>
             <a:r>
               <a:rPr/>
-              <a:t>Pilot: N=20, blinded</a:t>
+              <a:t>Stage 7: writeup + reference comparison </a:t>
+            </a:r>
+            <a:r>
+              <a:rPr i="1"/>
+              <a:t>(under the hood)</a:t>
             </a:r>
           </a:p>
         </p:txBody>
@@ -4848,21 +5129,44 @@
             <a:pPr lvl="0"/>
             <a:r>
               <a:rPr/>
-              <a:t>10 subjects/condition, subagent mode, condition labels withheld from the analyst</a:t>
-            </a:r>
-          </a:p>
-          <a:p>
-            <a:pPr lvl="0"/>
-            <a:r>
-              <a:rPr/>
-              <a:t>Sign-up rate: 80% vs. 40% – directionally large, but only marginal at this N (p ~ .08 across all three outcomes)</a:t>
-            </a:r>
-          </a:p>
-          <a:p>
-            <a:pPr lvl="0"/>
-            <a:r>
-              <a:rPr/>
-              <a:t>Purpose of a pilot: catch pipeline problems and get a directional read cheaply before committing to a larger run</a:t>
+              <a:t>Assembles Method, Balance, and Results sections from the Stage 5 outputs into a single document</a:t>
+            </a:r>
+          </a:p>
+          <a:p>
+            <a:pPr lvl="0"/>
+            <a:r>
+              <a:rPr/>
+              <a:t>Markdown -&gt; </a:t>
+            </a:r>
+            <a:r>
+              <a:rPr b="1"/>
+              <a:t>pandoc</a:t>
+            </a:r>
+            <a:r>
+              <a:rPr/>
+              <a:t> -&gt; Word (.docx)</a:t>
+            </a:r>
+          </a:p>
+          <a:p>
+            <a:pPr lvl="0"/>
+            <a:r>
+              <a:rPr/>
+              <a:t>Optional section: compare this run’s statistics against a </a:t>
+            </a:r>
+            <a:r>
+              <a:rPr b="1"/>
+              <a:t>published reference study</a:t>
+            </a:r>
+            <a:r>
+              <a:rPr/>
+              <a:t>, with an explicit, stated classification rule (replicates / partially replicates / does not replicate)</a:t>
+            </a:r>
+          </a:p>
+          <a:p>
+            <a:pPr lvl="0"/>
+            <a:r>
+              <a:rPr/>
+              <a:t>Mediation/moderation excluded, matching Stage 5’s scope</a:t>
             </a:r>
           </a:p>
         </p:txBody>
@@ -4909,7 +5213,7 @@
             </a:pPr>
             <a:r>
               <a:rPr/>
-              <a:t>Unblind, then decide to scale</a:t>
+              <a:t>The design: temporal reframing</a:t>
             </a:r>
           </a:p>
         </p:txBody>
@@ -4929,24 +5233,59 @@
           <a:bodyPr/>
           <a:lstStyle/>
           <a:p>
-            <a:pPr lvl="0"/>
-            <a:r>
-              <a:rPr/>
-              <a:t>Researcher reveals: Condition 1 = treatment ($5/day), Condition 2 = control ($150/month)</a:t>
-            </a:r>
-          </a:p>
-          <a:p>
-            <a:pPr lvl="0"/>
-            <a:r>
-              <a:rPr/>
-              <a:t>Re-run regressions with the correct reference category – coefficients flip sign as expected, same magnitude</a:t>
-            </a:r>
-          </a:p>
-          <a:p>
-            <a:pPr lvl="0"/>
-            <a:r>
-              <a:rPr/>
-              <a:t>Decision: scale to N=400 (200/condition) to get a properly powered read</a:t>
+            <a:pPr lvl="0" indent="0" marL="1270000">
+              <a:buNone/>
+            </a:pPr>
+            <a:r>
+              <a:rPr sz="2000"/>
+              <a:t>“Investing on a regular basis is one of the best ways to grow your wealth. You can get started with </a:t>
+            </a:r>
+            <a:r>
+              <a:rPr sz="2000" b="1"/>
+              <a:t>$5 a day</a:t>
+            </a:r>
+            <a:r>
+              <a:rPr sz="2000"/>
+              <a:t> today.” </a:t>
+            </a:r>
+            <a:r>
+              <a:rPr sz="2000" i="1"/>
+              <a:t>(treatment)</a:t>
+            </a:r>
+          </a:p>
+          <a:p>
+            <a:pPr lvl="0" indent="0" marL="1270000">
+              <a:buNone/>
+            </a:pPr>
+            <a:r>
+              <a:rPr sz="2000"/>
+              <a:t>“…with </a:t>
+            </a:r>
+            <a:r>
+              <a:rPr sz="2000" b="1"/>
+              <a:t>$150 a month</a:t>
+            </a:r>
+            <a:r>
+              <a:rPr sz="2000"/>
+              <a:t> today.” </a:t>
+            </a:r>
+            <a:r>
+              <a:rPr sz="2000" i="1"/>
+              <a:t>(control)</a:t>
+            </a:r>
+          </a:p>
+          <a:p>
+            <a:pPr lvl="0"/>
+            <a:r>
+              <a:rPr/>
+              <a:t>Same underlying amount ($5/day ~= $150/month), different framing granularity</a:t>
+            </a:r>
+          </a:p>
+          <a:p>
+            <a:pPr lvl="0"/>
+            <a:r>
+              <a:rPr/>
+              <a:t>Outcome: sign-up decision + self-reported affordability + self-reported understandability (both 1-7 Likert)</a:t>
             </a:r>
           </a:p>
         </p:txBody>
@@ -4993,7 +5332,7 @@
             </a:pPr>
             <a:r>
               <a:rPr/>
-              <a:t>Full-scale results (N=400)</a:t>
+              <a:t>Pilot: N=20, blinded</a:t>
             </a:r>
           </a:p>
         </p:txBody>
@@ -5016,60 +5355,21 @@
             <a:pPr lvl="0"/>
             <a:r>
               <a:rPr/>
-              <a:t>Sign-up rate: </a:t>
-            </a:r>
-            <a:r>
-              <a:rPr b="1"/>
-              <a:t>64.5% (treatment) vs. 45.5% (control)</a:t>
-            </a:r>
-            <a:r>
-              <a:rPr/>
-              <a:t>, logit B=0.82, </a:t>
-            </a:r>
-            <a:r>
-              <a:rPr i="1"/>
-              <a:t>p</a:t>
-            </a:r>
-            <a:r>
-              <a:rPr/>
-              <a:t>&lt;.001</a:t>
-            </a:r>
-          </a:p>
-          <a:p>
-            <a:pPr lvl="0"/>
-            <a:r>
-              <a:rPr/>
-              <a:t>Affordability rating: 4.66 vs. 4.05, </a:t>
-            </a:r>
-            <a:r>
-              <a:rPr i="1"/>
-              <a:t>p</a:t>
-            </a:r>
-            <a:r>
-              <a:rPr/>
-              <a:t>&lt;.001</a:t>
-            </a:r>
-          </a:p>
-          <a:p>
-            <a:pPr lvl="0"/>
-            <a:r>
-              <a:rPr/>
-              <a:t>Understandability rating: 5.35 vs. 5.31, </a:t>
-            </a:r>
-            <a:r>
-              <a:rPr i="1"/>
-              <a:t>p</a:t>
-            </a:r>
-            <a:r>
-              <a:rPr/>
-              <a:t>=.70 (no effect)</a:t>
-            </a:r>
-          </a:p>
-          <a:p>
-            <a:pPr lvl="0"/>
-            <a:r>
-              <a:rPr/>
-              <a:t>Balance check flagged gender as imbalanced (p=.035) – across 6 tests, ~26% chance of at least one false positive; verified main results hold with a gender control</a:t>
+              <a:t>10 subjects/condition, subagent mode, condition labels withheld from the analyst</a:t>
+            </a:r>
+          </a:p>
+          <a:p>
+            <a:pPr lvl="0"/>
+            <a:r>
+              <a:rPr/>
+              <a:t>Sign-up rate: 80% vs. 40% – directionally large, but only marginal at this N (p ~ .08 across all three outcomes)</a:t>
+            </a:r>
+          </a:p>
+          <a:p>
+            <a:pPr lvl="0"/>
+            <a:r>
+              <a:rPr/>
+              <a:t>Purpose of a pilot: catch pipeline problems and get a directional read cheaply before committing to a larger run</a:t>
             </a:r>
           </a:p>
         </p:txBody>
@@ -5080,6 +5380,213 @@
 </file>
 
 <file path=ppt/slides/slide26.xml><?xml version="1.0" encoding="utf-8"?>
+<p:sld xmlns:a="http://schemas.openxmlformats.org/drawingml/2006/main" xmlns:r="http://schemas.openxmlformats.org/officeDocument/2006/relationships" xmlns:p="http://schemas.openxmlformats.org/presentationml/2006/main">
+  <p:cSld>
+    <p:spTree>
+      <p:nvGrpSpPr>
+        <p:cNvPr id="1" name=""/>
+        <p:cNvGrpSpPr/>
+        <p:nvPr/>
+      </p:nvGrpSpPr>
+      <p:grpSpPr>
+        <a:xfrm>
+          <a:off x="0" y="0"/>
+          <a:ext cx="0" cy="0"/>
+          <a:chOff x="0" y="0"/>
+          <a:chExt cx="0" cy="0"/>
+        </a:xfrm>
+      </p:grpSpPr>
+      <p:sp>
+        <p:nvSpPr>
+          <p:cNvPr id="2" name="Title 1"/>
+          <p:cNvSpPr>
+            <a:spLocks noGrp="1"/>
+          </p:cNvSpPr>
+          <p:nvPr>
+            <p:ph type="title"/>
+          </p:nvPr>
+        </p:nvSpPr>
+        <p:spPr/>
+        <p:txBody>
+          <a:bodyPr/>
+          <a:lstStyle/>
+          <a:p>
+            <a:pPr lvl="0" indent="0" marL="0">
+              <a:buNone/>
+            </a:pPr>
+            <a:r>
+              <a:rPr/>
+              <a:t>Unblind, then decide to scale</a:t>
+            </a:r>
+          </a:p>
+        </p:txBody>
+      </p:sp>
+      <p:sp>
+        <p:nvSpPr>
+          <p:cNvPr id="3" name="Content Placeholder 2"/>
+          <p:cNvSpPr>
+            <a:spLocks noGrp="1"/>
+          </p:cNvSpPr>
+          <p:nvPr>
+            <p:ph idx="1"/>
+          </p:nvPr>
+        </p:nvSpPr>
+        <p:spPr/>
+        <p:txBody>
+          <a:bodyPr/>
+          <a:lstStyle/>
+          <a:p>
+            <a:pPr lvl="0"/>
+            <a:r>
+              <a:rPr/>
+              <a:t>Researcher reveals: Condition 1 = treatment ($5/day), Condition 2 = control ($150/month)</a:t>
+            </a:r>
+          </a:p>
+          <a:p>
+            <a:pPr lvl="0"/>
+            <a:r>
+              <a:rPr/>
+              <a:t>Re-run regressions with the correct reference category – coefficients flip sign as expected, same magnitude</a:t>
+            </a:r>
+          </a:p>
+          <a:p>
+            <a:pPr lvl="0"/>
+            <a:r>
+              <a:rPr/>
+              <a:t>Decision: scale to N=400 (200/condition) to get a properly powered read</a:t>
+            </a:r>
+          </a:p>
+        </p:txBody>
+      </p:sp>
+    </p:spTree>
+  </p:cSld>
+</p:sld>
+</file>
+
+<file path=ppt/slides/slide27.xml><?xml version="1.0" encoding="utf-8"?>
+<p:sld xmlns:a="http://schemas.openxmlformats.org/drawingml/2006/main" xmlns:r="http://schemas.openxmlformats.org/officeDocument/2006/relationships" xmlns:p="http://schemas.openxmlformats.org/presentationml/2006/main">
+  <p:cSld>
+    <p:spTree>
+      <p:nvGrpSpPr>
+        <p:cNvPr id="1" name=""/>
+        <p:cNvGrpSpPr/>
+        <p:nvPr/>
+      </p:nvGrpSpPr>
+      <p:grpSpPr>
+        <a:xfrm>
+          <a:off x="0" y="0"/>
+          <a:ext cx="0" cy="0"/>
+          <a:chOff x="0" y="0"/>
+          <a:chExt cx="0" cy="0"/>
+        </a:xfrm>
+      </p:grpSpPr>
+      <p:sp>
+        <p:nvSpPr>
+          <p:cNvPr id="2" name="Title 1"/>
+          <p:cNvSpPr>
+            <a:spLocks noGrp="1"/>
+          </p:cNvSpPr>
+          <p:nvPr>
+            <p:ph type="title"/>
+          </p:nvPr>
+        </p:nvSpPr>
+        <p:spPr/>
+        <p:txBody>
+          <a:bodyPr/>
+          <a:lstStyle/>
+          <a:p>
+            <a:pPr lvl="0" indent="0" marL="0">
+              <a:buNone/>
+            </a:pPr>
+            <a:r>
+              <a:rPr/>
+              <a:t>Full-scale results (N=400)</a:t>
+            </a:r>
+          </a:p>
+        </p:txBody>
+      </p:sp>
+      <p:sp>
+        <p:nvSpPr>
+          <p:cNvPr id="3" name="Content Placeholder 2"/>
+          <p:cNvSpPr>
+            <a:spLocks noGrp="1"/>
+          </p:cNvSpPr>
+          <p:nvPr>
+            <p:ph idx="1"/>
+          </p:nvPr>
+        </p:nvSpPr>
+        <p:spPr/>
+        <p:txBody>
+          <a:bodyPr/>
+          <a:lstStyle/>
+          <a:p>
+            <a:pPr lvl="0"/>
+            <a:r>
+              <a:rPr/>
+              <a:t>Sign-up rate: </a:t>
+            </a:r>
+            <a:r>
+              <a:rPr b="1"/>
+              <a:t>64.5% (treatment) vs. 45.5% (control)</a:t>
+            </a:r>
+            <a:r>
+              <a:rPr/>
+              <a:t>, logit B=0.82, </a:t>
+            </a:r>
+            <a:r>
+              <a:rPr i="1"/>
+              <a:t>p</a:t>
+            </a:r>
+            <a:r>
+              <a:rPr/>
+              <a:t>&lt;.001</a:t>
+            </a:r>
+          </a:p>
+          <a:p>
+            <a:pPr lvl="0"/>
+            <a:r>
+              <a:rPr/>
+              <a:t>Affordability rating: 4.66 vs. 4.05, </a:t>
+            </a:r>
+            <a:r>
+              <a:rPr i="1"/>
+              <a:t>p</a:t>
+            </a:r>
+            <a:r>
+              <a:rPr/>
+              <a:t>&lt;.001</a:t>
+            </a:r>
+          </a:p>
+          <a:p>
+            <a:pPr lvl="0"/>
+            <a:r>
+              <a:rPr/>
+              <a:t>Understandability rating: 5.35 vs. 5.31, </a:t>
+            </a:r>
+            <a:r>
+              <a:rPr i="1"/>
+              <a:t>p</a:t>
+            </a:r>
+            <a:r>
+              <a:rPr/>
+              <a:t>=.70 (no effect)</a:t>
+            </a:r>
+          </a:p>
+          <a:p>
+            <a:pPr lvl="0"/>
+            <a:r>
+              <a:rPr/>
+              <a:t>Balance check flagged gender as imbalanced (p=.035) – across 6 tests, ~26% chance of at least one false positive; verified main results hold with a gender control</a:t>
+            </a:r>
+          </a:p>
+        </p:txBody>
+      </p:sp>
+    </p:spTree>
+  </p:cSld>
+</p:sld>
+</file>
+
+<file path=ppt/slides/slide28.xml><?xml version="1.0" encoding="utf-8"?>
 <p:sld xmlns:a="http://schemas.openxmlformats.org/drawingml/2006/main" xmlns:r="http://schemas.openxmlformats.org/officeDocument/2006/relationships" xmlns:p="http://schemas.openxmlformats.org/presentationml/2006/main">
   <p:cSld>
     <p:spTree>
@@ -5396,7 +5903,7 @@
 </p:sld>
 </file>
 
-<file path=ppt/slides/slide27.xml><?xml version="1.0" encoding="utf-8"?>
+<file path=ppt/slides/slide29.xml><?xml version="1.0" encoding="utf-8"?>
 <p:sld xmlns:a="http://schemas.openxmlformats.org/drawingml/2006/main" xmlns:r="http://schemas.openxmlformats.org/officeDocument/2006/relationships" xmlns:p="http://schemas.openxmlformats.org/presentationml/2006/main">
   <p:cSld>
     <p:spTree>
@@ -5502,93 +6009,6 @@
             <a:r>
               <a:rPr/>
               <a:t>Practical toolkit: skills + subagents + Python + pandoc, all orchestrated conversationally</a:t>
-            </a:r>
-          </a:p>
-        </p:txBody>
-      </p:sp>
-    </p:spTree>
-  </p:cSld>
-</p:sld>
-</file>
-
-<file path=ppt/slides/slide28.xml><?xml version="1.0" encoding="utf-8"?>
-<p:sld xmlns:a="http://schemas.openxmlformats.org/drawingml/2006/main" xmlns:r="http://schemas.openxmlformats.org/officeDocument/2006/relationships" xmlns:p="http://schemas.openxmlformats.org/presentationml/2006/main">
-  <p:cSld>
-    <p:spTree>
-      <p:nvGrpSpPr>
-        <p:cNvPr id="1" name=""/>
-        <p:cNvGrpSpPr/>
-        <p:nvPr/>
-      </p:nvGrpSpPr>
-      <p:grpSpPr>
-        <a:xfrm>
-          <a:off x="0" y="0"/>
-          <a:ext cx="0" cy="0"/>
-          <a:chOff x="0" y="0"/>
-          <a:chExt cx="0" cy="0"/>
-        </a:xfrm>
-      </p:grpSpPr>
-      <p:sp>
-        <p:nvSpPr>
-          <p:cNvPr id="2" name="Title 1"/>
-          <p:cNvSpPr>
-            <a:spLocks noGrp="1"/>
-          </p:cNvSpPr>
-          <p:nvPr>
-            <p:ph type="title"/>
-          </p:nvPr>
-        </p:nvSpPr>
-        <p:spPr/>
-        <p:txBody>
-          <a:bodyPr/>
-          <a:lstStyle/>
-          <a:p>
-            <a:pPr lvl="0" indent="0" marL="0">
-              <a:buNone/>
-            </a:pPr>
-            <a:r>
-              <a:rPr/>
-              <a:t>Questions?</a:t>
-            </a:r>
-          </a:p>
-        </p:txBody>
-      </p:sp>
-      <p:sp>
-        <p:nvSpPr>
-          <p:cNvPr id="3" name="Content Placeholder 2"/>
-          <p:cNvSpPr>
-            <a:spLocks noGrp="1"/>
-          </p:cNvSpPr>
-          <p:nvPr>
-            <p:ph idx="1"/>
-          </p:nvPr>
-        </p:nvSpPr>
-        <p:spPr/>
-        <p:txBody>
-          <a:bodyPr/>
-          <a:lstStyle/>
-          <a:p>
-            <a:pPr lvl="0"/>
-            <a:r>
-              <a:rPr/>
-              <a:t>Repository: this workshop’s </a:t>
-            </a:r>
-            <a:r>
-              <a:rPr>
-                <a:latin typeface="Courier"/>
-              </a:rPr>
-              <a:t>behavioral-research-env</a:t>
-            </a:r>
-            <a:r>
-              <a:rPr/>
-              <a:t> project</a:t>
-            </a:r>
-          </a:p>
-          <a:p>
-            <a:pPr lvl="0"/>
-            <a:r>
-              <a:rPr/>
-              <a:t>Workbook handout has copy-paste prompt templates for every stage</a:t>
             </a:r>
           </a:p>
         </p:txBody>
@@ -5670,6 +6090,93 @@
           </a:ln>
         </p:spPr>
       </p:pic>
+    </p:spTree>
+  </p:cSld>
+</p:sld>
+</file>
+
+<file path=ppt/slides/slide30.xml><?xml version="1.0" encoding="utf-8"?>
+<p:sld xmlns:a="http://schemas.openxmlformats.org/drawingml/2006/main" xmlns:r="http://schemas.openxmlformats.org/officeDocument/2006/relationships" xmlns:p="http://schemas.openxmlformats.org/presentationml/2006/main">
+  <p:cSld>
+    <p:spTree>
+      <p:nvGrpSpPr>
+        <p:cNvPr id="1" name=""/>
+        <p:cNvGrpSpPr/>
+        <p:nvPr/>
+      </p:nvGrpSpPr>
+      <p:grpSpPr>
+        <a:xfrm>
+          <a:off x="0" y="0"/>
+          <a:ext cx="0" cy="0"/>
+          <a:chOff x="0" y="0"/>
+          <a:chExt cx="0" cy="0"/>
+        </a:xfrm>
+      </p:grpSpPr>
+      <p:sp>
+        <p:nvSpPr>
+          <p:cNvPr id="2" name="Title 1"/>
+          <p:cNvSpPr>
+            <a:spLocks noGrp="1"/>
+          </p:cNvSpPr>
+          <p:nvPr>
+            <p:ph type="title"/>
+          </p:nvPr>
+        </p:nvSpPr>
+        <p:spPr/>
+        <p:txBody>
+          <a:bodyPr/>
+          <a:lstStyle/>
+          <a:p>
+            <a:pPr lvl="0" indent="0" marL="0">
+              <a:buNone/>
+            </a:pPr>
+            <a:r>
+              <a:rPr/>
+              <a:t>Questions?</a:t>
+            </a:r>
+          </a:p>
+        </p:txBody>
+      </p:sp>
+      <p:sp>
+        <p:nvSpPr>
+          <p:cNvPr id="3" name="Content Placeholder 2"/>
+          <p:cNvSpPr>
+            <a:spLocks noGrp="1"/>
+          </p:cNvSpPr>
+          <p:nvPr>
+            <p:ph idx="1"/>
+          </p:nvPr>
+        </p:nvSpPr>
+        <p:spPr/>
+        <p:txBody>
+          <a:bodyPr/>
+          <a:lstStyle/>
+          <a:p>
+            <a:pPr lvl="0"/>
+            <a:r>
+              <a:rPr/>
+              <a:t>Repository: this workshop’s </a:t>
+            </a:r>
+            <a:r>
+              <a:rPr>
+                <a:latin typeface="Courier"/>
+              </a:rPr>
+              <a:t>behavioral-research-env</a:t>
+            </a:r>
+            <a:r>
+              <a:rPr/>
+              <a:t> project</a:t>
+            </a:r>
+          </a:p>
+          <a:p>
+            <a:pPr lvl="0"/>
+            <a:r>
+              <a:rPr/>
+              <a:t>Workbook handout has copy-paste prompt templates for every stage</a:t>
+            </a:r>
+          </a:p>
+        </p:txBody>
+      </p:sp>
     </p:spTree>
   </p:cSld>
 </p:sld>

--- a/presentations/2026-workshop/slides.pptx
+++ b/presentations/2026-workshop/slides.pptx
@@ -3210,6 +3210,74 @@
           </a:p>
         </p:txBody>
       </p:sp>
+      <p:sp>
+        <p:nvSpPr>
+          <p:cNvPr id="5" name="TextBox 4"/>
+          <p:cNvSpPr txBox="1"/>
+          <p:nvPr/>
+        </p:nvSpPr>
+        <p:spPr>
+          <a:xfrm>
+            <a:off x="274320" y="4777740"/>
+            <a:ext cx="5486400" cy="274320"/>
+          </a:xfrm>
+          <a:prstGeom prst="rect">
+            <a:avLst/>
+          </a:prstGeom>
+          <a:noFill/>
+        </p:spPr>
+        <p:txBody>
+          <a:bodyPr wrap="none" tIns="0" bIns="0">
+            <a:spAutoFit/>
+          </a:bodyPr>
+          <a:lstStyle/>
+          <a:p>
+            <a:pPr algn="l"/>
+            <a:r>
+              <a:rPr sz="900">
+                <a:solidFill>
+                  <a:srgbClr val="595959"/>
+                </a:solidFill>
+              </a:rPr>
+              <a:t>Copyright © 2026 Behavioral Research Workshop</a:t>
+            </a:r>
+          </a:p>
+        </p:txBody>
+      </p:sp>
+      <p:sp>
+        <p:nvSpPr>
+          <p:cNvPr id="6" name="TextBox 5"/>
+          <p:cNvSpPr txBox="1"/>
+          <p:nvPr/>
+        </p:nvSpPr>
+        <p:spPr>
+          <a:xfrm>
+            <a:off x="8321040" y="4732020"/>
+            <a:ext cx="548640" cy="320040"/>
+          </a:xfrm>
+          <a:prstGeom prst="rect">
+            <a:avLst/>
+          </a:prstGeom>
+          <a:noFill/>
+        </p:spPr>
+        <p:txBody>
+          <a:bodyPr wrap="none" tIns="0" bIns="0">
+            <a:spAutoFit/>
+          </a:bodyPr>
+          <a:lstStyle/>
+          <a:p>
+            <a:pPr algn="r"/>
+            <a:r>
+              <a:rPr sz="1200" b="1">
+                <a:solidFill>
+                  <a:srgbClr val="1F4E79"/>
+                </a:solidFill>
+              </a:rPr>
+              <a:t>1</a:t>
+            </a:r>
+          </a:p>
+        </p:txBody>
+      </p:sp>
     </p:spTree>
   </p:cSld>
 </p:sld>
@@ -3287,6 +3355,74 @@
           </a:ln>
         </p:spPr>
       </p:pic>
+      <p:sp>
+        <p:nvSpPr>
+          <p:cNvPr id="3" name="TextBox 2"/>
+          <p:cNvSpPr txBox="1"/>
+          <p:nvPr/>
+        </p:nvSpPr>
+        <p:spPr>
+          <a:xfrm>
+            <a:off x="274320" y="4777740"/>
+            <a:ext cx="5486400" cy="274320"/>
+          </a:xfrm>
+          <a:prstGeom prst="rect">
+            <a:avLst/>
+          </a:prstGeom>
+          <a:noFill/>
+        </p:spPr>
+        <p:txBody>
+          <a:bodyPr wrap="none" tIns="0" bIns="0">
+            <a:spAutoFit/>
+          </a:bodyPr>
+          <a:lstStyle/>
+          <a:p>
+            <a:pPr algn="l"/>
+            <a:r>
+              <a:rPr sz="900">
+                <a:solidFill>
+                  <a:srgbClr val="595959"/>
+                </a:solidFill>
+              </a:rPr>
+              <a:t>Copyright © 2026 Behavioral Research Workshop</a:t>
+            </a:r>
+          </a:p>
+        </p:txBody>
+      </p:sp>
+      <p:sp>
+        <p:nvSpPr>
+          <p:cNvPr id="4" name="TextBox 3"/>
+          <p:cNvSpPr txBox="1"/>
+          <p:nvPr/>
+        </p:nvSpPr>
+        <p:spPr>
+          <a:xfrm>
+            <a:off x="8321040" y="4732020"/>
+            <a:ext cx="548640" cy="320040"/>
+          </a:xfrm>
+          <a:prstGeom prst="rect">
+            <a:avLst/>
+          </a:prstGeom>
+          <a:noFill/>
+        </p:spPr>
+        <p:txBody>
+          <a:bodyPr wrap="none" tIns="0" bIns="0">
+            <a:spAutoFit/>
+          </a:bodyPr>
+          <a:lstStyle/>
+          <a:p>
+            <a:pPr algn="r"/>
+            <a:r>
+              <a:rPr sz="1200" b="1">
+                <a:solidFill>
+                  <a:srgbClr val="1F4E79"/>
+                </a:solidFill>
+              </a:rPr>
+              <a:t>10</a:t>
+            </a:r>
+          </a:p>
+        </p:txBody>
+      </p:sp>
     </p:spTree>
   </p:cSld>
 </p:sld>
@@ -3390,6 +3526,74 @@
           </a:p>
         </p:txBody>
       </p:sp>
+      <p:sp>
+        <p:nvSpPr>
+          <p:cNvPr id="4" name="TextBox 3"/>
+          <p:cNvSpPr txBox="1"/>
+          <p:nvPr/>
+        </p:nvSpPr>
+        <p:spPr>
+          <a:xfrm>
+            <a:off x="274320" y="4777740"/>
+            <a:ext cx="5486400" cy="274320"/>
+          </a:xfrm>
+          <a:prstGeom prst="rect">
+            <a:avLst/>
+          </a:prstGeom>
+          <a:noFill/>
+        </p:spPr>
+        <p:txBody>
+          <a:bodyPr wrap="none" tIns="0" bIns="0">
+            <a:spAutoFit/>
+          </a:bodyPr>
+          <a:lstStyle/>
+          <a:p>
+            <a:pPr algn="l"/>
+            <a:r>
+              <a:rPr sz="900">
+                <a:solidFill>
+                  <a:srgbClr val="595959"/>
+                </a:solidFill>
+              </a:rPr>
+              <a:t>Copyright © 2026 Behavioral Research Workshop</a:t>
+            </a:r>
+          </a:p>
+        </p:txBody>
+      </p:sp>
+      <p:sp>
+        <p:nvSpPr>
+          <p:cNvPr id="5" name="TextBox 4"/>
+          <p:cNvSpPr txBox="1"/>
+          <p:nvPr/>
+        </p:nvSpPr>
+        <p:spPr>
+          <a:xfrm>
+            <a:off x="8321040" y="4732020"/>
+            <a:ext cx="548640" cy="320040"/>
+          </a:xfrm>
+          <a:prstGeom prst="rect">
+            <a:avLst/>
+          </a:prstGeom>
+          <a:noFill/>
+        </p:spPr>
+        <p:txBody>
+          <a:bodyPr wrap="none" tIns="0" bIns="0">
+            <a:spAutoFit/>
+          </a:bodyPr>
+          <a:lstStyle/>
+          <a:p>
+            <a:pPr algn="r"/>
+            <a:r>
+              <a:rPr sz="1200" b="1">
+                <a:solidFill>
+                  <a:srgbClr val="1F4E79"/>
+                </a:solidFill>
+              </a:rPr>
+              <a:t>11</a:t>
+            </a:r>
+          </a:p>
+        </p:txBody>
+      </p:sp>
     </p:spTree>
   </p:cSld>
 </p:sld>
@@ -3507,6 +3711,74 @@
           </a:p>
         </p:txBody>
       </p:sp>
+      <p:sp>
+        <p:nvSpPr>
+          <p:cNvPr id="4" name="TextBox 3"/>
+          <p:cNvSpPr txBox="1"/>
+          <p:nvPr/>
+        </p:nvSpPr>
+        <p:spPr>
+          <a:xfrm>
+            <a:off x="274320" y="4777740"/>
+            <a:ext cx="5486400" cy="274320"/>
+          </a:xfrm>
+          <a:prstGeom prst="rect">
+            <a:avLst/>
+          </a:prstGeom>
+          <a:noFill/>
+        </p:spPr>
+        <p:txBody>
+          <a:bodyPr wrap="none" tIns="0" bIns="0">
+            <a:spAutoFit/>
+          </a:bodyPr>
+          <a:lstStyle/>
+          <a:p>
+            <a:pPr algn="l"/>
+            <a:r>
+              <a:rPr sz="900">
+                <a:solidFill>
+                  <a:srgbClr val="595959"/>
+                </a:solidFill>
+              </a:rPr>
+              <a:t>Copyright © 2026 Behavioral Research Workshop</a:t>
+            </a:r>
+          </a:p>
+        </p:txBody>
+      </p:sp>
+      <p:sp>
+        <p:nvSpPr>
+          <p:cNvPr id="5" name="TextBox 4"/>
+          <p:cNvSpPr txBox="1"/>
+          <p:nvPr/>
+        </p:nvSpPr>
+        <p:spPr>
+          <a:xfrm>
+            <a:off x="8321040" y="4732020"/>
+            <a:ext cx="548640" cy="320040"/>
+          </a:xfrm>
+          <a:prstGeom prst="rect">
+            <a:avLst/>
+          </a:prstGeom>
+          <a:noFill/>
+        </p:spPr>
+        <p:txBody>
+          <a:bodyPr wrap="none" tIns="0" bIns="0">
+            <a:spAutoFit/>
+          </a:bodyPr>
+          <a:lstStyle/>
+          <a:p>
+            <a:pPr algn="r"/>
+            <a:r>
+              <a:rPr sz="1200" b="1">
+                <a:solidFill>
+                  <a:srgbClr val="1F4E79"/>
+                </a:solidFill>
+              </a:rPr>
+              <a:t>12</a:t>
+            </a:r>
+          </a:p>
+        </p:txBody>
+      </p:sp>
     </p:spTree>
   </p:cSld>
 </p:sld>
@@ -3649,6 +3921,74 @@
           </a:p>
         </p:txBody>
       </p:sp>
+      <p:sp>
+        <p:nvSpPr>
+          <p:cNvPr id="4" name="TextBox 3"/>
+          <p:cNvSpPr txBox="1"/>
+          <p:nvPr/>
+        </p:nvSpPr>
+        <p:spPr>
+          <a:xfrm>
+            <a:off x="274320" y="4777740"/>
+            <a:ext cx="5486400" cy="274320"/>
+          </a:xfrm>
+          <a:prstGeom prst="rect">
+            <a:avLst/>
+          </a:prstGeom>
+          <a:noFill/>
+        </p:spPr>
+        <p:txBody>
+          <a:bodyPr wrap="none" tIns="0" bIns="0">
+            <a:spAutoFit/>
+          </a:bodyPr>
+          <a:lstStyle/>
+          <a:p>
+            <a:pPr algn="l"/>
+            <a:r>
+              <a:rPr sz="900">
+                <a:solidFill>
+                  <a:srgbClr val="595959"/>
+                </a:solidFill>
+              </a:rPr>
+              <a:t>Copyright © 2026 Behavioral Research Workshop</a:t>
+            </a:r>
+          </a:p>
+        </p:txBody>
+      </p:sp>
+      <p:sp>
+        <p:nvSpPr>
+          <p:cNvPr id="5" name="TextBox 4"/>
+          <p:cNvSpPr txBox="1"/>
+          <p:nvPr/>
+        </p:nvSpPr>
+        <p:spPr>
+          <a:xfrm>
+            <a:off x="8321040" y="4732020"/>
+            <a:ext cx="548640" cy="320040"/>
+          </a:xfrm>
+          <a:prstGeom prst="rect">
+            <a:avLst/>
+          </a:prstGeom>
+          <a:noFill/>
+        </p:spPr>
+        <p:txBody>
+          <a:bodyPr wrap="none" tIns="0" bIns="0">
+            <a:spAutoFit/>
+          </a:bodyPr>
+          <a:lstStyle/>
+          <a:p>
+            <a:pPr algn="r"/>
+            <a:r>
+              <a:rPr sz="1200" b="1">
+                <a:solidFill>
+                  <a:srgbClr val="1F4E79"/>
+                </a:solidFill>
+              </a:rPr>
+              <a:t>13</a:t>
+            </a:r>
+          </a:p>
+        </p:txBody>
+      </p:sp>
     </p:spTree>
   </p:cSld>
 </p:sld>
@@ -3758,6 +4098,74 @@
           </a:p>
         </p:txBody>
       </p:sp>
+      <p:sp>
+        <p:nvSpPr>
+          <p:cNvPr id="3" name="TextBox 2"/>
+          <p:cNvSpPr txBox="1"/>
+          <p:nvPr/>
+        </p:nvSpPr>
+        <p:spPr>
+          <a:xfrm>
+            <a:off x="274320" y="4777740"/>
+            <a:ext cx="5486400" cy="274320"/>
+          </a:xfrm>
+          <a:prstGeom prst="rect">
+            <a:avLst/>
+          </a:prstGeom>
+          <a:noFill/>
+        </p:spPr>
+        <p:txBody>
+          <a:bodyPr wrap="none" tIns="0" bIns="0">
+            <a:spAutoFit/>
+          </a:bodyPr>
+          <a:lstStyle/>
+          <a:p>
+            <a:pPr algn="l"/>
+            <a:r>
+              <a:rPr sz="900">
+                <a:solidFill>
+                  <a:srgbClr val="595959"/>
+                </a:solidFill>
+              </a:rPr>
+              <a:t>Copyright © 2026 Behavioral Research Workshop</a:t>
+            </a:r>
+          </a:p>
+        </p:txBody>
+      </p:sp>
+      <p:sp>
+        <p:nvSpPr>
+          <p:cNvPr id="4" name="TextBox 3"/>
+          <p:cNvSpPr txBox="1"/>
+          <p:nvPr/>
+        </p:nvSpPr>
+        <p:spPr>
+          <a:xfrm>
+            <a:off x="8321040" y="4732020"/>
+            <a:ext cx="548640" cy="320040"/>
+          </a:xfrm>
+          <a:prstGeom prst="rect">
+            <a:avLst/>
+          </a:prstGeom>
+          <a:noFill/>
+        </p:spPr>
+        <p:txBody>
+          <a:bodyPr wrap="none" tIns="0" bIns="0">
+            <a:spAutoFit/>
+          </a:bodyPr>
+          <a:lstStyle/>
+          <a:p>
+            <a:pPr algn="r"/>
+            <a:r>
+              <a:rPr sz="1200" b="1">
+                <a:solidFill>
+                  <a:srgbClr val="1F4E79"/>
+                </a:solidFill>
+              </a:rPr>
+              <a:t>14</a:t>
+            </a:r>
+          </a:p>
+        </p:txBody>
+      </p:sp>
     </p:spTree>
   </p:cSld>
 </p:sld>
@@ -3897,6 +4305,74 @@
           </a:p>
         </p:txBody>
       </p:sp>
+      <p:sp>
+        <p:nvSpPr>
+          <p:cNvPr id="4" name="TextBox 3"/>
+          <p:cNvSpPr txBox="1"/>
+          <p:nvPr/>
+        </p:nvSpPr>
+        <p:spPr>
+          <a:xfrm>
+            <a:off x="274320" y="4777740"/>
+            <a:ext cx="5486400" cy="274320"/>
+          </a:xfrm>
+          <a:prstGeom prst="rect">
+            <a:avLst/>
+          </a:prstGeom>
+          <a:noFill/>
+        </p:spPr>
+        <p:txBody>
+          <a:bodyPr wrap="none" tIns="0" bIns="0">
+            <a:spAutoFit/>
+          </a:bodyPr>
+          <a:lstStyle/>
+          <a:p>
+            <a:pPr algn="l"/>
+            <a:r>
+              <a:rPr sz="900">
+                <a:solidFill>
+                  <a:srgbClr val="595959"/>
+                </a:solidFill>
+              </a:rPr>
+              <a:t>Copyright © 2026 Behavioral Research Workshop</a:t>
+            </a:r>
+          </a:p>
+        </p:txBody>
+      </p:sp>
+      <p:sp>
+        <p:nvSpPr>
+          <p:cNvPr id="5" name="TextBox 4"/>
+          <p:cNvSpPr txBox="1"/>
+          <p:nvPr/>
+        </p:nvSpPr>
+        <p:spPr>
+          <a:xfrm>
+            <a:off x="8321040" y="4732020"/>
+            <a:ext cx="548640" cy="320040"/>
+          </a:xfrm>
+          <a:prstGeom prst="rect">
+            <a:avLst/>
+          </a:prstGeom>
+          <a:noFill/>
+        </p:spPr>
+        <p:txBody>
+          <a:bodyPr wrap="none" tIns="0" bIns="0">
+            <a:spAutoFit/>
+          </a:bodyPr>
+          <a:lstStyle/>
+          <a:p>
+            <a:pPr algn="r"/>
+            <a:r>
+              <a:rPr sz="1200" b="1">
+                <a:solidFill>
+                  <a:srgbClr val="1F4E79"/>
+                </a:solidFill>
+              </a:rPr>
+              <a:t>15</a:t>
+            </a:r>
+          </a:p>
+        </p:txBody>
+      </p:sp>
     </p:spTree>
   </p:cSld>
 </p:sld>
@@ -4006,6 +4482,74 @@
           </a:p>
         </p:txBody>
       </p:sp>
+      <p:sp>
+        <p:nvSpPr>
+          <p:cNvPr id="3" name="TextBox 2"/>
+          <p:cNvSpPr txBox="1"/>
+          <p:nvPr/>
+        </p:nvSpPr>
+        <p:spPr>
+          <a:xfrm>
+            <a:off x="274320" y="4777740"/>
+            <a:ext cx="5486400" cy="274320"/>
+          </a:xfrm>
+          <a:prstGeom prst="rect">
+            <a:avLst/>
+          </a:prstGeom>
+          <a:noFill/>
+        </p:spPr>
+        <p:txBody>
+          <a:bodyPr wrap="none" tIns="0" bIns="0">
+            <a:spAutoFit/>
+          </a:bodyPr>
+          <a:lstStyle/>
+          <a:p>
+            <a:pPr algn="l"/>
+            <a:r>
+              <a:rPr sz="900">
+                <a:solidFill>
+                  <a:srgbClr val="595959"/>
+                </a:solidFill>
+              </a:rPr>
+              <a:t>Copyright © 2026 Behavioral Research Workshop</a:t>
+            </a:r>
+          </a:p>
+        </p:txBody>
+      </p:sp>
+      <p:sp>
+        <p:nvSpPr>
+          <p:cNvPr id="4" name="TextBox 3"/>
+          <p:cNvSpPr txBox="1"/>
+          <p:nvPr/>
+        </p:nvSpPr>
+        <p:spPr>
+          <a:xfrm>
+            <a:off x="8321040" y="4732020"/>
+            <a:ext cx="548640" cy="320040"/>
+          </a:xfrm>
+          <a:prstGeom prst="rect">
+            <a:avLst/>
+          </a:prstGeom>
+          <a:noFill/>
+        </p:spPr>
+        <p:txBody>
+          <a:bodyPr wrap="none" tIns="0" bIns="0">
+            <a:spAutoFit/>
+          </a:bodyPr>
+          <a:lstStyle/>
+          <a:p>
+            <a:pPr algn="r"/>
+            <a:r>
+              <a:rPr sz="1200" b="1">
+                <a:solidFill>
+                  <a:srgbClr val="1F4E79"/>
+                </a:solidFill>
+              </a:rPr>
+              <a:t>16</a:t>
+            </a:r>
+          </a:p>
+        </p:txBody>
+      </p:sp>
     </p:spTree>
   </p:cSld>
 </p:sld>
@@ -4109,6 +4653,74 @@
           </a:p>
         </p:txBody>
       </p:sp>
+      <p:sp>
+        <p:nvSpPr>
+          <p:cNvPr id="4" name="TextBox 3"/>
+          <p:cNvSpPr txBox="1"/>
+          <p:nvPr/>
+        </p:nvSpPr>
+        <p:spPr>
+          <a:xfrm>
+            <a:off x="274320" y="4777740"/>
+            <a:ext cx="5486400" cy="274320"/>
+          </a:xfrm>
+          <a:prstGeom prst="rect">
+            <a:avLst/>
+          </a:prstGeom>
+          <a:noFill/>
+        </p:spPr>
+        <p:txBody>
+          <a:bodyPr wrap="none" tIns="0" bIns="0">
+            <a:spAutoFit/>
+          </a:bodyPr>
+          <a:lstStyle/>
+          <a:p>
+            <a:pPr algn="l"/>
+            <a:r>
+              <a:rPr sz="900">
+                <a:solidFill>
+                  <a:srgbClr val="595959"/>
+                </a:solidFill>
+              </a:rPr>
+              <a:t>Copyright © 2026 Behavioral Research Workshop</a:t>
+            </a:r>
+          </a:p>
+        </p:txBody>
+      </p:sp>
+      <p:sp>
+        <p:nvSpPr>
+          <p:cNvPr id="5" name="TextBox 4"/>
+          <p:cNvSpPr txBox="1"/>
+          <p:nvPr/>
+        </p:nvSpPr>
+        <p:spPr>
+          <a:xfrm>
+            <a:off x="8321040" y="4732020"/>
+            <a:ext cx="548640" cy="320040"/>
+          </a:xfrm>
+          <a:prstGeom prst="rect">
+            <a:avLst/>
+          </a:prstGeom>
+          <a:noFill/>
+        </p:spPr>
+        <p:txBody>
+          <a:bodyPr wrap="none" tIns="0" bIns="0">
+            <a:spAutoFit/>
+          </a:bodyPr>
+          <a:lstStyle/>
+          <a:p>
+            <a:pPr algn="r"/>
+            <a:r>
+              <a:rPr sz="1200" b="1">
+                <a:solidFill>
+                  <a:srgbClr val="1F4E79"/>
+                </a:solidFill>
+              </a:rPr>
+              <a:t>17</a:t>
+            </a:r>
+          </a:p>
+        </p:txBody>
+      </p:sp>
     </p:spTree>
   </p:cSld>
 </p:sld>
@@ -4227,6 +4839,74 @@
             <a:r>
               <a:rPr/>
               <a:t>: conditions can be tracked under neutral labels (Condition A/B) until the researcher chooses to reveal which is treatment – avoids analyst bias</a:t>
+            </a:r>
+          </a:p>
+        </p:txBody>
+      </p:sp>
+      <p:sp>
+        <p:nvSpPr>
+          <p:cNvPr id="4" name="TextBox 3"/>
+          <p:cNvSpPr txBox="1"/>
+          <p:nvPr/>
+        </p:nvSpPr>
+        <p:spPr>
+          <a:xfrm>
+            <a:off x="274320" y="4777740"/>
+            <a:ext cx="5486400" cy="274320"/>
+          </a:xfrm>
+          <a:prstGeom prst="rect">
+            <a:avLst/>
+          </a:prstGeom>
+          <a:noFill/>
+        </p:spPr>
+        <p:txBody>
+          <a:bodyPr wrap="none" tIns="0" bIns="0">
+            <a:spAutoFit/>
+          </a:bodyPr>
+          <a:lstStyle/>
+          <a:p>
+            <a:pPr algn="l"/>
+            <a:r>
+              <a:rPr sz="900">
+                <a:solidFill>
+                  <a:srgbClr val="595959"/>
+                </a:solidFill>
+              </a:rPr>
+              <a:t>Copyright © 2026 Behavioral Research Workshop</a:t>
+            </a:r>
+          </a:p>
+        </p:txBody>
+      </p:sp>
+      <p:sp>
+        <p:nvSpPr>
+          <p:cNvPr id="5" name="TextBox 4"/>
+          <p:cNvSpPr txBox="1"/>
+          <p:nvPr/>
+        </p:nvSpPr>
+        <p:spPr>
+          <a:xfrm>
+            <a:off x="8321040" y="4732020"/>
+            <a:ext cx="548640" cy="320040"/>
+          </a:xfrm>
+          <a:prstGeom prst="rect">
+            <a:avLst/>
+          </a:prstGeom>
+          <a:noFill/>
+        </p:spPr>
+        <p:txBody>
+          <a:bodyPr wrap="none" tIns="0" bIns="0">
+            <a:spAutoFit/>
+          </a:bodyPr>
+          <a:lstStyle/>
+          <a:p>
+            <a:pPr algn="r"/>
+            <a:r>
+              <a:rPr sz="1200" b="1">
+                <a:solidFill>
+                  <a:srgbClr val="1F4E79"/>
+                </a:solidFill>
+              </a:rPr>
+              <a:t>18</a:t>
             </a:r>
           </a:p>
         </p:txBody>
@@ -4636,6 +5316,74 @@
           </a:graphicData>
         </a:graphic>
       </p:graphicFrame>
+      <p:sp>
+        <p:nvSpPr>
+          <p:cNvPr id="7" name="TextBox 6"/>
+          <p:cNvSpPr txBox="1"/>
+          <p:nvPr/>
+        </p:nvSpPr>
+        <p:spPr>
+          <a:xfrm>
+            <a:off x="274320" y="4777740"/>
+            <a:ext cx="5486400" cy="274320"/>
+          </a:xfrm>
+          <a:prstGeom prst="rect">
+            <a:avLst/>
+          </a:prstGeom>
+          <a:noFill/>
+        </p:spPr>
+        <p:txBody>
+          <a:bodyPr wrap="none" tIns="0" bIns="0">
+            <a:spAutoFit/>
+          </a:bodyPr>
+          <a:lstStyle/>
+          <a:p>
+            <a:pPr algn="l"/>
+            <a:r>
+              <a:rPr sz="900">
+                <a:solidFill>
+                  <a:srgbClr val="595959"/>
+                </a:solidFill>
+              </a:rPr>
+              <a:t>Copyright © 2026 Behavioral Research Workshop</a:t>
+            </a:r>
+          </a:p>
+        </p:txBody>
+      </p:sp>
+      <p:sp>
+        <p:nvSpPr>
+          <p:cNvPr id="8" name="TextBox 7"/>
+          <p:cNvSpPr txBox="1"/>
+          <p:nvPr/>
+        </p:nvSpPr>
+        <p:spPr>
+          <a:xfrm>
+            <a:off x="8321040" y="4732020"/>
+            <a:ext cx="548640" cy="320040"/>
+          </a:xfrm>
+          <a:prstGeom prst="rect">
+            <a:avLst/>
+          </a:prstGeom>
+          <a:noFill/>
+        </p:spPr>
+        <p:txBody>
+          <a:bodyPr wrap="none" tIns="0" bIns="0">
+            <a:spAutoFit/>
+          </a:bodyPr>
+          <a:lstStyle/>
+          <a:p>
+            <a:pPr algn="r"/>
+            <a:r>
+              <a:rPr sz="1200" b="1">
+                <a:solidFill>
+                  <a:srgbClr val="1F4E79"/>
+                </a:solidFill>
+              </a:rPr>
+              <a:t>19</a:t>
+            </a:r>
+          </a:p>
+        </p:txBody>
+      </p:sp>
     </p:spTree>
   </p:cSld>
 </p:sld>
@@ -4735,6 +5483,74 @@
           </a:p>
         </p:txBody>
       </p:sp>
+      <p:sp>
+        <p:nvSpPr>
+          <p:cNvPr id="4" name="TextBox 3"/>
+          <p:cNvSpPr txBox="1"/>
+          <p:nvPr/>
+        </p:nvSpPr>
+        <p:spPr>
+          <a:xfrm>
+            <a:off x="274320" y="4777740"/>
+            <a:ext cx="5486400" cy="274320"/>
+          </a:xfrm>
+          <a:prstGeom prst="rect">
+            <a:avLst/>
+          </a:prstGeom>
+          <a:noFill/>
+        </p:spPr>
+        <p:txBody>
+          <a:bodyPr wrap="none" tIns="0" bIns="0">
+            <a:spAutoFit/>
+          </a:bodyPr>
+          <a:lstStyle/>
+          <a:p>
+            <a:pPr algn="l"/>
+            <a:r>
+              <a:rPr sz="900">
+                <a:solidFill>
+                  <a:srgbClr val="595959"/>
+                </a:solidFill>
+              </a:rPr>
+              <a:t>Copyright © 2026 Behavioral Research Workshop</a:t>
+            </a:r>
+          </a:p>
+        </p:txBody>
+      </p:sp>
+      <p:sp>
+        <p:nvSpPr>
+          <p:cNvPr id="5" name="TextBox 4"/>
+          <p:cNvSpPr txBox="1"/>
+          <p:nvPr/>
+        </p:nvSpPr>
+        <p:spPr>
+          <a:xfrm>
+            <a:off x="8321040" y="4732020"/>
+            <a:ext cx="548640" cy="320040"/>
+          </a:xfrm>
+          <a:prstGeom prst="rect">
+            <a:avLst/>
+          </a:prstGeom>
+          <a:noFill/>
+        </p:spPr>
+        <p:txBody>
+          <a:bodyPr wrap="none" tIns="0" bIns="0">
+            <a:spAutoFit/>
+          </a:bodyPr>
+          <a:lstStyle/>
+          <a:p>
+            <a:pPr algn="r"/>
+            <a:r>
+              <a:rPr sz="1200" b="1">
+                <a:solidFill>
+                  <a:srgbClr val="1F4E79"/>
+                </a:solidFill>
+              </a:rPr>
+              <a:t>2</a:t>
+            </a:r>
+          </a:p>
+        </p:txBody>
+      </p:sp>
     </p:spTree>
   </p:cSld>
 </p:sld>
@@ -4844,6 +5660,74 @@
           </a:p>
         </p:txBody>
       </p:sp>
+      <p:sp>
+        <p:nvSpPr>
+          <p:cNvPr id="3" name="TextBox 2"/>
+          <p:cNvSpPr txBox="1"/>
+          <p:nvPr/>
+        </p:nvSpPr>
+        <p:spPr>
+          <a:xfrm>
+            <a:off x="274320" y="4777740"/>
+            <a:ext cx="5486400" cy="274320"/>
+          </a:xfrm>
+          <a:prstGeom prst="rect">
+            <a:avLst/>
+          </a:prstGeom>
+          <a:noFill/>
+        </p:spPr>
+        <p:txBody>
+          <a:bodyPr wrap="none" tIns="0" bIns="0">
+            <a:spAutoFit/>
+          </a:bodyPr>
+          <a:lstStyle/>
+          <a:p>
+            <a:pPr algn="l"/>
+            <a:r>
+              <a:rPr sz="900">
+                <a:solidFill>
+                  <a:srgbClr val="595959"/>
+                </a:solidFill>
+              </a:rPr>
+              <a:t>Copyright © 2026 Behavioral Research Workshop</a:t>
+            </a:r>
+          </a:p>
+        </p:txBody>
+      </p:sp>
+      <p:sp>
+        <p:nvSpPr>
+          <p:cNvPr id="4" name="TextBox 3"/>
+          <p:cNvSpPr txBox="1"/>
+          <p:nvPr/>
+        </p:nvSpPr>
+        <p:spPr>
+          <a:xfrm>
+            <a:off x="8321040" y="4732020"/>
+            <a:ext cx="548640" cy="320040"/>
+          </a:xfrm>
+          <a:prstGeom prst="rect">
+            <a:avLst/>
+          </a:prstGeom>
+          <a:noFill/>
+        </p:spPr>
+        <p:txBody>
+          <a:bodyPr wrap="none" tIns="0" bIns="0">
+            <a:spAutoFit/>
+          </a:bodyPr>
+          <a:lstStyle/>
+          <a:p>
+            <a:pPr algn="r"/>
+            <a:r>
+              <a:rPr sz="1200" b="1">
+                <a:solidFill>
+                  <a:srgbClr val="1F4E79"/>
+                </a:solidFill>
+              </a:rPr>
+              <a:t>20</a:t>
+            </a:r>
+          </a:p>
+        </p:txBody>
+      </p:sp>
     </p:spTree>
   </p:cSld>
 </p:sld>
@@ -4951,6 +5835,74 @@
           </a:p>
         </p:txBody>
       </p:sp>
+      <p:sp>
+        <p:nvSpPr>
+          <p:cNvPr id="4" name="TextBox 3"/>
+          <p:cNvSpPr txBox="1"/>
+          <p:nvPr/>
+        </p:nvSpPr>
+        <p:spPr>
+          <a:xfrm>
+            <a:off x="274320" y="4777740"/>
+            <a:ext cx="5486400" cy="274320"/>
+          </a:xfrm>
+          <a:prstGeom prst="rect">
+            <a:avLst/>
+          </a:prstGeom>
+          <a:noFill/>
+        </p:spPr>
+        <p:txBody>
+          <a:bodyPr wrap="none" tIns="0" bIns="0">
+            <a:spAutoFit/>
+          </a:bodyPr>
+          <a:lstStyle/>
+          <a:p>
+            <a:pPr algn="l"/>
+            <a:r>
+              <a:rPr sz="900">
+                <a:solidFill>
+                  <a:srgbClr val="595959"/>
+                </a:solidFill>
+              </a:rPr>
+              <a:t>Copyright © 2026 Behavioral Research Workshop</a:t>
+            </a:r>
+          </a:p>
+        </p:txBody>
+      </p:sp>
+      <p:sp>
+        <p:nvSpPr>
+          <p:cNvPr id="5" name="TextBox 4"/>
+          <p:cNvSpPr txBox="1"/>
+          <p:nvPr/>
+        </p:nvSpPr>
+        <p:spPr>
+          <a:xfrm>
+            <a:off x="8321040" y="4732020"/>
+            <a:ext cx="548640" cy="320040"/>
+          </a:xfrm>
+          <a:prstGeom prst="rect">
+            <a:avLst/>
+          </a:prstGeom>
+          <a:noFill/>
+        </p:spPr>
+        <p:txBody>
+          <a:bodyPr wrap="none" tIns="0" bIns="0">
+            <a:spAutoFit/>
+          </a:bodyPr>
+          <a:lstStyle/>
+          <a:p>
+            <a:pPr algn="r"/>
+            <a:r>
+              <a:rPr sz="1200" b="1">
+                <a:solidFill>
+                  <a:srgbClr val="1F4E79"/>
+                </a:solidFill>
+              </a:rPr>
+              <a:t>21</a:t>
+            </a:r>
+          </a:p>
+        </p:txBody>
+      </p:sp>
     </p:spTree>
   </p:cSld>
 </p:sld>
@@ -5060,6 +6012,74 @@
           </a:p>
         </p:txBody>
       </p:sp>
+      <p:sp>
+        <p:nvSpPr>
+          <p:cNvPr id="3" name="TextBox 2"/>
+          <p:cNvSpPr txBox="1"/>
+          <p:nvPr/>
+        </p:nvSpPr>
+        <p:spPr>
+          <a:xfrm>
+            <a:off x="274320" y="4777740"/>
+            <a:ext cx="5486400" cy="274320"/>
+          </a:xfrm>
+          <a:prstGeom prst="rect">
+            <a:avLst/>
+          </a:prstGeom>
+          <a:noFill/>
+        </p:spPr>
+        <p:txBody>
+          <a:bodyPr wrap="none" tIns="0" bIns="0">
+            <a:spAutoFit/>
+          </a:bodyPr>
+          <a:lstStyle/>
+          <a:p>
+            <a:pPr algn="l"/>
+            <a:r>
+              <a:rPr sz="900">
+                <a:solidFill>
+                  <a:srgbClr val="595959"/>
+                </a:solidFill>
+              </a:rPr>
+              <a:t>Copyright © 2026 Behavioral Research Workshop</a:t>
+            </a:r>
+          </a:p>
+        </p:txBody>
+      </p:sp>
+      <p:sp>
+        <p:nvSpPr>
+          <p:cNvPr id="4" name="TextBox 3"/>
+          <p:cNvSpPr txBox="1"/>
+          <p:nvPr/>
+        </p:nvSpPr>
+        <p:spPr>
+          <a:xfrm>
+            <a:off x="8321040" y="4732020"/>
+            <a:ext cx="548640" cy="320040"/>
+          </a:xfrm>
+          <a:prstGeom prst="rect">
+            <a:avLst/>
+          </a:prstGeom>
+          <a:noFill/>
+        </p:spPr>
+        <p:txBody>
+          <a:bodyPr wrap="none" tIns="0" bIns="0">
+            <a:spAutoFit/>
+          </a:bodyPr>
+          <a:lstStyle/>
+          <a:p>
+            <a:pPr algn="r"/>
+            <a:r>
+              <a:rPr sz="1200" b="1">
+                <a:solidFill>
+                  <a:srgbClr val="1F4E79"/>
+                </a:solidFill>
+              </a:rPr>
+              <a:t>22</a:t>
+            </a:r>
+          </a:p>
+        </p:txBody>
+      </p:sp>
     </p:spTree>
   </p:cSld>
 </p:sld>
@@ -5171,6 +6191,74 @@
           </a:p>
         </p:txBody>
       </p:sp>
+      <p:sp>
+        <p:nvSpPr>
+          <p:cNvPr id="4" name="TextBox 3"/>
+          <p:cNvSpPr txBox="1"/>
+          <p:nvPr/>
+        </p:nvSpPr>
+        <p:spPr>
+          <a:xfrm>
+            <a:off x="274320" y="4777740"/>
+            <a:ext cx="5486400" cy="274320"/>
+          </a:xfrm>
+          <a:prstGeom prst="rect">
+            <a:avLst/>
+          </a:prstGeom>
+          <a:noFill/>
+        </p:spPr>
+        <p:txBody>
+          <a:bodyPr wrap="none" tIns="0" bIns="0">
+            <a:spAutoFit/>
+          </a:bodyPr>
+          <a:lstStyle/>
+          <a:p>
+            <a:pPr algn="l"/>
+            <a:r>
+              <a:rPr sz="900">
+                <a:solidFill>
+                  <a:srgbClr val="595959"/>
+                </a:solidFill>
+              </a:rPr>
+              <a:t>Copyright © 2026 Behavioral Research Workshop</a:t>
+            </a:r>
+          </a:p>
+        </p:txBody>
+      </p:sp>
+      <p:sp>
+        <p:nvSpPr>
+          <p:cNvPr id="5" name="TextBox 4"/>
+          <p:cNvSpPr txBox="1"/>
+          <p:nvPr/>
+        </p:nvSpPr>
+        <p:spPr>
+          <a:xfrm>
+            <a:off x="8321040" y="4732020"/>
+            <a:ext cx="548640" cy="320040"/>
+          </a:xfrm>
+          <a:prstGeom prst="rect">
+            <a:avLst/>
+          </a:prstGeom>
+          <a:noFill/>
+        </p:spPr>
+        <p:txBody>
+          <a:bodyPr wrap="none" tIns="0" bIns="0">
+            <a:spAutoFit/>
+          </a:bodyPr>
+          <a:lstStyle/>
+          <a:p>
+            <a:pPr algn="r"/>
+            <a:r>
+              <a:rPr sz="1200" b="1">
+                <a:solidFill>
+                  <a:srgbClr val="1F4E79"/>
+                </a:solidFill>
+              </a:rPr>
+              <a:t>23</a:t>
+            </a:r>
+          </a:p>
+        </p:txBody>
+      </p:sp>
     </p:spTree>
   </p:cSld>
 </p:sld>
@@ -5290,6 +6378,74 @@
           </a:p>
         </p:txBody>
       </p:sp>
+      <p:sp>
+        <p:nvSpPr>
+          <p:cNvPr id="4" name="TextBox 3"/>
+          <p:cNvSpPr txBox="1"/>
+          <p:nvPr/>
+        </p:nvSpPr>
+        <p:spPr>
+          <a:xfrm>
+            <a:off x="274320" y="4777740"/>
+            <a:ext cx="5486400" cy="274320"/>
+          </a:xfrm>
+          <a:prstGeom prst="rect">
+            <a:avLst/>
+          </a:prstGeom>
+          <a:noFill/>
+        </p:spPr>
+        <p:txBody>
+          <a:bodyPr wrap="none" tIns="0" bIns="0">
+            <a:spAutoFit/>
+          </a:bodyPr>
+          <a:lstStyle/>
+          <a:p>
+            <a:pPr algn="l"/>
+            <a:r>
+              <a:rPr sz="900">
+                <a:solidFill>
+                  <a:srgbClr val="595959"/>
+                </a:solidFill>
+              </a:rPr>
+              <a:t>Copyright © 2026 Behavioral Research Workshop</a:t>
+            </a:r>
+          </a:p>
+        </p:txBody>
+      </p:sp>
+      <p:sp>
+        <p:nvSpPr>
+          <p:cNvPr id="5" name="TextBox 4"/>
+          <p:cNvSpPr txBox="1"/>
+          <p:nvPr/>
+        </p:nvSpPr>
+        <p:spPr>
+          <a:xfrm>
+            <a:off x="8321040" y="4732020"/>
+            <a:ext cx="548640" cy="320040"/>
+          </a:xfrm>
+          <a:prstGeom prst="rect">
+            <a:avLst/>
+          </a:prstGeom>
+          <a:noFill/>
+        </p:spPr>
+        <p:txBody>
+          <a:bodyPr wrap="none" tIns="0" bIns="0">
+            <a:spAutoFit/>
+          </a:bodyPr>
+          <a:lstStyle/>
+          <a:p>
+            <a:pPr algn="r"/>
+            <a:r>
+              <a:rPr sz="1200" b="1">
+                <a:solidFill>
+                  <a:srgbClr val="1F4E79"/>
+                </a:solidFill>
+              </a:rPr>
+              <a:t>24</a:t>
+            </a:r>
+          </a:p>
+        </p:txBody>
+      </p:sp>
     </p:spTree>
   </p:cSld>
 </p:sld>
@@ -5374,6 +6530,74 @@
           </a:p>
         </p:txBody>
       </p:sp>
+      <p:sp>
+        <p:nvSpPr>
+          <p:cNvPr id="4" name="TextBox 3"/>
+          <p:cNvSpPr txBox="1"/>
+          <p:nvPr/>
+        </p:nvSpPr>
+        <p:spPr>
+          <a:xfrm>
+            <a:off x="274320" y="4777740"/>
+            <a:ext cx="5486400" cy="274320"/>
+          </a:xfrm>
+          <a:prstGeom prst="rect">
+            <a:avLst/>
+          </a:prstGeom>
+          <a:noFill/>
+        </p:spPr>
+        <p:txBody>
+          <a:bodyPr wrap="none" tIns="0" bIns="0">
+            <a:spAutoFit/>
+          </a:bodyPr>
+          <a:lstStyle/>
+          <a:p>
+            <a:pPr algn="l"/>
+            <a:r>
+              <a:rPr sz="900">
+                <a:solidFill>
+                  <a:srgbClr val="595959"/>
+                </a:solidFill>
+              </a:rPr>
+              <a:t>Copyright © 2026 Behavioral Research Workshop</a:t>
+            </a:r>
+          </a:p>
+        </p:txBody>
+      </p:sp>
+      <p:sp>
+        <p:nvSpPr>
+          <p:cNvPr id="5" name="TextBox 4"/>
+          <p:cNvSpPr txBox="1"/>
+          <p:nvPr/>
+        </p:nvSpPr>
+        <p:spPr>
+          <a:xfrm>
+            <a:off x="8321040" y="4732020"/>
+            <a:ext cx="548640" cy="320040"/>
+          </a:xfrm>
+          <a:prstGeom prst="rect">
+            <a:avLst/>
+          </a:prstGeom>
+          <a:noFill/>
+        </p:spPr>
+        <p:txBody>
+          <a:bodyPr wrap="none" tIns="0" bIns="0">
+            <a:spAutoFit/>
+          </a:bodyPr>
+          <a:lstStyle/>
+          <a:p>
+            <a:pPr algn="r"/>
+            <a:r>
+              <a:rPr sz="1200" b="1">
+                <a:solidFill>
+                  <a:srgbClr val="1F4E79"/>
+                </a:solidFill>
+              </a:rPr>
+              <a:t>25</a:t>
+            </a:r>
+          </a:p>
+        </p:txBody>
+      </p:sp>
     </p:spTree>
   </p:cSld>
 </p:sld>
@@ -5458,6 +6682,74 @@
           </a:p>
         </p:txBody>
       </p:sp>
+      <p:sp>
+        <p:nvSpPr>
+          <p:cNvPr id="4" name="TextBox 3"/>
+          <p:cNvSpPr txBox="1"/>
+          <p:nvPr/>
+        </p:nvSpPr>
+        <p:spPr>
+          <a:xfrm>
+            <a:off x="274320" y="4777740"/>
+            <a:ext cx="5486400" cy="274320"/>
+          </a:xfrm>
+          <a:prstGeom prst="rect">
+            <a:avLst/>
+          </a:prstGeom>
+          <a:noFill/>
+        </p:spPr>
+        <p:txBody>
+          <a:bodyPr wrap="none" tIns="0" bIns="0">
+            <a:spAutoFit/>
+          </a:bodyPr>
+          <a:lstStyle/>
+          <a:p>
+            <a:pPr algn="l"/>
+            <a:r>
+              <a:rPr sz="900">
+                <a:solidFill>
+                  <a:srgbClr val="595959"/>
+                </a:solidFill>
+              </a:rPr>
+              <a:t>Copyright © 2026 Behavioral Research Workshop</a:t>
+            </a:r>
+          </a:p>
+        </p:txBody>
+      </p:sp>
+      <p:sp>
+        <p:nvSpPr>
+          <p:cNvPr id="5" name="TextBox 4"/>
+          <p:cNvSpPr txBox="1"/>
+          <p:nvPr/>
+        </p:nvSpPr>
+        <p:spPr>
+          <a:xfrm>
+            <a:off x="8321040" y="4732020"/>
+            <a:ext cx="548640" cy="320040"/>
+          </a:xfrm>
+          <a:prstGeom prst="rect">
+            <a:avLst/>
+          </a:prstGeom>
+          <a:noFill/>
+        </p:spPr>
+        <p:txBody>
+          <a:bodyPr wrap="none" tIns="0" bIns="0">
+            <a:spAutoFit/>
+          </a:bodyPr>
+          <a:lstStyle/>
+          <a:p>
+            <a:pPr algn="r"/>
+            <a:r>
+              <a:rPr sz="1200" b="1">
+                <a:solidFill>
+                  <a:srgbClr val="1F4E79"/>
+                </a:solidFill>
+              </a:rPr>
+              <a:t>26</a:t>
+            </a:r>
+          </a:p>
+        </p:txBody>
+      </p:sp>
     </p:spTree>
   </p:cSld>
 </p:sld>
@@ -5577,6 +6869,74 @@
             <a:r>
               <a:rPr/>
               <a:t>Balance check flagged gender as imbalanced (p=.035) – across 6 tests, ~26% chance of at least one false positive; verified main results hold with a gender control</a:t>
+            </a:r>
+          </a:p>
+        </p:txBody>
+      </p:sp>
+      <p:sp>
+        <p:nvSpPr>
+          <p:cNvPr id="4" name="TextBox 3"/>
+          <p:cNvSpPr txBox="1"/>
+          <p:nvPr/>
+        </p:nvSpPr>
+        <p:spPr>
+          <a:xfrm>
+            <a:off x="274320" y="4777740"/>
+            <a:ext cx="5486400" cy="274320"/>
+          </a:xfrm>
+          <a:prstGeom prst="rect">
+            <a:avLst/>
+          </a:prstGeom>
+          <a:noFill/>
+        </p:spPr>
+        <p:txBody>
+          <a:bodyPr wrap="none" tIns="0" bIns="0">
+            <a:spAutoFit/>
+          </a:bodyPr>
+          <a:lstStyle/>
+          <a:p>
+            <a:pPr algn="l"/>
+            <a:r>
+              <a:rPr sz="900">
+                <a:solidFill>
+                  <a:srgbClr val="595959"/>
+                </a:solidFill>
+              </a:rPr>
+              <a:t>Copyright © 2026 Behavioral Research Workshop</a:t>
+            </a:r>
+          </a:p>
+        </p:txBody>
+      </p:sp>
+      <p:sp>
+        <p:nvSpPr>
+          <p:cNvPr id="5" name="TextBox 4"/>
+          <p:cNvSpPr txBox="1"/>
+          <p:nvPr/>
+        </p:nvSpPr>
+        <p:spPr>
+          <a:xfrm>
+            <a:off x="8321040" y="4732020"/>
+            <a:ext cx="548640" cy="320040"/>
+          </a:xfrm>
+          <a:prstGeom prst="rect">
+            <a:avLst/>
+          </a:prstGeom>
+          <a:noFill/>
+        </p:spPr>
+        <p:txBody>
+          <a:bodyPr wrap="none" tIns="0" bIns="0">
+            <a:spAutoFit/>
+          </a:bodyPr>
+          <a:lstStyle/>
+          <a:p>
+            <a:pPr algn="r"/>
+            <a:r>
+              <a:rPr sz="1200" b="1">
+                <a:solidFill>
+                  <a:srgbClr val="1F4E79"/>
+                </a:solidFill>
+              </a:rPr>
+              <a:t>27</a:t>
             </a:r>
           </a:p>
         </p:txBody>
@@ -5898,6 +7258,74 @@
           </a:graphicData>
         </a:graphic>
       </p:graphicFrame>
+      <p:sp>
+        <p:nvSpPr>
+          <p:cNvPr id="7" name="TextBox 6"/>
+          <p:cNvSpPr txBox="1"/>
+          <p:nvPr/>
+        </p:nvSpPr>
+        <p:spPr>
+          <a:xfrm>
+            <a:off x="274320" y="4777740"/>
+            <a:ext cx="5486400" cy="274320"/>
+          </a:xfrm>
+          <a:prstGeom prst="rect">
+            <a:avLst/>
+          </a:prstGeom>
+          <a:noFill/>
+        </p:spPr>
+        <p:txBody>
+          <a:bodyPr wrap="none" tIns="0" bIns="0">
+            <a:spAutoFit/>
+          </a:bodyPr>
+          <a:lstStyle/>
+          <a:p>
+            <a:pPr algn="l"/>
+            <a:r>
+              <a:rPr sz="900">
+                <a:solidFill>
+                  <a:srgbClr val="595959"/>
+                </a:solidFill>
+              </a:rPr>
+              <a:t>Copyright © 2026 Behavioral Research Workshop</a:t>
+            </a:r>
+          </a:p>
+        </p:txBody>
+      </p:sp>
+      <p:sp>
+        <p:nvSpPr>
+          <p:cNvPr id="8" name="TextBox 7"/>
+          <p:cNvSpPr txBox="1"/>
+          <p:nvPr/>
+        </p:nvSpPr>
+        <p:spPr>
+          <a:xfrm>
+            <a:off x="8321040" y="4732020"/>
+            <a:ext cx="548640" cy="320040"/>
+          </a:xfrm>
+          <a:prstGeom prst="rect">
+            <a:avLst/>
+          </a:prstGeom>
+          <a:noFill/>
+        </p:spPr>
+        <p:txBody>
+          <a:bodyPr wrap="none" tIns="0" bIns="0">
+            <a:spAutoFit/>
+          </a:bodyPr>
+          <a:lstStyle/>
+          <a:p>
+            <a:pPr algn="r"/>
+            <a:r>
+              <a:rPr sz="1200" b="1">
+                <a:solidFill>
+                  <a:srgbClr val="1F4E79"/>
+                </a:solidFill>
+              </a:rPr>
+              <a:t>28</a:t>
+            </a:r>
+          </a:p>
+        </p:txBody>
+      </p:sp>
     </p:spTree>
   </p:cSld>
 </p:sld>
@@ -6013,6 +7441,74 @@
           </a:p>
         </p:txBody>
       </p:sp>
+      <p:sp>
+        <p:nvSpPr>
+          <p:cNvPr id="4" name="TextBox 3"/>
+          <p:cNvSpPr txBox="1"/>
+          <p:nvPr/>
+        </p:nvSpPr>
+        <p:spPr>
+          <a:xfrm>
+            <a:off x="274320" y="4777740"/>
+            <a:ext cx="5486400" cy="274320"/>
+          </a:xfrm>
+          <a:prstGeom prst="rect">
+            <a:avLst/>
+          </a:prstGeom>
+          <a:noFill/>
+        </p:spPr>
+        <p:txBody>
+          <a:bodyPr wrap="none" tIns="0" bIns="0">
+            <a:spAutoFit/>
+          </a:bodyPr>
+          <a:lstStyle/>
+          <a:p>
+            <a:pPr algn="l"/>
+            <a:r>
+              <a:rPr sz="900">
+                <a:solidFill>
+                  <a:srgbClr val="595959"/>
+                </a:solidFill>
+              </a:rPr>
+              <a:t>Copyright © 2026 Behavioral Research Workshop</a:t>
+            </a:r>
+          </a:p>
+        </p:txBody>
+      </p:sp>
+      <p:sp>
+        <p:nvSpPr>
+          <p:cNvPr id="5" name="TextBox 4"/>
+          <p:cNvSpPr txBox="1"/>
+          <p:nvPr/>
+        </p:nvSpPr>
+        <p:spPr>
+          <a:xfrm>
+            <a:off x="8321040" y="4732020"/>
+            <a:ext cx="548640" cy="320040"/>
+          </a:xfrm>
+          <a:prstGeom prst="rect">
+            <a:avLst/>
+          </a:prstGeom>
+          <a:noFill/>
+        </p:spPr>
+        <p:txBody>
+          <a:bodyPr wrap="none" tIns="0" bIns="0">
+            <a:spAutoFit/>
+          </a:bodyPr>
+          <a:lstStyle/>
+          <a:p>
+            <a:pPr algn="r"/>
+            <a:r>
+              <a:rPr sz="1200" b="1">
+                <a:solidFill>
+                  <a:srgbClr val="1F4E79"/>
+                </a:solidFill>
+              </a:rPr>
+              <a:t>29</a:t>
+            </a:r>
+          </a:p>
+        </p:txBody>
+      </p:sp>
     </p:spTree>
   </p:cSld>
 </p:sld>
@@ -6090,6 +7586,74 @@
           </a:ln>
         </p:spPr>
       </p:pic>
+      <p:sp>
+        <p:nvSpPr>
+          <p:cNvPr id="3" name="TextBox 2"/>
+          <p:cNvSpPr txBox="1"/>
+          <p:nvPr/>
+        </p:nvSpPr>
+        <p:spPr>
+          <a:xfrm>
+            <a:off x="274320" y="4777740"/>
+            <a:ext cx="5486400" cy="274320"/>
+          </a:xfrm>
+          <a:prstGeom prst="rect">
+            <a:avLst/>
+          </a:prstGeom>
+          <a:noFill/>
+        </p:spPr>
+        <p:txBody>
+          <a:bodyPr wrap="none" tIns="0" bIns="0">
+            <a:spAutoFit/>
+          </a:bodyPr>
+          <a:lstStyle/>
+          <a:p>
+            <a:pPr algn="l"/>
+            <a:r>
+              <a:rPr sz="900">
+                <a:solidFill>
+                  <a:srgbClr val="595959"/>
+                </a:solidFill>
+              </a:rPr>
+              <a:t>Copyright © 2026 Behavioral Research Workshop</a:t>
+            </a:r>
+          </a:p>
+        </p:txBody>
+      </p:sp>
+      <p:sp>
+        <p:nvSpPr>
+          <p:cNvPr id="4" name="TextBox 3"/>
+          <p:cNvSpPr txBox="1"/>
+          <p:nvPr/>
+        </p:nvSpPr>
+        <p:spPr>
+          <a:xfrm>
+            <a:off x="8321040" y="4732020"/>
+            <a:ext cx="548640" cy="320040"/>
+          </a:xfrm>
+          <a:prstGeom prst="rect">
+            <a:avLst/>
+          </a:prstGeom>
+          <a:noFill/>
+        </p:spPr>
+        <p:txBody>
+          <a:bodyPr wrap="none" tIns="0" bIns="0">
+            <a:spAutoFit/>
+          </a:bodyPr>
+          <a:lstStyle/>
+          <a:p>
+            <a:pPr algn="r"/>
+            <a:r>
+              <a:rPr sz="1200" b="1">
+                <a:solidFill>
+                  <a:srgbClr val="1F4E79"/>
+                </a:solidFill>
+              </a:rPr>
+              <a:t>3</a:t>
+            </a:r>
+          </a:p>
+        </p:txBody>
+      </p:sp>
     </p:spTree>
   </p:cSld>
 </p:sld>
@@ -6177,6 +7741,74 @@
           </a:p>
         </p:txBody>
       </p:sp>
+      <p:sp>
+        <p:nvSpPr>
+          <p:cNvPr id="4" name="TextBox 3"/>
+          <p:cNvSpPr txBox="1"/>
+          <p:nvPr/>
+        </p:nvSpPr>
+        <p:spPr>
+          <a:xfrm>
+            <a:off x="274320" y="4777740"/>
+            <a:ext cx="5486400" cy="274320"/>
+          </a:xfrm>
+          <a:prstGeom prst="rect">
+            <a:avLst/>
+          </a:prstGeom>
+          <a:noFill/>
+        </p:spPr>
+        <p:txBody>
+          <a:bodyPr wrap="none" tIns="0" bIns="0">
+            <a:spAutoFit/>
+          </a:bodyPr>
+          <a:lstStyle/>
+          <a:p>
+            <a:pPr algn="l"/>
+            <a:r>
+              <a:rPr sz="900">
+                <a:solidFill>
+                  <a:srgbClr val="595959"/>
+                </a:solidFill>
+              </a:rPr>
+              <a:t>Copyright © 2026 Behavioral Research Workshop</a:t>
+            </a:r>
+          </a:p>
+        </p:txBody>
+      </p:sp>
+      <p:sp>
+        <p:nvSpPr>
+          <p:cNvPr id="5" name="TextBox 4"/>
+          <p:cNvSpPr txBox="1"/>
+          <p:nvPr/>
+        </p:nvSpPr>
+        <p:spPr>
+          <a:xfrm>
+            <a:off x="8321040" y="4732020"/>
+            <a:ext cx="548640" cy="320040"/>
+          </a:xfrm>
+          <a:prstGeom prst="rect">
+            <a:avLst/>
+          </a:prstGeom>
+          <a:noFill/>
+        </p:spPr>
+        <p:txBody>
+          <a:bodyPr wrap="none" tIns="0" bIns="0">
+            <a:spAutoFit/>
+          </a:bodyPr>
+          <a:lstStyle/>
+          <a:p>
+            <a:pPr algn="r"/>
+            <a:r>
+              <a:rPr sz="1200" b="1">
+                <a:solidFill>
+                  <a:srgbClr val="1F4E79"/>
+                </a:solidFill>
+              </a:rPr>
+              <a:t>30</a:t>
+            </a:r>
+          </a:p>
+        </p:txBody>
+      </p:sp>
     </p:spTree>
   </p:cSld>
 </p:sld>
@@ -6306,6 +7938,74 @@
           </a:p>
         </p:txBody>
       </p:sp>
+      <p:sp>
+        <p:nvSpPr>
+          <p:cNvPr id="4" name="TextBox 3"/>
+          <p:cNvSpPr txBox="1"/>
+          <p:nvPr/>
+        </p:nvSpPr>
+        <p:spPr>
+          <a:xfrm>
+            <a:off x="274320" y="4777740"/>
+            <a:ext cx="5486400" cy="274320"/>
+          </a:xfrm>
+          <a:prstGeom prst="rect">
+            <a:avLst/>
+          </a:prstGeom>
+          <a:noFill/>
+        </p:spPr>
+        <p:txBody>
+          <a:bodyPr wrap="none" tIns="0" bIns="0">
+            <a:spAutoFit/>
+          </a:bodyPr>
+          <a:lstStyle/>
+          <a:p>
+            <a:pPr algn="l"/>
+            <a:r>
+              <a:rPr sz="900">
+                <a:solidFill>
+                  <a:srgbClr val="595959"/>
+                </a:solidFill>
+              </a:rPr>
+              <a:t>Copyright © 2026 Behavioral Research Workshop</a:t>
+            </a:r>
+          </a:p>
+        </p:txBody>
+      </p:sp>
+      <p:sp>
+        <p:nvSpPr>
+          <p:cNvPr id="5" name="TextBox 4"/>
+          <p:cNvSpPr txBox="1"/>
+          <p:nvPr/>
+        </p:nvSpPr>
+        <p:spPr>
+          <a:xfrm>
+            <a:off x="8321040" y="4732020"/>
+            <a:ext cx="548640" cy="320040"/>
+          </a:xfrm>
+          <a:prstGeom prst="rect">
+            <a:avLst/>
+          </a:prstGeom>
+          <a:noFill/>
+        </p:spPr>
+        <p:txBody>
+          <a:bodyPr wrap="none" tIns="0" bIns="0">
+            <a:spAutoFit/>
+          </a:bodyPr>
+          <a:lstStyle/>
+          <a:p>
+            <a:pPr algn="r"/>
+            <a:r>
+              <a:rPr sz="1200" b="1">
+                <a:solidFill>
+                  <a:srgbClr val="1F4E79"/>
+                </a:solidFill>
+              </a:rPr>
+              <a:t>4</a:t>
+            </a:r>
+          </a:p>
+        </p:txBody>
+      </p:sp>
     </p:spTree>
   </p:cSld>
 </p:sld>
@@ -6415,6 +8115,74 @@
           </a:p>
         </p:txBody>
       </p:sp>
+      <p:sp>
+        <p:nvSpPr>
+          <p:cNvPr id="3" name="TextBox 2"/>
+          <p:cNvSpPr txBox="1"/>
+          <p:nvPr/>
+        </p:nvSpPr>
+        <p:spPr>
+          <a:xfrm>
+            <a:off x="274320" y="4777740"/>
+            <a:ext cx="5486400" cy="274320"/>
+          </a:xfrm>
+          <a:prstGeom prst="rect">
+            <a:avLst/>
+          </a:prstGeom>
+          <a:noFill/>
+        </p:spPr>
+        <p:txBody>
+          <a:bodyPr wrap="none" tIns="0" bIns="0">
+            <a:spAutoFit/>
+          </a:bodyPr>
+          <a:lstStyle/>
+          <a:p>
+            <a:pPr algn="l"/>
+            <a:r>
+              <a:rPr sz="900">
+                <a:solidFill>
+                  <a:srgbClr val="595959"/>
+                </a:solidFill>
+              </a:rPr>
+              <a:t>Copyright © 2026 Behavioral Research Workshop</a:t>
+            </a:r>
+          </a:p>
+        </p:txBody>
+      </p:sp>
+      <p:sp>
+        <p:nvSpPr>
+          <p:cNvPr id="4" name="TextBox 3"/>
+          <p:cNvSpPr txBox="1"/>
+          <p:nvPr/>
+        </p:nvSpPr>
+        <p:spPr>
+          <a:xfrm>
+            <a:off x="8321040" y="4732020"/>
+            <a:ext cx="548640" cy="320040"/>
+          </a:xfrm>
+          <a:prstGeom prst="rect">
+            <a:avLst/>
+          </a:prstGeom>
+          <a:noFill/>
+        </p:spPr>
+        <p:txBody>
+          <a:bodyPr wrap="none" tIns="0" bIns="0">
+            <a:spAutoFit/>
+          </a:bodyPr>
+          <a:lstStyle/>
+          <a:p>
+            <a:pPr algn="r"/>
+            <a:r>
+              <a:rPr sz="1200" b="1">
+                <a:solidFill>
+                  <a:srgbClr val="1F4E79"/>
+                </a:solidFill>
+              </a:rPr>
+              <a:t>5</a:t>
+            </a:r>
+          </a:p>
+        </p:txBody>
+      </p:sp>
     </p:spTree>
   </p:cSld>
 </p:sld>
@@ -6507,6 +8275,74 @@
           </a:p>
         </p:txBody>
       </p:sp>
+      <p:sp>
+        <p:nvSpPr>
+          <p:cNvPr id="4" name="TextBox 3"/>
+          <p:cNvSpPr txBox="1"/>
+          <p:nvPr/>
+        </p:nvSpPr>
+        <p:spPr>
+          <a:xfrm>
+            <a:off x="274320" y="4777740"/>
+            <a:ext cx="5486400" cy="274320"/>
+          </a:xfrm>
+          <a:prstGeom prst="rect">
+            <a:avLst/>
+          </a:prstGeom>
+          <a:noFill/>
+        </p:spPr>
+        <p:txBody>
+          <a:bodyPr wrap="none" tIns="0" bIns="0">
+            <a:spAutoFit/>
+          </a:bodyPr>
+          <a:lstStyle/>
+          <a:p>
+            <a:pPr algn="l"/>
+            <a:r>
+              <a:rPr sz="900">
+                <a:solidFill>
+                  <a:srgbClr val="595959"/>
+                </a:solidFill>
+              </a:rPr>
+              <a:t>Copyright © 2026 Behavioral Research Workshop</a:t>
+            </a:r>
+          </a:p>
+        </p:txBody>
+      </p:sp>
+      <p:sp>
+        <p:nvSpPr>
+          <p:cNvPr id="5" name="TextBox 4"/>
+          <p:cNvSpPr txBox="1"/>
+          <p:nvPr/>
+        </p:nvSpPr>
+        <p:spPr>
+          <a:xfrm>
+            <a:off x="8321040" y="4732020"/>
+            <a:ext cx="548640" cy="320040"/>
+          </a:xfrm>
+          <a:prstGeom prst="rect">
+            <a:avLst/>
+          </a:prstGeom>
+          <a:noFill/>
+        </p:spPr>
+        <p:txBody>
+          <a:bodyPr wrap="none" tIns="0" bIns="0">
+            <a:spAutoFit/>
+          </a:bodyPr>
+          <a:lstStyle/>
+          <a:p>
+            <a:pPr algn="r"/>
+            <a:r>
+              <a:rPr sz="1200" b="1">
+                <a:solidFill>
+                  <a:srgbClr val="1F4E79"/>
+                </a:solidFill>
+              </a:rPr>
+              <a:t>6</a:t>
+            </a:r>
+          </a:p>
+        </p:txBody>
+      </p:sp>
     </p:spTree>
   </p:cSld>
 </p:sld>
@@ -6633,6 +8469,74 @@
           </a:p>
         </p:txBody>
       </p:sp>
+      <p:sp>
+        <p:nvSpPr>
+          <p:cNvPr id="4" name="TextBox 3"/>
+          <p:cNvSpPr txBox="1"/>
+          <p:nvPr/>
+        </p:nvSpPr>
+        <p:spPr>
+          <a:xfrm>
+            <a:off x="274320" y="4777740"/>
+            <a:ext cx="5486400" cy="274320"/>
+          </a:xfrm>
+          <a:prstGeom prst="rect">
+            <a:avLst/>
+          </a:prstGeom>
+          <a:noFill/>
+        </p:spPr>
+        <p:txBody>
+          <a:bodyPr wrap="none" tIns="0" bIns="0">
+            <a:spAutoFit/>
+          </a:bodyPr>
+          <a:lstStyle/>
+          <a:p>
+            <a:pPr algn="l"/>
+            <a:r>
+              <a:rPr sz="900">
+                <a:solidFill>
+                  <a:srgbClr val="595959"/>
+                </a:solidFill>
+              </a:rPr>
+              <a:t>Copyright © 2026 Behavioral Research Workshop</a:t>
+            </a:r>
+          </a:p>
+        </p:txBody>
+      </p:sp>
+      <p:sp>
+        <p:nvSpPr>
+          <p:cNvPr id="5" name="TextBox 4"/>
+          <p:cNvSpPr txBox="1"/>
+          <p:nvPr/>
+        </p:nvSpPr>
+        <p:spPr>
+          <a:xfrm>
+            <a:off x="8321040" y="4732020"/>
+            <a:ext cx="548640" cy="320040"/>
+          </a:xfrm>
+          <a:prstGeom prst="rect">
+            <a:avLst/>
+          </a:prstGeom>
+          <a:noFill/>
+        </p:spPr>
+        <p:txBody>
+          <a:bodyPr wrap="none" tIns="0" bIns="0">
+            <a:spAutoFit/>
+          </a:bodyPr>
+          <a:lstStyle/>
+          <a:p>
+            <a:pPr algn="r"/>
+            <a:r>
+              <a:rPr sz="1200" b="1">
+                <a:solidFill>
+                  <a:srgbClr val="1F4E79"/>
+                </a:solidFill>
+              </a:rPr>
+              <a:t>7</a:t>
+            </a:r>
+          </a:p>
+        </p:txBody>
+      </p:sp>
     </p:spTree>
   </p:cSld>
 </p:sld>
@@ -6792,6 +8696,74 @@
           </a:p>
         </p:txBody>
       </p:sp>
+      <p:sp>
+        <p:nvSpPr>
+          <p:cNvPr id="4" name="TextBox 3"/>
+          <p:cNvSpPr txBox="1"/>
+          <p:nvPr/>
+        </p:nvSpPr>
+        <p:spPr>
+          <a:xfrm>
+            <a:off x="274320" y="4777740"/>
+            <a:ext cx="5486400" cy="274320"/>
+          </a:xfrm>
+          <a:prstGeom prst="rect">
+            <a:avLst/>
+          </a:prstGeom>
+          <a:noFill/>
+        </p:spPr>
+        <p:txBody>
+          <a:bodyPr wrap="none" tIns="0" bIns="0">
+            <a:spAutoFit/>
+          </a:bodyPr>
+          <a:lstStyle/>
+          <a:p>
+            <a:pPr algn="l"/>
+            <a:r>
+              <a:rPr sz="900">
+                <a:solidFill>
+                  <a:srgbClr val="595959"/>
+                </a:solidFill>
+              </a:rPr>
+              <a:t>Copyright © 2026 Behavioral Research Workshop</a:t>
+            </a:r>
+          </a:p>
+        </p:txBody>
+      </p:sp>
+      <p:sp>
+        <p:nvSpPr>
+          <p:cNvPr id="5" name="TextBox 4"/>
+          <p:cNvSpPr txBox="1"/>
+          <p:nvPr/>
+        </p:nvSpPr>
+        <p:spPr>
+          <a:xfrm>
+            <a:off x="8321040" y="4732020"/>
+            <a:ext cx="548640" cy="320040"/>
+          </a:xfrm>
+          <a:prstGeom prst="rect">
+            <a:avLst/>
+          </a:prstGeom>
+          <a:noFill/>
+        </p:spPr>
+        <p:txBody>
+          <a:bodyPr wrap="none" tIns="0" bIns="0">
+            <a:spAutoFit/>
+          </a:bodyPr>
+          <a:lstStyle/>
+          <a:p>
+            <a:pPr algn="r"/>
+            <a:r>
+              <a:rPr sz="1200" b="1">
+                <a:solidFill>
+                  <a:srgbClr val="1F4E79"/>
+                </a:solidFill>
+              </a:rPr>
+              <a:t>8</a:t>
+            </a:r>
+          </a:p>
+        </p:txBody>
+      </p:sp>
     </p:spTree>
   </p:cSld>
 </p:sld>
@@ -6876,6 +8848,74 @@
       04_synthetic_test/    &lt;- sampled subjects, responses, data
       05_analysis/          &lt;- balance report, regressions, charts
       07_writeup/           &lt;- generated writeup (md + docx)</a:t>
+            </a:r>
+          </a:p>
+        </p:txBody>
+      </p:sp>
+      <p:sp>
+        <p:nvSpPr>
+          <p:cNvPr id="4" name="TextBox 3"/>
+          <p:cNvSpPr txBox="1"/>
+          <p:nvPr/>
+        </p:nvSpPr>
+        <p:spPr>
+          <a:xfrm>
+            <a:off x="274320" y="4777740"/>
+            <a:ext cx="5486400" cy="274320"/>
+          </a:xfrm>
+          <a:prstGeom prst="rect">
+            <a:avLst/>
+          </a:prstGeom>
+          <a:noFill/>
+        </p:spPr>
+        <p:txBody>
+          <a:bodyPr wrap="none" tIns="0" bIns="0">
+            <a:spAutoFit/>
+          </a:bodyPr>
+          <a:lstStyle/>
+          <a:p>
+            <a:pPr algn="l"/>
+            <a:r>
+              <a:rPr sz="900">
+                <a:solidFill>
+                  <a:srgbClr val="595959"/>
+                </a:solidFill>
+              </a:rPr>
+              <a:t>Copyright © 2026 Behavioral Research Workshop</a:t>
+            </a:r>
+          </a:p>
+        </p:txBody>
+      </p:sp>
+      <p:sp>
+        <p:nvSpPr>
+          <p:cNvPr id="5" name="TextBox 4"/>
+          <p:cNvSpPr txBox="1"/>
+          <p:nvPr/>
+        </p:nvSpPr>
+        <p:spPr>
+          <a:xfrm>
+            <a:off x="8321040" y="4732020"/>
+            <a:ext cx="548640" cy="320040"/>
+          </a:xfrm>
+          <a:prstGeom prst="rect">
+            <a:avLst/>
+          </a:prstGeom>
+          <a:noFill/>
+        </p:spPr>
+        <p:txBody>
+          <a:bodyPr wrap="none" tIns="0" bIns="0">
+            <a:spAutoFit/>
+          </a:bodyPr>
+          <a:lstStyle/>
+          <a:p>
+            <a:pPr algn="r"/>
+            <a:r>
+              <a:rPr sz="1200" b="1">
+                <a:solidFill>
+                  <a:srgbClr val="1F4E79"/>
+                </a:solidFill>
+              </a:rPr>
+              <a:t>9</a:t>
             </a:r>
           </a:p>
         </p:txBody>
@@ -7203,265 +9243,4 @@
   </a:objectDefaults>
   <a:extraClrSchemeLst/>
 </a:theme>
-</file>
-
-<file path=ppt/theme/theme2.xml><?xml version="1.0" encoding="utf-8"?>
-<a:theme xmlns:a="http://schemas.openxmlformats.org/drawingml/2006/main" name="Office Theme">
-  <a:themeElements>
-    <a:clrScheme name="Office">
-      <a:dk1>
-        <a:sysClr val="windowText" lastClr="000000"/>
-      </a:dk1>
-      <a:lt1>
-        <a:sysClr val="window" lastClr="FFFFFF"/>
-      </a:lt1>
-      <a:dk2>
-        <a:srgbClr val="44546A"/>
-      </a:dk2>
-      <a:lt2>
-        <a:srgbClr val="E7E6E6"/>
-      </a:lt2>
-      <a:accent1>
-        <a:srgbClr val="5B9BD5"/>
-      </a:accent1>
-      <a:accent2>
-        <a:srgbClr val="ED7D31"/>
-      </a:accent2>
-      <a:accent3>
-        <a:srgbClr val="A5A5A5"/>
-      </a:accent3>
-      <a:accent4>
-        <a:srgbClr val="FFC000"/>
-      </a:accent4>
-      <a:accent5>
-        <a:srgbClr val="4472C4"/>
-      </a:accent5>
-      <a:accent6>
-        <a:srgbClr val="70AD47"/>
-      </a:accent6>
-      <a:hlink>
-        <a:srgbClr val="0563C1"/>
-      </a:hlink>
-      <a:folHlink>
-        <a:srgbClr val="954F72"/>
-      </a:folHlink>
-    </a:clrScheme>
-    <a:fontScheme name="Office">
-      <a:majorFont>
-        <a:latin typeface="Calibri Light" panose="020F0302020204030204"/>
-        <a:ea typeface=""/>
-        <a:cs typeface=""/>
-        <a:font script="Jpan" typeface="ＭＳ Ｐゴシック"/>
-        <a:font script="Hang" typeface="맑은 고딕"/>
-        <a:font script="Hans" typeface="宋体"/>
-        <a:font script="Hant" typeface="新細明體"/>
-        <a:font script="Arab" typeface="Times New Roman"/>
-        <a:font script="Hebr" typeface="Times New Roman"/>
-        <a:font script="Thai" typeface="Angsana New"/>
-        <a:font script="Ethi" typeface="Nyala"/>
-        <a:font script="Beng" typeface="Vrinda"/>
-        <a:font script="Gujr" typeface="Shruti"/>
-        <a:font script="Khmr" typeface="MoolBoran"/>
-        <a:font script="Knda" typeface="Tunga"/>
-        <a:font script="Guru" typeface="Raavi"/>
-        <a:font script="Cans" typeface="Euphemia"/>
-        <a:font script="Cher" typeface="Plantagenet Cherokee"/>
-        <a:font script="Yiii" typeface="Microsoft Yi Baiti"/>
-        <a:font script="Tibt" typeface="Microsoft Himalaya"/>
-        <a:font script="Thaa" typeface="MV Boli"/>
-        <a:font script="Deva" typeface="Mangal"/>
-        <a:font script="Telu" typeface="Gautami"/>
-        <a:font script="Taml" typeface="Latha"/>
-        <a:font script="Syrc" typeface="Estrangelo Edessa"/>
-        <a:font script="Orya" typeface="Kalinga"/>
-        <a:font script="Mlym" typeface="Kartika"/>
-        <a:font script="Laoo" typeface="DokChampa"/>
-        <a:font script="Sinh" typeface="Iskoola Pota"/>
-        <a:font script="Mong" typeface="Mongolian Baiti"/>
-        <a:font script="Viet" typeface="Times New Roman"/>
-        <a:font script="Uigh" typeface="Microsoft Uighur"/>
-        <a:font script="Geor" typeface="Sylfaen"/>
-      </a:majorFont>
-      <a:minorFont>
-        <a:latin typeface="Calibri" panose="020F0502020204030204"/>
-        <a:ea typeface=""/>
-        <a:cs typeface=""/>
-        <a:font script="Jpan" typeface="ＭＳ Ｐゴシック"/>
-        <a:font script="Hang" typeface="맑은 고딕"/>
-        <a:font script="Hans" typeface="宋体"/>
-        <a:font script="Hant" typeface="新細明體"/>
-        <a:font script="Arab" typeface="Arial"/>
-        <a:font script="Hebr" typeface="Arial"/>
-        <a:font script="Thai" typeface="Cordia New"/>
-        <a:font script="Ethi" typeface="Nyala"/>
-        <a:font script="Beng" typeface="Vrinda"/>
-        <a:font script="Gujr" typeface="Shruti"/>
-        <a:font script="Khmr" typeface="DaunPenh"/>
-        <a:font script="Knda" typeface="Tunga"/>
-        <a:font script="Guru" typeface="Raavi"/>
-        <a:font script="Cans" typeface="Euphemia"/>
-        <a:font script="Cher" typeface="Plantagenet Cherokee"/>
-        <a:font script="Yiii" typeface="Microsoft Yi Baiti"/>
-        <a:font script="Tibt" typeface="Microsoft Himalaya"/>
-        <a:font script="Thaa" typeface="MV Boli"/>
-        <a:font script="Deva" typeface="Mangal"/>
-        <a:font script="Telu" typeface="Gautami"/>
-        <a:font script="Taml" typeface="Latha"/>
-        <a:font script="Syrc" typeface="Estrangelo Edessa"/>
-        <a:font script="Orya" typeface="Kalinga"/>
-        <a:font script="Mlym" typeface="Kartika"/>
-        <a:font script="Laoo" typeface="DokChampa"/>
-        <a:font script="Sinh" typeface="Iskoola Pota"/>
-        <a:font script="Mong" typeface="Mongolian Baiti"/>
-        <a:font script="Viet" typeface="Arial"/>
-        <a:font script="Uigh" typeface="Microsoft Uighur"/>
-        <a:font script="Geor" typeface="Sylfaen"/>
-      </a:minorFont>
-    </a:fontScheme>
-    <a:fmtScheme name="Office">
-      <a:fillStyleLst>
-        <a:solidFill>
-          <a:schemeClr val="phClr"/>
-        </a:solidFill>
-        <a:gradFill rotWithShape="1">
-          <a:gsLst>
-            <a:gs pos="0">
-              <a:schemeClr val="phClr">
-                <a:lumMod val="110000"/>
-                <a:satMod val="105000"/>
-                <a:tint val="67000"/>
-              </a:schemeClr>
-            </a:gs>
-            <a:gs pos="50000">
-              <a:schemeClr val="phClr">
-                <a:lumMod val="105000"/>
-                <a:satMod val="103000"/>
-                <a:tint val="73000"/>
-              </a:schemeClr>
-            </a:gs>
-            <a:gs pos="100000">
-              <a:schemeClr val="phClr">
-                <a:lumMod val="105000"/>
-                <a:satMod val="109000"/>
-                <a:tint val="81000"/>
-              </a:schemeClr>
-            </a:gs>
-          </a:gsLst>
-          <a:lin ang="5400000" scaled="0"/>
-        </a:gradFill>
-        <a:gradFill rotWithShape="1">
-          <a:gsLst>
-            <a:gs pos="0">
-              <a:schemeClr val="phClr">
-                <a:satMod val="103000"/>
-                <a:lumMod val="102000"/>
-                <a:tint val="94000"/>
-              </a:schemeClr>
-            </a:gs>
-            <a:gs pos="50000">
-              <a:schemeClr val="phClr">
-                <a:satMod val="110000"/>
-                <a:lumMod val="100000"/>
-                <a:shade val="100000"/>
-              </a:schemeClr>
-            </a:gs>
-            <a:gs pos="100000">
-              <a:schemeClr val="phClr">
-                <a:lumMod val="99000"/>
-                <a:satMod val="120000"/>
-                <a:shade val="78000"/>
-              </a:schemeClr>
-            </a:gs>
-          </a:gsLst>
-          <a:lin ang="5400000" scaled="0"/>
-        </a:gradFill>
-      </a:fillStyleLst>
-      <a:lnStyleLst>
-        <a:ln w="6350" cap="flat" cmpd="sng" algn="ctr">
-          <a:solidFill>
-            <a:schemeClr val="phClr"/>
-          </a:solidFill>
-          <a:prstDash val="solid"/>
-          <a:miter lim="800000"/>
-        </a:ln>
-        <a:ln w="12700" cap="flat" cmpd="sng" algn="ctr">
-          <a:solidFill>
-            <a:schemeClr val="phClr"/>
-          </a:solidFill>
-          <a:prstDash val="solid"/>
-          <a:miter lim="800000"/>
-        </a:ln>
-        <a:ln w="19050" cap="flat" cmpd="sng" algn="ctr">
-          <a:solidFill>
-            <a:schemeClr val="phClr"/>
-          </a:solidFill>
-          <a:prstDash val="solid"/>
-          <a:miter lim="800000"/>
-        </a:ln>
-      </a:lnStyleLst>
-      <a:effectStyleLst>
-        <a:effectStyle>
-          <a:effectLst/>
-        </a:effectStyle>
-        <a:effectStyle>
-          <a:effectLst/>
-        </a:effectStyle>
-        <a:effectStyle>
-          <a:effectLst>
-            <a:outerShdw blurRad="57150" dist="19050" dir="5400000" algn="ctr" rotWithShape="0">
-              <a:srgbClr val="000000">
-                <a:alpha val="63000"/>
-              </a:srgbClr>
-            </a:outerShdw>
-          </a:effectLst>
-        </a:effectStyle>
-      </a:effectStyleLst>
-      <a:bgFillStyleLst>
-        <a:solidFill>
-          <a:schemeClr val="phClr"/>
-        </a:solidFill>
-        <a:solidFill>
-          <a:schemeClr val="phClr">
-            <a:tint val="95000"/>
-            <a:satMod val="170000"/>
-          </a:schemeClr>
-        </a:solidFill>
-        <a:gradFill rotWithShape="1">
-          <a:gsLst>
-            <a:gs pos="0">
-              <a:schemeClr val="phClr">
-                <a:tint val="93000"/>
-                <a:satMod val="150000"/>
-                <a:shade val="98000"/>
-                <a:lumMod val="102000"/>
-              </a:schemeClr>
-            </a:gs>
-            <a:gs pos="50000">
-              <a:schemeClr val="phClr">
-                <a:tint val="98000"/>
-                <a:satMod val="130000"/>
-                <a:shade val="90000"/>
-                <a:lumMod val="103000"/>
-              </a:schemeClr>
-            </a:gs>
-            <a:gs pos="100000">
-              <a:schemeClr val="phClr">
-                <a:shade val="63000"/>
-                <a:satMod val="120000"/>
-              </a:schemeClr>
-            </a:gs>
-          </a:gsLst>
-          <a:lin ang="5400000" scaled="0"/>
-        </a:gradFill>
-      </a:bgFillStyleLst>
-    </a:fmtScheme>
-  </a:themeElements>
-  <a:objectDefaults/>
-  <a:extraClrSchemeLst/>
-  <a:extLst>
-    <a:ext uri="{05A4C25C-085E-4340-85A3-A5531E510DB2}">
-      <thm15:themeFamily xmlns:thm15="http://schemas.microsoft.com/office/thememl/2012/main" name="Office Theme" id="{62F939B6-93AF-4DB8-9C6B-D6C7DFDC589F}" vid="{4A3C46E8-61CC-4603-A589-7422A47A8E4A}"/>
-    </a:ext>
-  </a:extLst>
-</a:theme>
 </file>
--- a/presentations/2026-workshop/slides.pptx
+++ b/presentations/2026-workshop/slides.pptx
@@ -7003,7 +7003,12 @@
             <p:ph idx="2" sz="half" type="body"/>
           </p:nvPr>
         </p:nvSpPr>
-        <p:spPr/>
+        <p:spPr>
+          <a:xfrm>
+            <a:off x="457201" y="1076326"/>
+            <a:ext cx="3008313" cy="2700000"/>
+          </a:xfrm>
+        </p:spPr>
         <p:txBody>
           <a:bodyPr/>
           <a:lstStyle/>
@@ -7326,6 +7331,59 @@
           </a:p>
         </p:txBody>
       </p:sp>
+      <p:sp>
+        <p:nvSpPr>
+          <p:cNvPr id="9" name="Rounded Rectangle 8"/>
+          <p:cNvSpPr/>
+          <p:nvPr/>
+        </p:nvSpPr>
+        <p:spPr>
+          <a:xfrm>
+            <a:off x="457201" y="3856326"/>
+            <a:ext cx="3008313" cy="750000"/>
+          </a:xfrm>
+          <a:prstGeom prst="roundRect">
+            <a:avLst/>
+          </a:prstGeom>
+          <a:solidFill>
+            <a:srgbClr val="FFFF00"/>
+          </a:solidFill>
+          <a:ln w="19050">
+            <a:solidFill>
+              <a:srgbClr val="000000"/>
+            </a:solidFill>
+          </a:ln>
+        </p:spPr>
+        <p:style>
+          <a:lnRef idx="1">
+            <a:schemeClr val="accent1"/>
+          </a:lnRef>
+          <a:fillRef idx="3">
+            <a:schemeClr val="accent1"/>
+          </a:fillRef>
+          <a:effectRef idx="2">
+            <a:schemeClr val="accent1"/>
+          </a:effectRef>
+          <a:fontRef idx="minor">
+            <a:schemeClr val="lt1"/>
+          </a:fontRef>
+        </p:style>
+        <p:txBody>
+          <a:bodyPr rtlCol="0" anchor="ctr" wrap="square"/>
+          <a:lstStyle/>
+          <a:p>
+            <a:pPr algn="ctr"/>
+            <a:r>
+              <a:rPr sz="1400" b="1">
+                <a:solidFill>
+                  <a:srgbClr val="000000"/>
+                </a:solidFill>
+              </a:rPr>
+              <a:t>We didn't design this to match a published study. It just did.</a:t>
+            </a:r>
+          </a:p>
+        </p:txBody>
+      </p:sp>
     </p:spTree>
   </p:cSld>
 </p:sld>
@@ -7383,7 +7441,12 @@
             <p:ph idx="1"/>
           </p:nvPr>
         </p:nvSpPr>
-        <p:spPr/>
+        <p:spPr>
+          <a:xfrm>
+            <a:off x="457200" y="1200151"/>
+            <a:ext cx="8229600" cy="2700000"/>
+          </a:xfrm>
+        </p:spPr>
         <p:txBody>
           <a:bodyPr/>
           <a:lstStyle/>
@@ -7505,6 +7568,59 @@
                 </a:solidFill>
               </a:rPr>
               <a:t>29</a:t>
+            </a:r>
+          </a:p>
+        </p:txBody>
+      </p:sp>
+      <p:sp>
+        <p:nvSpPr>
+          <p:cNvPr id="6" name="Rounded Rectangle 5"/>
+          <p:cNvSpPr/>
+          <p:nvPr/>
+        </p:nvSpPr>
+        <p:spPr>
+          <a:xfrm>
+            <a:off x="457200" y="3980151"/>
+            <a:ext cx="8229600" cy="650000"/>
+          </a:xfrm>
+          <a:prstGeom prst="roundRect">
+            <a:avLst/>
+          </a:prstGeom>
+          <a:solidFill>
+            <a:srgbClr val="FFFF00"/>
+          </a:solidFill>
+          <a:ln w="19050">
+            <a:solidFill>
+              <a:srgbClr val="000000"/>
+            </a:solidFill>
+          </a:ln>
+        </p:spPr>
+        <p:style>
+          <a:lnRef idx="1">
+            <a:schemeClr val="accent1"/>
+          </a:lnRef>
+          <a:fillRef idx="3">
+            <a:schemeClr val="accent1"/>
+          </a:fillRef>
+          <a:effectRef idx="2">
+            <a:schemeClr val="accent1"/>
+          </a:effectRef>
+          <a:fontRef idx="minor">
+            <a:schemeClr val="lt1"/>
+          </a:fontRef>
+        </p:style>
+        <p:txBody>
+          <a:bodyPr rtlCol="0" anchor="ctr" wrap="square"/>
+          <a:lstStyle/>
+          <a:p>
+            <a:pPr algn="ctr"/>
+            <a:r>
+              <a:rPr sz="1400" b="1">
+                <a:solidFill>
+                  <a:srgbClr val="000000"/>
+                </a:solidFill>
+              </a:rPr>
+              <a:t>Synthetic samples are a tool for iteration — not a substitute for real data.</a:t>
             </a:r>
           </a:p>
         </p:txBody>

--- a/presentations/2026-workshop/slides.pptx
+++ b/presentations/2026-workshop/slides.pptx
@@ -35,6 +35,7 @@
     <p:sldId id="283" r:id="rId29"/>
     <p:sldId id="284" r:id="rId30"/>
     <p:sldId id="285" r:id="rId31"/>
+    <p:sldId id="286" r:id="rId32"/>
   </p:sldIdLst>
   <p:sldSz cx="9144000" cy="5143500" type="screen16x9"/>
   <p:notesSz cx="6858000" cy="9144000"/>
@@ -3187,32 +3188,7 @@
       </p:sp>
       <p:sp>
         <p:nvSpPr>
-          <p:cNvPr id="4" name="Date Placeholder 3"/>
-          <p:cNvSpPr>
-            <a:spLocks noGrp="1"/>
-          </p:cNvSpPr>
-          <p:nvPr>
-            <p:ph idx="10" sz="half" type="dt"/>
-          </p:nvPr>
-        </p:nvSpPr>
-        <p:spPr/>
-        <p:txBody>
-          <a:bodyPr/>
-          <a:lstStyle/>
-          <a:p>
-            <a:pPr lvl="0" indent="0" marL="0">
-              <a:buNone/>
-            </a:pPr>
-            <a:r>
-              <a:rPr/>
-              <a:t>2026</a:t>
-            </a:r>
-          </a:p>
-        </p:txBody>
-      </p:sp>
-      <p:sp>
-        <p:nvSpPr>
-          <p:cNvPr id="5" name="TextBox 4"/>
+          <p:cNvPr id="4" name="TextBox 3"/>
           <p:cNvSpPr txBox="1"/>
           <p:nvPr/>
         </p:nvSpPr>
@@ -3239,14 +3215,14 @@
                   <a:srgbClr val="595959"/>
                 </a:solidFill>
               </a:rPr>
-              <a:t>Copyright © 2026 Behavioral Research Workshop</a:t>
-            </a:r>
-          </a:p>
-        </p:txBody>
-      </p:sp>
-      <p:sp>
-        <p:nvSpPr>
-          <p:cNvPr id="6" name="TextBox 5"/>
+              <a:t>Copyright © 2026 Stephen Shu</a:t>
+            </a:r>
+          </a:p>
+        </p:txBody>
+      </p:sp>
+      <p:sp>
+        <p:nvSpPr>
+          <p:cNvPr id="5" name="TextBox 4"/>
           <p:cNvSpPr txBox="1"/>
           <p:nvPr/>
         </p:nvSpPr>
@@ -3384,7 +3360,7 @@
                   <a:srgbClr val="595959"/>
                 </a:solidFill>
               </a:rPr>
-              <a:t>Copyright © 2026 Behavioral Research Workshop</a:t>
+              <a:t>Copyright © 2026 Stephen Shu</a:t>
             </a:r>
           </a:p>
         </p:txBody>
@@ -3487,40 +3463,40 @@
           <a:p>
             <a:pPr lvl="0"/>
             <a:r>
-              <a:rPr b="1"/>
+              <a:rPr b="1" sz="2200"/>
               <a:t>Built</a:t>
             </a:r>
             <a:r>
-              <a:rPr/>
+              <a:rPr sz="2200"/>
               <a:t>: Stages 3, 4, 5, 7 – the empirical core (design -&gt; test -&gt; analyze -&gt; write up)</a:t>
             </a:r>
           </a:p>
           <a:p>
             <a:pPr lvl="0"/>
             <a:r>
-              <a:rPr b="1"/>
+              <a:rPr b="1" sz="2200"/>
               <a:t>Deferred</a:t>
             </a:r>
             <a:r>
-              <a:rPr/>
+              <a:rPr sz="2200"/>
               <a:t>: Stages 1, 2, 6, 8, 9 – audit/ideation/presentation/revision/feedback need more conversational nuance than a fixed pipeline</a:t>
             </a:r>
           </a:p>
           <a:p>
             <a:pPr lvl="0"/>
             <a:r>
-              <a:rPr b="1"/>
+              <a:rPr b="1" sz="2200"/>
               <a:t>Deferred within Stage 5</a:t>
             </a:r>
             <a:r>
-              <a:rPr/>
+              <a:rPr sz="2200"/>
               <a:t>: mediation and moderation analysis – real methods (Query Theory, floodlight analysis), cut for v1 scope, not because they don’t matter</a:t>
             </a:r>
           </a:p>
           <a:p>
             <a:pPr lvl="0"/>
             <a:r>
-              <a:rPr/>
+              <a:rPr sz="2200"/>
               <a:t>Lesson: scope a v1 tightly around what you can validate end-to-end</a:t>
             </a:r>
           </a:p>
@@ -3555,7 +3531,7 @@
                   <a:srgbClr val="595959"/>
                 </a:solidFill>
               </a:rPr>
-              <a:t>Copyright © 2026 Behavioral Research Workshop</a:t>
+              <a:t>Copyright © 2026 Stephen Shu</a:t>
             </a:r>
           </a:p>
         </p:txBody>
@@ -3740,7 +3716,7 @@
                   <a:srgbClr val="595959"/>
                 </a:solidFill>
               </a:rPr>
-              <a:t>Copyright © 2026 Behavioral Research Workshop</a:t>
+              <a:t>Copyright © 2026 Stephen Shu</a:t>
             </a:r>
           </a:p>
         </p:txBody>
@@ -3845,18 +3821,46 @@
               <a:buNone/>
             </a:pPr>
             <a:r>
-              <a:rPr/>
+              <a:rPr sz="1800"/>
               <a:t>This project’s real </a:t>
             </a:r>
             <a:r>
-              <a:rPr>
+              <a:rPr sz="1800">
                 <a:latin typeface="Courier"/>
               </a:rPr>
               <a:t>behavioral-design/SKILL.md</a:t>
             </a:r>
             <a:r>
-              <a:rPr/>
-              <a:t> (trimmed):</a:t>
+              <a:rPr sz="1800"/>
+              <a:t> (trimmed) – </a:t>
+            </a:r>
+            <a:r>
+              <a:rPr sz="1800">
+                <a:latin typeface="Courier"/>
+              </a:rPr>
+              <a:t>name</a:t>
+            </a:r>
+            <a:r>
+              <a:rPr sz="1800"/>
+              <a:t> + </a:t>
+            </a:r>
+            <a:r>
+              <a:rPr sz="1800">
+                <a:latin typeface="Courier"/>
+              </a:rPr>
+              <a:t>description</a:t>
+            </a:r>
+            <a:r>
+              <a:rPr sz="1800"/>
+              <a:t> tell Claude Code </a:t>
+            </a:r>
+            <a:r>
+              <a:rPr i="1" sz="1800"/>
+              <a:t>when</a:t>
+            </a:r>
+            <a:r>
+              <a:rPr sz="1800"/>
+              <a:t> to use it, the body is plain-English instructions:</a:t>
             </a:r>
           </a:p>
           <a:p>
@@ -3864,59 +3868,15 @@
               <a:buNone/>
             </a:pPr>
             <a:r>
-              <a:rPr>
+              <a:rPr sz="1800">
                 <a:latin typeface="Courier"/>
               </a:rPr>
               <a:t>---
 name: behavioral-design
-description: Stage 3 of the behavioral research workflow. Use when
-  the user wants to set up a control-vs-treatment behavioral test...
+description: Stage 3 -- set up a control-vs-treatment behavioral test
 ---
-## Required inputs
-1. Control condition stimulus
-2. Treatment condition stimulus
-3. Population to sample
-4. Outcome variable
-Do not ask about idea generation, alternative conditions, or design
-strategy -- there is exactly one control and one treatment condition.</a:t>
-            </a:r>
-          </a:p>
-          <a:p>
-            <a:pPr lvl="0"/>
-            <a:r>
-              <a:rPr>
-                <a:latin typeface="Courier"/>
-              </a:rPr>
-              <a:t>name</a:t>
-            </a:r>
-            <a:r>
-              <a:rPr/>
-              <a:t> + </a:t>
-            </a:r>
-            <a:r>
-              <a:rPr>
-                <a:latin typeface="Courier"/>
-              </a:rPr>
-              <a:t>description</a:t>
-            </a:r>
-            <a:r>
-              <a:rPr/>
-              <a:t> tell Claude Code </a:t>
-            </a:r>
-            <a:r>
-              <a:rPr i="1"/>
-              <a:t>when</a:t>
-            </a:r>
-            <a:r>
-              <a:rPr/>
-              <a:t> to use this skill</a:t>
-            </a:r>
-          </a:p>
-          <a:p>
-            <a:pPr lvl="0"/>
-            <a:r>
-              <a:rPr/>
-              <a:t>The body is plain-English instructions – not code</a:t>
+Required inputs: control stimulus, treatment stimulus,
+population to sample, outcome variable</a:t>
             </a:r>
           </a:p>
         </p:txBody>
@@ -3950,7 +3910,7 @@
                   <a:srgbClr val="595959"/>
                 </a:solidFill>
               </a:rPr>
-              <a:t>Copyright © 2026 Behavioral Research Workshop</a:t>
+              <a:t>Copyright © 2026 Stephen Shu</a:t>
             </a:r>
           </a:p>
         </p:txBody>
@@ -4092,7 +4052,7 @@
               <a:buNone/>
             </a:pPr>
             <a:r>
-              <a:rPr/>
+              <a:rPr sz="1600"/>
               <a:t>You describe your stimuli, population, and outcome in plain language – Claude Code turns it into a structured design package. No file formats to learn.</a:t>
             </a:r>
           </a:p>
@@ -4127,7 +4087,7 @@
                   <a:srgbClr val="595959"/>
                 </a:solidFill>
               </a:rPr>
-              <a:t>Copyright © 2026 Behavioral Research Workshop</a:t>
+              <a:t>Copyright © 2026 Stephen Shu</a:t>
             </a:r>
           </a:p>
         </p:txBody>
@@ -4334,7 +4294,7 @@
                   <a:srgbClr val="595959"/>
                 </a:solidFill>
               </a:rPr>
-              <a:t>Copyright © 2026 Behavioral Research Workshop</a:t>
+              <a:t>Copyright © 2026 Stephen Shu</a:t>
             </a:r>
           </a:p>
         </p:txBody>
@@ -4476,7 +4436,7 @@
               <a:buNone/>
             </a:pPr>
             <a:r>
-              <a:rPr/>
+              <a:rPr sz="1600"/>
               <a:t>You state a sample size and let Claude Code handle sampling and simulation – behind this one message: population sampling, condition assignment, and dozens of simulated subject batches.</a:t>
             </a:r>
           </a:p>
@@ -4511,7 +4471,7 @@
                   <a:srgbClr val="595959"/>
                 </a:solidFill>
               </a:rPr>
-              <a:t>Copyright © 2026 Behavioral Research Workshop</a:t>
+              <a:t>Copyright © 2026 Stephen Shu</a:t>
             </a:r>
           </a:p>
         </p:txBody>
@@ -4618,36 +4578,44 @@
           <a:p>
             <a:pPr lvl="0"/>
             <a:r>
-              <a:rPr/>
-              <a:t>Demographics + individual differences sampled from researcher-specified means/SDs (age, income, financial literacy, numeracy…)</a:t>
+              <a:rPr sz="2200"/>
+              <a:t>Demographics + individual differences sampled from researcher-specified means/SDs</a:t>
             </a:r>
           </a:p>
           <a:p>
             <a:pPr lvl="0"/>
             <a:r>
-              <a:rPr/>
-              <a:t>Correlated variables drawn via a </a:t>
-            </a:r>
-            <a:r>
-              <a:rPr b="1"/>
-              <a:t>Gaussian copula</a:t>
-            </a:r>
-            <a:r>
-              <a:rPr/>
-              <a:t> so specified correlations (e.g. income &lt;-&gt; financial literacy) are respected</a:t>
+              <a:rPr sz="2200"/>
+              <a:t>Correlations </a:t>
+            </a:r>
+            <a:r>
+              <a:rPr i="1" sz="2200"/>
+              <a:t>supported</a:t>
+            </a:r>
+            <a:r>
+              <a:rPr sz="2200"/>
+              <a:t> via a Gaussian copula – </a:t>
+            </a:r>
+            <a:r>
+              <a:rPr b="1" sz="2200"/>
+              <a:t>not used here</a:t>
+            </a:r>
+            <a:r>
+              <a:rPr sz="2200"/>
+              <a:t>: only marginal distributions were given, not correlation guidance</a:t>
             </a:r>
           </a:p>
           <a:p>
             <a:pPr lvl="0"/>
             <a:r>
-              <a:rPr/>
-              <a:t>Ordinal/count variables (income bracket, literacy score) rounded to valid values</a:t>
+              <a:rPr sz="2200"/>
+              <a:t>Ordinal/count variables (income bracket, literacy) rounded to valid values</a:t>
             </a:r>
           </a:p>
           <a:p>
             <a:pPr lvl="0"/>
             <a:r>
-              <a:rPr/>
+              <a:rPr sz="2200"/>
               <a:t>Random, independent assignment to condition – same mechanics as a real RCT</a:t>
             </a:r>
           </a:p>
@@ -4682,7 +4650,7 @@
                   <a:srgbClr val="595959"/>
                 </a:solidFill>
               </a:rPr>
-              <a:t>Copyright © 2026 Behavioral Research Workshop</a:t>
+              <a:t>Copyright © 2026 Stephen Shu</a:t>
             </a:r>
           </a:p>
         </p:txBody>
@@ -4789,55 +4757,55 @@
           <a:p>
             <a:pPr lvl="0"/>
             <a:r>
-              <a:rPr/>
+              <a:rPr sz="2200"/>
               <a:t>Each </a:t>
             </a:r>
             <a:r>
-              <a:rPr b="1"/>
+              <a:rPr b="1" sz="2200"/>
               <a:t>subagent</a:t>
             </a:r>
             <a:r>
-              <a:rPr/>
+              <a:rPr sz="2200"/>
               <a:t> simulates a batch of ~10 subjects in one call – batching matters:</a:t>
             </a:r>
           </a:p>
           <a:p>
             <a:pPr lvl="1"/>
             <a:r>
-              <a:rPr/>
+              <a:rPr sz="2200"/>
               <a:t>Batch size 2: ~9,875 tokens/subject</a:t>
             </a:r>
           </a:p>
           <a:p>
             <a:pPr lvl="1"/>
             <a:r>
-              <a:rPr/>
+              <a:rPr sz="2200"/>
               <a:t>Batch size 10: ~2,588 tokens/subject (</a:t>
             </a:r>
             <a:r>
-              <a:rPr b="1"/>
+              <a:rPr b="1" sz="2200"/>
               <a:t>~4x more efficient</a:t>
             </a:r>
             <a:r>
-              <a:rPr/>
+              <a:rPr sz="2200"/>
               <a:t>)</a:t>
             </a:r>
           </a:p>
           <a:p>
             <a:pPr lvl="0"/>
             <a:r>
-              <a:rPr/>
+              <a:rPr sz="2200"/>
               <a:t>Subjects respond in-persona based on their sampled profile, not as “an AI”</a:t>
             </a:r>
           </a:p>
           <a:p>
             <a:pPr lvl="0"/>
             <a:r>
-              <a:rPr b="1"/>
+              <a:rPr b="1" sz="2200"/>
               <a:t>Blinding feature</a:t>
             </a:r>
             <a:r>
-              <a:rPr/>
+              <a:rPr sz="2200"/>
               <a:t>: conditions can be tracked under neutral labels (Condition A/B) until the researcher chooses to reveal which is treatment – avoids analyst bias</a:t>
             </a:r>
           </a:p>
@@ -4872,7 +4840,7 @@
                   <a:srgbClr val="595959"/>
                 </a:solidFill>
               </a:rPr>
-              <a:t>Copyright © 2026 Behavioral Research Workshop</a:t>
+              <a:t>Copyright © 2026 Stephen Shu</a:t>
             </a:r>
           </a:p>
         </p:txBody>
@@ -5345,7 +5313,7 @@
                   <a:srgbClr val="595959"/>
                 </a:solidFill>
               </a:rPr>
-              <a:t>Copyright © 2026 Behavioral Research Workshop</a:t>
+              <a:t>Copyright © 2026 Stephen Shu</a:t>
             </a:r>
           </a:p>
         </p:txBody>
@@ -5512,7 +5480,7 @@
                   <a:srgbClr val="595959"/>
                 </a:solidFill>
               </a:rPr>
-              <a:t>Copyright © 2026 Behavioral Research Workshop</a:t>
+              <a:t>Copyright © 2026 Stephen Shu</a:t>
             </a:r>
           </a:p>
         </p:txBody>
@@ -5654,7 +5622,7 @@
               <a:buNone/>
             </a:pPr>
             <a:r>
-              <a:rPr/>
+              <a:rPr sz="1600"/>
               <a:t>One message gets you a balance check, a regression, and a chart – plain-English results first, statistical detail if you want it.</a:t>
             </a:r>
           </a:p>
@@ -5689,7 +5657,7 @@
                   <a:srgbClr val="595959"/>
                 </a:solidFill>
               </a:rPr>
-              <a:t>Copyright © 2026 Behavioral Research Workshop</a:t>
+              <a:t>Copyright © 2026 Stephen Shu</a:t>
             </a:r>
           </a:p>
         </p:txBody>
@@ -5796,40 +5764,40 @@
           <a:p>
             <a:pPr lvl="0"/>
             <a:r>
-              <a:rPr b="1"/>
+              <a:rPr b="1" sz="2200"/>
               <a:t>Balance check</a:t>
             </a:r>
             <a:r>
-              <a:rPr/>
+              <a:rPr sz="2200"/>
               <a:t> – are demographics/individual differences actually balanced across conditions? (chi-sq, F-test, Bartlett’s)</a:t>
             </a:r>
           </a:p>
           <a:p>
             <a:pPr lvl="0"/>
             <a:r>
-              <a:rPr b="1"/>
+              <a:rPr b="1" sz="2200"/>
               <a:t>Regression</a:t>
             </a:r>
             <a:r>
-              <a:rPr/>
+              <a:rPr sz="2200"/>
               <a:t> – OLS or logit, with/without controls, on the primary and secondary outcomes</a:t>
             </a:r>
           </a:p>
           <a:p>
             <a:pPr lvl="0"/>
             <a:r>
-              <a:rPr b="1"/>
+              <a:rPr b="1" sz="2200"/>
               <a:t>Charts</a:t>
             </a:r>
             <a:r>
-              <a:rPr/>
+              <a:rPr sz="2200"/>
               <a:t> – outcome-by-condition bar charts with standard errors</a:t>
             </a:r>
           </a:p>
           <a:p>
             <a:pPr lvl="0"/>
             <a:r>
-              <a:rPr/>
+              <a:rPr sz="2200"/>
               <a:t>A real bug caught here: pandas 3.0’s new string dtype silently broke a dtype check – always verify assumptions on real output, don’t trust silently</a:t>
             </a:r>
           </a:p>
@@ -5864,7 +5832,7 @@
                   <a:srgbClr val="595959"/>
                 </a:solidFill>
               </a:rPr>
-              <a:t>Copyright © 2026 Behavioral Research Workshop</a:t>
+              <a:t>Copyright © 2026 Stephen Shu</a:t>
             </a:r>
           </a:p>
         </p:txBody>
@@ -6006,7 +5974,7 @@
               <a:buNone/>
             </a:pPr>
             <a:r>
-              <a:rPr/>
+              <a:rPr sz="1600"/>
               <a:t>One message produces a Word-ready document you can open, edit, and share – optionally compared against a published study’s statistics.</a:t>
             </a:r>
           </a:p>
@@ -6041,7 +6009,7 @@
                   <a:srgbClr val="595959"/>
                 </a:solidFill>
               </a:rPr>
-              <a:t>Copyright © 2026 Behavioral Research Workshop</a:t>
+              <a:t>Copyright © 2026 Stephen Shu</a:t>
             </a:r>
           </a:p>
         </p:txBody>
@@ -6220,7 +6188,7 @@
                   <a:srgbClr val="595959"/>
                 </a:solidFill>
               </a:rPr>
-              <a:t>Copyright © 2026 Behavioral Research Workshop</a:t>
+              <a:t>Copyright © 2026 Stephen Shu</a:t>
             </a:r>
           </a:p>
         </p:txBody>
@@ -6407,7 +6375,7 @@
                   <a:srgbClr val="595959"/>
                 </a:solidFill>
               </a:rPr>
-              <a:t>Copyright © 2026 Behavioral Research Workshop</a:t>
+              <a:t>Copyright © 2026 Stephen Shu</a:t>
             </a:r>
           </a:p>
         </p:txBody>
@@ -6559,7 +6527,7 @@
                   <a:srgbClr val="595959"/>
                 </a:solidFill>
               </a:rPr>
-              <a:t>Copyright © 2026 Behavioral Research Workshop</a:t>
+              <a:t>Copyright © 2026 Stephen Shu</a:t>
             </a:r>
           </a:p>
         </p:txBody>
@@ -6711,7 +6679,7 @@
                   <a:srgbClr val="595959"/>
                 </a:solidFill>
               </a:rPr>
-              <a:t>Copyright © 2026 Behavioral Research Workshop</a:t>
+              <a:t>Copyright © 2026 Stephen Shu</a:t>
             </a:r>
           </a:p>
         </p:txBody>
@@ -6902,7 +6870,7 @@
                   <a:srgbClr val="595959"/>
                 </a:solidFill>
               </a:rPr>
-              <a:t>Copyright © 2026 Behavioral Research Workshop</a:t>
+              <a:t>Copyright © 2026 Stephen Shu</a:t>
             </a:r>
           </a:p>
         </p:txBody>
@@ -7292,7 +7260,7 @@
                   <a:srgbClr val="595959"/>
                 </a:solidFill>
               </a:rPr>
-              <a:t>Copyright © 2026 Behavioral Research Workshop</a:t>
+              <a:t>Copyright © 2026 Stephen Shu</a:t>
             </a:r>
           </a:p>
         </p:txBody>
@@ -7453,52 +7421,52 @@
           <a:p>
             <a:pPr lvl="0"/>
             <a:r>
-              <a:rPr/>
+              <a:rPr sz="2000"/>
               <a:t>Synthetic LLM-simulated subjects can reproduce a real behavioral effect’s </a:t>
             </a:r>
             <a:r>
-              <a:rPr b="1"/>
+              <a:rPr b="1" sz="2000"/>
               <a:t>direction and significance</a:t>
             </a:r>
             <a:r>
-              <a:rPr/>
+              <a:rPr sz="2000"/>
               <a:t> for a choice outcome</a:t>
             </a:r>
           </a:p>
           <a:p>
             <a:pPr lvl="0"/>
             <a:r>
-              <a:rPr/>
+              <a:rPr sz="2000"/>
               <a:t>They may </a:t>
             </a:r>
             <a:r>
-              <a:rPr b="1"/>
+              <a:rPr b="1" sz="2000"/>
               <a:t>understate effect sizes</a:t>
             </a:r>
             <a:r>
-              <a:rPr/>
+              <a:rPr sz="2000"/>
               <a:t> even when direction replicates (affordability)</a:t>
             </a:r>
           </a:p>
           <a:p>
             <a:pPr lvl="0"/>
             <a:r>
-              <a:rPr/>
+              <a:rPr sz="2000"/>
               <a:t>They can </a:t>
             </a:r>
             <a:r>
-              <a:rPr b="1"/>
+              <a:rPr b="1" sz="2000"/>
               <a:t>miss a mechanism entirely</a:t>
             </a:r>
             <a:r>
-              <a:rPr/>
+              <a:rPr sz="2000"/>
               <a:t> (understandability) – a reminder that synthetic samples are a tool for iteration, not a substitute for real data</a:t>
             </a:r>
           </a:p>
           <a:p>
             <a:pPr lvl="0"/>
             <a:r>
-              <a:rPr/>
+              <a:rPr sz="2000"/>
               <a:t>Practical toolkit: skills + subagents + Python + pandoc, all orchestrated conversationally</a:t>
             </a:r>
           </a:p>
@@ -7533,7 +7501,7 @@
                   <a:srgbClr val="595959"/>
                 </a:solidFill>
               </a:rPr>
-              <a:t>Copyright © 2026 Behavioral Research Workshop</a:t>
+              <a:t>Copyright © 2026 Stephen Shu</a:t>
             </a:r>
           </a:p>
         </p:txBody>
@@ -7731,7 +7699,7 @@
                   <a:srgbClr val="595959"/>
                 </a:solidFill>
               </a:rPr>
-              <a:t>Copyright © 2026 Behavioral Research Workshop</a:t>
+              <a:t>Copyright © 2026 Stephen Shu</a:t>
             </a:r>
           </a:p>
         </p:txBody>
@@ -7812,7 +7780,7 @@
             </a:pPr>
             <a:r>
               <a:rPr/>
-              <a:t>Questions?</a:t>
+              <a:t>AI Disclosure</a:t>
             </a:r>
           </a:p>
         </p:txBody>
@@ -7835,24 +7803,28 @@
             <a:pPr lvl="0"/>
             <a:r>
               <a:rPr/>
-              <a:t>Repository: this workshop’s </a:t>
-            </a:r>
-            <a:r>
-              <a:rPr>
-                <a:latin typeface="Courier"/>
-              </a:rPr>
-              <a:t>behavioral-research-env</a:t>
-            </a:r>
+              <a:t>This presentation and its companion workbook were themselves generated with Claude Code, using the exact workflow, skills, and prompt patterns described in this talk</a:t>
+            </a:r>
+          </a:p>
+          <a:p>
+            <a:pPr lvl="0"/>
             <a:r>
               <a:rPr/>
-              <a:t> project</a:t>
+              <a:t>Purpose: illustrative – demonstrating the tool by using it on itself</a:t>
             </a:r>
           </a:p>
           <a:p>
             <a:pPr lvl="0"/>
             <a:r>
               <a:rPr/>
-              <a:t>Workbook handout has copy-paste prompt templates for every stage</a:t>
+              <a:t>All statistics, tables, and figures shown are real outputs from this workshop’s actual project runs, not fabricated for effect</a:t>
+            </a:r>
+          </a:p>
+          <a:p>
+            <a:pPr lvl="0"/>
+            <a:r>
+              <a:rPr/>
+              <a:t>As with any AI-assisted work: review and verify before reusing</a:t>
             </a:r>
           </a:p>
         </p:txBody>
@@ -7886,7 +7858,7 @@
                   <a:srgbClr val="595959"/>
                 </a:solidFill>
               </a:rPr>
-              <a:t>Copyright © 2026 Behavioral Research Workshop</a:t>
+              <a:t>Copyright © 2026 Stephen Shu</a:t>
             </a:r>
           </a:p>
         </p:txBody>
@@ -7921,6 +7893,161 @@
                 </a:solidFill>
               </a:rPr>
               <a:t>30</a:t>
+            </a:r>
+          </a:p>
+        </p:txBody>
+      </p:sp>
+    </p:spTree>
+  </p:cSld>
+</p:sld>
+</file>
+
+<file path=ppt/slides/slide31.xml><?xml version="1.0" encoding="utf-8"?>
+<p:sld xmlns:a="http://schemas.openxmlformats.org/drawingml/2006/main" xmlns:r="http://schemas.openxmlformats.org/officeDocument/2006/relationships" xmlns:p="http://schemas.openxmlformats.org/presentationml/2006/main">
+  <p:cSld>
+    <p:spTree>
+      <p:nvGrpSpPr>
+        <p:cNvPr id="1" name=""/>
+        <p:cNvGrpSpPr/>
+        <p:nvPr/>
+      </p:nvGrpSpPr>
+      <p:grpSpPr>
+        <a:xfrm>
+          <a:off x="0" y="0"/>
+          <a:ext cx="0" cy="0"/>
+          <a:chOff x="0" y="0"/>
+          <a:chExt cx="0" cy="0"/>
+        </a:xfrm>
+      </p:grpSpPr>
+      <p:sp>
+        <p:nvSpPr>
+          <p:cNvPr id="2" name="Title 1"/>
+          <p:cNvSpPr>
+            <a:spLocks noGrp="1"/>
+          </p:cNvSpPr>
+          <p:nvPr>
+            <p:ph type="title"/>
+          </p:nvPr>
+        </p:nvSpPr>
+        <p:spPr/>
+        <p:txBody>
+          <a:bodyPr/>
+          <a:lstStyle/>
+          <a:p>
+            <a:pPr lvl="0" indent="0" marL="0">
+              <a:buNone/>
+            </a:pPr>
+            <a:r>
+              <a:rPr/>
+              <a:t>Questions?</a:t>
+            </a:r>
+          </a:p>
+        </p:txBody>
+      </p:sp>
+      <p:sp>
+        <p:nvSpPr>
+          <p:cNvPr id="3" name="Content Placeholder 2"/>
+          <p:cNvSpPr>
+            <a:spLocks noGrp="1"/>
+          </p:cNvSpPr>
+          <p:nvPr>
+            <p:ph idx="1"/>
+          </p:nvPr>
+        </p:nvSpPr>
+        <p:spPr/>
+        <p:txBody>
+          <a:bodyPr/>
+          <a:lstStyle/>
+          <a:p>
+            <a:pPr lvl="0"/>
+            <a:r>
+              <a:rPr/>
+              <a:t>Repository: this workshop’s </a:t>
+            </a:r>
+            <a:r>
+              <a:rPr>
+                <a:latin typeface="Courier"/>
+              </a:rPr>
+              <a:t>behavioral-research-env</a:t>
+            </a:r>
+            <a:r>
+              <a:rPr/>
+              <a:t> project</a:t>
+            </a:r>
+          </a:p>
+          <a:p>
+            <a:pPr lvl="0"/>
+            <a:r>
+              <a:rPr/>
+              <a:t>Workbook handout has copy-paste prompt templates for every stage</a:t>
+            </a:r>
+          </a:p>
+        </p:txBody>
+      </p:sp>
+      <p:sp>
+        <p:nvSpPr>
+          <p:cNvPr id="4" name="TextBox 3"/>
+          <p:cNvSpPr txBox="1"/>
+          <p:nvPr/>
+        </p:nvSpPr>
+        <p:spPr>
+          <a:xfrm>
+            <a:off x="274320" y="4777740"/>
+            <a:ext cx="5486400" cy="274320"/>
+          </a:xfrm>
+          <a:prstGeom prst="rect">
+            <a:avLst/>
+          </a:prstGeom>
+          <a:noFill/>
+        </p:spPr>
+        <p:txBody>
+          <a:bodyPr wrap="none" tIns="0" bIns="0">
+            <a:spAutoFit/>
+          </a:bodyPr>
+          <a:lstStyle/>
+          <a:p>
+            <a:pPr algn="l"/>
+            <a:r>
+              <a:rPr sz="900">
+                <a:solidFill>
+                  <a:srgbClr val="595959"/>
+                </a:solidFill>
+              </a:rPr>
+              <a:t>Copyright © 2026 Stephen Shu</a:t>
+            </a:r>
+          </a:p>
+        </p:txBody>
+      </p:sp>
+      <p:sp>
+        <p:nvSpPr>
+          <p:cNvPr id="5" name="TextBox 4"/>
+          <p:cNvSpPr txBox="1"/>
+          <p:nvPr/>
+        </p:nvSpPr>
+        <p:spPr>
+          <a:xfrm>
+            <a:off x="8321040" y="4732020"/>
+            <a:ext cx="548640" cy="320040"/>
+          </a:xfrm>
+          <a:prstGeom prst="rect">
+            <a:avLst/>
+          </a:prstGeom>
+          <a:noFill/>
+        </p:spPr>
+        <p:txBody>
+          <a:bodyPr wrap="none" tIns="0" bIns="0">
+            <a:spAutoFit/>
+          </a:bodyPr>
+          <a:lstStyle/>
+          <a:p>
+            <a:pPr algn="r"/>
+            <a:r>
+              <a:rPr sz="1200" b="1">
+                <a:solidFill>
+                  <a:srgbClr val="1F4E79"/>
+                </a:solidFill>
+              </a:rPr>
+              <a:t>31</a:t>
             </a:r>
           </a:p>
         </p:txBody>
@@ -7989,66 +8116,66 @@
           <a:p>
             <a:pPr lvl="0"/>
             <a:r>
-              <a:rPr b="1"/>
+              <a:rPr b="1" sz="2200"/>
               <a:t>VS Code</a:t>
             </a:r>
             <a:r>
-              <a:rPr/>
+              <a:rPr sz="2200"/>
               <a:t>: a code editor – where you view/edit files, open a terminal, browse the project</a:t>
             </a:r>
           </a:p>
           <a:p>
             <a:pPr lvl="0"/>
             <a:r>
-              <a:rPr b="1"/>
+              <a:rPr b="1" sz="2200"/>
               <a:t>Claude Code</a:t>
             </a:r>
             <a:r>
-              <a:rPr/>
+              <a:rPr sz="2200"/>
               <a:t>: an AI agent that runs inside (or alongside) VS Code</a:t>
             </a:r>
           </a:p>
           <a:p>
             <a:pPr lvl="1"/>
             <a:r>
-              <a:rPr/>
+              <a:rPr sz="2200"/>
               <a:t>Reads and writes files, runs terminal commands, executes Python scripts</a:t>
             </a:r>
           </a:p>
           <a:p>
             <a:pPr lvl="1"/>
             <a:r>
-              <a:rPr/>
+              <a:rPr sz="2200"/>
               <a:t>Follows </a:t>
             </a:r>
             <a:r>
-              <a:rPr b="1"/>
+              <a:rPr b="1" sz="2200"/>
               <a:t>Skills</a:t>
             </a:r>
             <a:r>
-              <a:rPr/>
+              <a:rPr sz="2200"/>
               <a:t> – written instructions for a specific recurring task</a:t>
             </a:r>
           </a:p>
           <a:p>
             <a:pPr lvl="1"/>
             <a:r>
-              <a:rPr/>
+              <a:rPr sz="2200"/>
               <a:t>Can spawn </a:t>
             </a:r>
             <a:r>
-              <a:rPr b="1"/>
+              <a:rPr b="1" sz="2200"/>
               <a:t>subagents</a:t>
             </a:r>
             <a:r>
-              <a:rPr/>
+              <a:rPr sz="2200"/>
               <a:t>: independent Claude conversations for parallel work (this is how we simulate many subjects at once)</a:t>
             </a:r>
           </a:p>
           <a:p>
             <a:pPr lvl="0"/>
             <a:r>
-              <a:rPr/>
+              <a:rPr sz="2200"/>
               <a:t>You talk to Claude Code in plain English; it takes the actions</a:t>
             </a:r>
           </a:p>
@@ -8083,7 +8210,7 @@
                   <a:srgbClr val="595959"/>
                 </a:solidFill>
               </a:rPr>
-              <a:t>Copyright © 2026 Behavioral Research Workshop</a:t>
+              <a:t>Copyright © 2026 Stephen Shu</a:t>
             </a:r>
           </a:p>
         </p:txBody>
@@ -8225,7 +8352,7 @@
               <a:buNone/>
             </a:pPr>
             <a:r>
-              <a:rPr/>
+              <a:rPr sz="1600"/>
               <a:t>No shell commands to memorize – you describe the goal in the chat panel and Claude Code does the work.</a:t>
             </a:r>
           </a:p>
@@ -8260,7 +8387,7 @@
                   <a:srgbClr val="595959"/>
                 </a:solidFill>
               </a:rPr>
-              <a:t>Copyright © 2026 Behavioral Research Workshop</a:t>
+              <a:t>Copyright © 2026 Stephen Shu</a:t>
             </a:r>
           </a:p>
         </p:txBody>
@@ -8420,7 +8547,7 @@
                   <a:srgbClr val="595959"/>
                 </a:solidFill>
               </a:rPr>
-              <a:t>Copyright © 2026 Behavioral Research Workshop</a:t>
+              <a:t>Copyright © 2026 Stephen Shu</a:t>
             </a:r>
           </a:p>
         </p:txBody>
@@ -8527,59 +8654,59 @@
           <a:p>
             <a:pPr lvl="0"/>
             <a:r>
-              <a:rPr b="1"/>
+              <a:rPr b="1" sz="2200"/>
               <a:t>Python</a:t>
             </a:r>
             <a:r>
-              <a:rPr/>
+              <a:rPr sz="2200"/>
               <a:t> – sampling, statistics, chart generation (pandas, numpy, scipy, statsmodels, matplotlib)</a:t>
             </a:r>
           </a:p>
           <a:p>
             <a:pPr lvl="0"/>
             <a:r>
-              <a:rPr b="1"/>
+              <a:rPr b="1" sz="2200"/>
               <a:t>git + GitHub</a:t>
             </a:r>
             <a:r>
-              <a:rPr/>
+              <a:rPr sz="2200"/>
               <a:t> – version control, collaboration, backup</a:t>
             </a:r>
           </a:p>
           <a:p>
             <a:pPr lvl="0"/>
             <a:r>
-              <a:rPr b="1"/>
+              <a:rPr b="1" sz="2200"/>
               <a:t>VS Code + Claude Code</a:t>
             </a:r>
             <a:r>
-              <a:rPr/>
+              <a:rPr sz="2200"/>
               <a:t> – the environment this all runs in</a:t>
             </a:r>
           </a:p>
           <a:p>
             <a:pPr lvl="0"/>
             <a:r>
-              <a:rPr b="1"/>
+              <a:rPr b="1" sz="2200"/>
               <a:t>pandoc</a:t>
             </a:r>
             <a:r>
-              <a:rPr/>
+              <a:rPr sz="2200"/>
               <a:t> – converts markdown into docx / pptx / pdf (used for writeups, this deck, and the workbook)</a:t>
             </a:r>
           </a:p>
           <a:p>
             <a:pPr lvl="0"/>
             <a:r>
-              <a:rPr/>
+              <a:rPr sz="2200"/>
               <a:t>All of it installed and configured </a:t>
             </a:r>
             <a:r>
-              <a:rPr i="1"/>
+              <a:rPr i="1" sz="2200"/>
               <a:t>by</a:t>
             </a:r>
             <a:r>
-              <a:rPr/>
+              <a:rPr sz="2200"/>
               <a:t> Claude Code, conversationally – you don’t have to type any of what follows yourself</a:t>
             </a:r>
           </a:p>
@@ -8614,7 +8741,7 @@
                   <a:srgbClr val="595959"/>
                 </a:solidFill>
               </a:rPr>
-              <a:t>Copyright © 2026 Behavioral Research Workshop</a:t>
+              <a:t>Copyright © 2026 Stephen Shu</a:t>
             </a:r>
           </a:p>
         </p:txBody>
@@ -8721,17 +8848,17 @@
           <a:p>
             <a:pPr lvl="0"/>
             <a:r>
-              <a:rPr>
+              <a:rPr sz="1800">
                 <a:latin typeface="Courier"/>
               </a:rPr>
               <a:t>python -m venv .venv</a:t>
             </a:r>
             <a:r>
-              <a:rPr/>
+              <a:rPr sz="1800"/>
               <a:t> then </a:t>
             </a:r>
             <a:r>
-              <a:rPr>
+              <a:rPr sz="1800">
                 <a:latin typeface="Courier"/>
               </a:rPr>
               <a:t>pip install -r scripts/requirements.txt</a:t>
@@ -8740,17 +8867,17 @@
           <a:p>
             <a:pPr lvl="0"/>
             <a:r>
-              <a:rPr>
+              <a:rPr sz="1800">
                 <a:latin typeface="Courier"/>
               </a:rPr>
               <a:t>git init</a:t>
             </a:r>
             <a:r>
-              <a:rPr/>
+              <a:rPr sz="1800"/>
               <a:t>, then </a:t>
             </a:r>
             <a:r>
-              <a:rPr>
+              <a:rPr sz="1800">
                 <a:latin typeface="Courier"/>
               </a:rPr>
               <a:t>gh repo create --private --source=. --push</a:t>
@@ -8759,54 +8886,54 @@
           <a:p>
             <a:pPr lvl="0"/>
             <a:r>
-              <a:rPr/>
+              <a:rPr sz="1800"/>
               <a:t>Real snags hit along the way (useful to know, not just theory):</a:t>
             </a:r>
           </a:p>
           <a:p>
             <a:pPr lvl="1"/>
             <a:r>
-              <a:rPr>
+              <a:rPr sz="1800">
                 <a:latin typeface="Courier"/>
               </a:rPr>
               <a:t>winget install</a:t>
             </a:r>
             <a:r>
-              <a:rPr/>
+              <a:rPr sz="1800"/>
               <a:t> needed </a:t>
             </a:r>
             <a:r>
-              <a:rPr>
+              <a:rPr sz="1800">
                 <a:latin typeface="Courier"/>
               </a:rPr>
               <a:t>--scope user</a:t>
             </a:r>
             <a:r>
-              <a:rPr/>
+              <a:rPr sz="1800"/>
               <a:t> to dodge an admin-elevation prompt that silently failed in a non-interactive shell</a:t>
             </a:r>
           </a:p>
           <a:p>
             <a:pPr lvl="1"/>
             <a:r>
-              <a:rPr/>
+              <a:rPr sz="1800"/>
               <a:t>PATH changes don’t persist between separate terminal commands – each one needs its own PATH refresh</a:t>
             </a:r>
           </a:p>
           <a:p>
             <a:pPr lvl="1"/>
             <a:r>
-              <a:rPr/>
+              <a:rPr sz="1800"/>
               <a:t>pandoc needs </a:t>
             </a:r>
             <a:r>
-              <a:rPr>
+              <a:rPr sz="1800">
                 <a:latin typeface="Courier"/>
               </a:rPr>
               <a:t>--resource-path</a:t>
             </a:r>
             <a:r>
-              <a:rPr/>
+              <a:rPr sz="1800"/>
               <a:t> to find images referenced by relative path</a:t>
             </a:r>
           </a:p>
@@ -8841,7 +8968,7 @@
                   <a:srgbClr val="595959"/>
                 </a:solidFill>
               </a:rPr>
-              <a:t>Copyright © 2026 Behavioral Research Workshop</a:t>
+              <a:t>Copyright © 2026 Stephen Shu</a:t>
             </a:r>
           </a:p>
         </p:txBody>
@@ -8950,7 +9077,7 @@
               <a:buNone/>
             </a:pPr>
             <a:r>
-              <a:rPr>
+              <a:rPr sz="1600">
                 <a:latin typeface="Courier"/>
               </a:rPr>
               <a:t>behavioral-research-env/
@@ -8997,7 +9124,7 @@
                   <a:srgbClr val="595959"/>
                 </a:solidFill>
               </a:rPr>
-              <a:t>Copyright © 2026 Behavioral Research Workshop</a:t>
+              <a:t>Copyright © 2026 Stephen Shu</a:t>
             </a:r>
           </a:p>
         </p:txBody>

--- a/presentations/2026-workshop/slides.pptx
+++ b/presentations/2026-workshop/slides.pptx
@@ -3181,7 +3181,7 @@
             <a:br/>
             <a:r>
               <a:rPr/>
-              <a:t>Behavioral Research Workshop</a:t>
+              <a:t>Stephen Shu</a:t>
             </a:r>
           </a:p>
         </p:txBody>

--- a/presentations/2026-workshop/slides.pptx
+++ b/presentations/2026-workshop/slides.pptx
@@ -8893,14 +8893,12 @@
           <a:p>
             <a:pPr lvl="1"/>
             <a:r>
-              <a:rPr sz="1800">
-                <a:latin typeface="Courier"/>
-              </a:rPr>
-              <a:t>winget install</a:t>
+              <a:rPr b="1" sz="1800"/>
+              <a:t>winget</a:t>
             </a:r>
             <a:r>
               <a:rPr sz="1800"/>
-              <a:t> needed </a:t>
+              <a:t> (Windows) needed </a:t>
             </a:r>
             <a:r>
               <a:rPr sz="1800">
@@ -8910,7 +8908,15 @@
             </a:r>
             <a:r>
               <a:rPr sz="1800"/>
-              <a:t> to dodge an admin-elevation prompt that silently failed in a non-interactive shell</a:t>
+              <a:t> to dodge a silent admin-elevation failure – </a:t>
+            </a:r>
+            <a:r>
+              <a:rPr b="1" sz="1800"/>
+              <a:t>Homebrew</a:t>
+            </a:r>
+            <a:r>
+              <a:rPr sz="1800"/>
+              <a:t> (Mac) has no such prompt</a:t>
             </a:r>
           </a:p>
           <a:p>

--- a/presentations/2026-workshop/slides.pptx
+++ b/presentations/2026-workshop/slides.pptx
@@ -3647,7 +3647,7 @@
             </a:r>
             <a:r>
               <a:rPr>
-                <a:latin typeface="Courier"/>
+                <a:latin typeface="Courier New"/>
               </a:rPr>
               <a:t>SKILL.md</a:t>
             </a:r>
@@ -3826,7 +3826,7 @@
             </a:r>
             <a:r>
               <a:rPr sz="1800">
-                <a:latin typeface="Courier"/>
+                <a:latin typeface="Courier New"/>
               </a:rPr>
               <a:t>behavioral-design/SKILL.md</a:t>
             </a:r>
@@ -3836,7 +3836,7 @@
             </a:r>
             <a:r>
               <a:rPr sz="1800">
-                <a:latin typeface="Courier"/>
+                <a:latin typeface="Courier New"/>
               </a:rPr>
               <a:t>name</a:t>
             </a:r>
@@ -3846,7 +3846,7 @@
             </a:r>
             <a:r>
               <a:rPr sz="1800">
-                <a:latin typeface="Courier"/>
+                <a:latin typeface="Courier New"/>
               </a:rPr>
               <a:t>description</a:t>
             </a:r>
@@ -3869,7 +3869,7 @@
             </a:pPr>
             <a:r>
               <a:rPr sz="1800">
-                <a:latin typeface="Courier"/>
+                <a:latin typeface="Courier New"/>
               </a:rPr>
               <a:t>---
 name: behavioral-design
@@ -4213,7 +4213,7 @@
             </a:r>
             <a:r>
               <a:rPr>
-                <a:latin typeface="Courier"/>
+                <a:latin typeface="Courier New"/>
               </a:rPr>
               <a:t>research_design.md</a:t>
             </a:r>
@@ -4223,7 +4223,7 @@
             </a:r>
             <a:r>
               <a:rPr>
-                <a:latin typeface="Courier"/>
+                <a:latin typeface="Courier New"/>
               </a:rPr>
               <a:t>stimuli/*.md</a:t>
             </a:r>
@@ -4233,7 +4233,7 @@
             </a:r>
             <a:r>
               <a:rPr>
-                <a:latin typeface="Courier"/>
+                <a:latin typeface="Courier New"/>
               </a:rPr>
               <a:t>population_spec.md</a:t>
             </a:r>
@@ -4243,7 +4243,7 @@
             </a:r>
             <a:r>
               <a:rPr>
-                <a:latin typeface="Courier"/>
+                <a:latin typeface="Courier New"/>
               </a:rPr>
               <a:t>variables_spec.md</a:t>
             </a:r>
@@ -4959,7 +4959,7 @@
             </a:r>
             <a:r>
               <a:rPr>
-                <a:latin typeface="Courier"/>
+                <a:latin typeface="Courier New"/>
               </a:rPr>
               <a:t>subjects_data.csv</a:t>
             </a:r>
@@ -7966,7 +7966,7 @@
             </a:r>
             <a:r>
               <a:rPr>
-                <a:latin typeface="Courier"/>
+                <a:latin typeface="Courier New"/>
               </a:rPr>
               <a:t>behavioral-research-env</a:t>
             </a:r>
@@ -8849,7 +8849,7 @@
             <a:pPr lvl="0"/>
             <a:r>
               <a:rPr sz="1800">
-                <a:latin typeface="Courier"/>
+                <a:latin typeface="Courier New"/>
               </a:rPr>
               <a:t>python -m venv .venv</a:t>
             </a:r>
@@ -8859,7 +8859,7 @@
             </a:r>
             <a:r>
               <a:rPr sz="1800">
-                <a:latin typeface="Courier"/>
+                <a:latin typeface="Courier New"/>
               </a:rPr>
               <a:t>pip install -r scripts/requirements.txt</a:t>
             </a:r>
@@ -8868,7 +8868,7 @@
             <a:pPr lvl="0"/>
             <a:r>
               <a:rPr sz="1800">
-                <a:latin typeface="Courier"/>
+                <a:latin typeface="Courier New"/>
               </a:rPr>
               <a:t>git init</a:t>
             </a:r>
@@ -8878,7 +8878,7 @@
             </a:r>
             <a:r>
               <a:rPr sz="1800">
-                <a:latin typeface="Courier"/>
+                <a:latin typeface="Courier New"/>
               </a:rPr>
               <a:t>gh repo create --private --source=. --push</a:t>
             </a:r>
@@ -8902,7 +8902,7 @@
             </a:r>
             <a:r>
               <a:rPr sz="1800">
-                <a:latin typeface="Courier"/>
+                <a:latin typeface="Courier New"/>
               </a:rPr>
               <a:t>--scope user</a:t>
             </a:r>
@@ -8934,7 +8934,7 @@
             </a:r>
             <a:r>
               <a:rPr sz="1800">
-                <a:latin typeface="Courier"/>
+                <a:latin typeface="Courier New"/>
               </a:rPr>
               <a:t>--resource-path</a:t>
             </a:r>
@@ -9084,7 +9084,7 @@
             </a:pPr>
             <a:r>
               <a:rPr sz="1600">
-                <a:latin typeface="Courier"/>
+                <a:latin typeface="Courier New"/>
               </a:rPr>
               <a:t>behavioral-research-env/
   .claude/skills/          &lt;- one SKILL.md per workflow stage

--- a/presentations/2026-workshop/slides.pptx
+++ b/presentations/2026-workshop/slides.pptx
@@ -9083,7 +9083,7 @@
               <a:buNone/>
             </a:pPr>
             <a:r>
-              <a:rPr sz="1600">
+              <a:rPr sz="1300">
                 <a:latin typeface="Courier New"/>
               </a:rPr>
               <a:t>behavioral-research-env/

--- a/presentations/2026-workshop/slides.pptx
+++ b/presentations/2026-workshop/slides.pptx
@@ -36,6 +36,13 @@
     <p:sldId id="284" r:id="rId30"/>
     <p:sldId id="285" r:id="rId31"/>
     <p:sldId id="286" r:id="rId32"/>
+    <p:sldId id="287" r:id="rId33"/>
+    <p:sldId id="288" r:id="rId34"/>
+    <p:sldId id="289" r:id="rId35"/>
+    <p:sldId id="290" r:id="rId36"/>
+    <p:sldId id="291" r:id="rId37"/>
+    <p:sldId id="292" r:id="rId38"/>
+    <p:sldId id="293" r:id="rId39"/>
   </p:sldIdLst>
   <p:sldSz cx="9144000" cy="5143500" type="screen16x9"/>
   <p:notesSz cx="6858000" cy="9144000"/>
@@ -8048,6 +8055,1107 @@
                 </a:solidFill>
               </a:rPr>
               <a:t>31</a:t>
+            </a:r>
+          </a:p>
+        </p:txBody>
+      </p:sp>
+    </p:spTree>
+  </p:cSld>
+</p:sld>
+</file>
+
+<file path=ppt/slides/slide32.xml><?xml version="1.0" encoding="utf-8"?>
+<p:sld xmlns:a="http://schemas.openxmlformats.org/drawingml/2006/main" xmlns:r="http://schemas.openxmlformats.org/officeDocument/2006/relationships" xmlns:p="http://schemas.openxmlformats.org/presentationml/2006/main">
+  <p:cSld>
+    <p:spTree>
+      <p:nvGrpSpPr>
+        <p:cNvPr id="1" name=""/>
+        <p:cNvGrpSpPr/>
+        <p:nvPr/>
+      </p:nvGrpSpPr>
+      <p:grpSpPr>
+        <a:xfrm>
+          <a:off x="0" y="0"/>
+          <a:ext cx="0" cy="0"/>
+          <a:chOff x="0" y="0"/>
+          <a:chExt cx="0" cy="0"/>
+        </a:xfrm>
+      </p:grpSpPr>
+      <p:sp>
+        <p:nvSpPr>
+          <p:cNvPr id="2" name="Title 1"/>
+          <p:cNvSpPr>
+            <a:spLocks noGrp="1"/>
+          </p:cNvSpPr>
+          <p:nvPr>
+            <p:ph type="title"/>
+          </p:nvPr>
+        </p:nvSpPr>
+        <p:spPr/>
+        <p:txBody>
+          <a:bodyPr/>
+          <a:lstStyle/>
+          <a:p>
+            <a:pPr lvl="0" indent="0" marL="0">
+              <a:buNone/>
+            </a:pPr>
+            <a:r>
+              <a:rPr/>
+              <a:t>Appendix: Bootstrapping Your Own Workflow</a:t>
+            </a:r>
+          </a:p>
+        </p:txBody>
+      </p:sp>
+      <p:sp>
+        <p:nvSpPr>
+          <p:cNvPr id="3" name="Content Placeholder 2"/>
+          <p:cNvSpPr>
+            <a:spLocks noGrp="1"/>
+          </p:cNvSpPr>
+          <p:nvPr>
+            <p:ph idx="1"/>
+          </p:nvPr>
+        </p:nvSpPr>
+        <p:spPr/>
+        <p:txBody>
+          <a:bodyPr/>
+          <a:lstStyle/>
+          <a:p>
+            <a:pPr lvl="0"/>
+            <a:r>
+              <a:rPr/>
+              <a:t>This talk built Stages 3-4-5-7 for one research topic – what if you want this for a </a:t>
+            </a:r>
+            <a:r>
+              <a:rPr i="1"/>
+              <a:t>different</a:t>
+            </a:r>
+            <a:r>
+              <a:rPr/>
+              <a:t> one, starting from zero?</a:t>
+            </a:r>
+          </a:p>
+          <a:p>
+            <a:pPr lvl="0"/>
+            <a:r>
+              <a:rPr/>
+              <a:t>Same tool, same conversation-first approach: plan with Claude Code before building anything</a:t>
+            </a:r>
+          </a:p>
+          <a:p>
+            <a:pPr lvl="0"/>
+            <a:r>
+              <a:rPr/>
+              <a:t>The next few slides walk through that planning-and-scoping process itself</a:t>
+            </a:r>
+          </a:p>
+        </p:txBody>
+      </p:sp>
+      <p:sp>
+        <p:nvSpPr>
+          <p:cNvPr id="4" name="TextBox 3"/>
+          <p:cNvSpPr txBox="1"/>
+          <p:nvPr/>
+        </p:nvSpPr>
+        <p:spPr>
+          <a:xfrm>
+            <a:off x="274320" y="4777740"/>
+            <a:ext cx="5486400" cy="274320"/>
+          </a:xfrm>
+          <a:prstGeom prst="rect">
+            <a:avLst/>
+          </a:prstGeom>
+          <a:noFill/>
+        </p:spPr>
+        <p:txBody>
+          <a:bodyPr wrap="none" tIns="0" bIns="0">
+            <a:spAutoFit/>
+          </a:bodyPr>
+          <a:lstStyle/>
+          <a:p>
+            <a:pPr algn="l"/>
+            <a:r>
+              <a:rPr sz="900">
+                <a:solidFill>
+                  <a:srgbClr val="595959"/>
+                </a:solidFill>
+              </a:rPr>
+              <a:t>Copyright © 2026 Stephen Shu</a:t>
+            </a:r>
+          </a:p>
+        </p:txBody>
+      </p:sp>
+      <p:sp>
+        <p:nvSpPr>
+          <p:cNvPr id="5" name="TextBox 4"/>
+          <p:cNvSpPr txBox="1"/>
+          <p:nvPr/>
+        </p:nvSpPr>
+        <p:spPr>
+          <a:xfrm>
+            <a:off x="8321040" y="4732020"/>
+            <a:ext cx="548640" cy="320040"/>
+          </a:xfrm>
+          <a:prstGeom prst="rect">
+            <a:avLst/>
+          </a:prstGeom>
+          <a:noFill/>
+        </p:spPr>
+        <p:txBody>
+          <a:bodyPr wrap="none" tIns="0" bIns="0">
+            <a:spAutoFit/>
+          </a:bodyPr>
+          <a:lstStyle/>
+          <a:p>
+            <a:pPr algn="r"/>
+            <a:r>
+              <a:rPr sz="1200" b="1">
+                <a:solidFill>
+                  <a:srgbClr val="1F4E79"/>
+                </a:solidFill>
+              </a:rPr>
+              <a:t>32</a:t>
+            </a:r>
+          </a:p>
+        </p:txBody>
+      </p:sp>
+    </p:spTree>
+  </p:cSld>
+</p:sld>
+</file>
+
+<file path=ppt/slides/slide33.xml><?xml version="1.0" encoding="utf-8"?>
+<p:sld xmlns:a="http://schemas.openxmlformats.org/drawingml/2006/main" xmlns:r="http://schemas.openxmlformats.org/officeDocument/2006/relationships" xmlns:p="http://schemas.openxmlformats.org/presentationml/2006/main">
+  <p:cSld>
+    <p:spTree>
+      <p:nvGrpSpPr>
+        <p:cNvPr id="1" name=""/>
+        <p:cNvGrpSpPr/>
+        <p:nvPr/>
+      </p:nvGrpSpPr>
+      <p:grpSpPr>
+        <a:xfrm>
+          <a:off x="0" y="0"/>
+          <a:ext cx="0" cy="0"/>
+          <a:chOff x="0" y="0"/>
+          <a:chExt cx="0" cy="0"/>
+        </a:xfrm>
+      </p:grpSpPr>
+      <p:sp>
+        <p:nvSpPr>
+          <p:cNvPr id="2" name="Title 1"/>
+          <p:cNvSpPr>
+            <a:spLocks noGrp="1"/>
+          </p:cNvSpPr>
+          <p:nvPr>
+            <p:ph type="title"/>
+          </p:nvPr>
+        </p:nvSpPr>
+        <p:spPr/>
+        <p:txBody>
+          <a:bodyPr/>
+          <a:lstStyle/>
+          <a:p>
+            <a:pPr lvl="0" indent="0" marL="0">
+              <a:buNone/>
+            </a:pPr>
+            <a:r>
+              <a:rPr/>
+              <a:t>Start by planning all 9 stages</a:t>
+            </a:r>
+          </a:p>
+        </p:txBody>
+      </p:sp>
+      <p:sp>
+        <p:nvSpPr>
+          <p:cNvPr id="3" name="Content Placeholder 2"/>
+          <p:cNvSpPr>
+            <a:spLocks noGrp="1"/>
+          </p:cNvSpPr>
+          <p:nvPr>
+            <p:ph idx="1"/>
+          </p:nvPr>
+        </p:nvSpPr>
+        <p:spPr/>
+        <p:txBody>
+          <a:bodyPr/>
+          <a:lstStyle/>
+          <a:p>
+            <a:pPr lvl="0"/>
+            <a:r>
+              <a:rPr/>
+              <a:t>Describe your own version of </a:t>
+            </a:r>
+            <a:r>
+              <a:rPr i="1"/>
+              <a:t>all 9 stages</a:t>
+            </a:r>
+            <a:r>
+              <a:rPr/>
+              <a:t> to Claude Code, even the ones you won’t build yet</a:t>
+            </a:r>
+          </a:p>
+          <a:p>
+            <a:pPr lvl="0"/>
+            <a:r>
+              <a:rPr/>
+              <a:t>Goal at this point: a shared understanding of scope, not code – inputs, outputs, and how much judgment each stage needs</a:t>
+            </a:r>
+          </a:p>
+          <a:p>
+            <a:pPr lvl="0"/>
+            <a:r>
+              <a:rPr/>
+              <a:t>Treat it like any project-scoping conversation you’d have with a human collaborator, before writing a line of anything</a:t>
+            </a:r>
+          </a:p>
+        </p:txBody>
+      </p:sp>
+      <p:sp>
+        <p:nvSpPr>
+          <p:cNvPr id="4" name="TextBox 3"/>
+          <p:cNvSpPr txBox="1"/>
+          <p:nvPr/>
+        </p:nvSpPr>
+        <p:spPr>
+          <a:xfrm>
+            <a:off x="274320" y="4777740"/>
+            <a:ext cx="5486400" cy="274320"/>
+          </a:xfrm>
+          <a:prstGeom prst="rect">
+            <a:avLst/>
+          </a:prstGeom>
+          <a:noFill/>
+        </p:spPr>
+        <p:txBody>
+          <a:bodyPr wrap="none" tIns="0" bIns="0">
+            <a:spAutoFit/>
+          </a:bodyPr>
+          <a:lstStyle/>
+          <a:p>
+            <a:pPr algn="l"/>
+            <a:r>
+              <a:rPr sz="900">
+                <a:solidFill>
+                  <a:srgbClr val="595959"/>
+                </a:solidFill>
+              </a:rPr>
+              <a:t>Copyright © 2026 Stephen Shu</a:t>
+            </a:r>
+          </a:p>
+        </p:txBody>
+      </p:sp>
+      <p:sp>
+        <p:nvSpPr>
+          <p:cNvPr id="5" name="TextBox 4"/>
+          <p:cNvSpPr txBox="1"/>
+          <p:nvPr/>
+        </p:nvSpPr>
+        <p:spPr>
+          <a:xfrm>
+            <a:off x="8321040" y="4732020"/>
+            <a:ext cx="548640" cy="320040"/>
+          </a:xfrm>
+          <a:prstGeom prst="rect">
+            <a:avLst/>
+          </a:prstGeom>
+          <a:noFill/>
+        </p:spPr>
+        <p:txBody>
+          <a:bodyPr wrap="none" tIns="0" bIns="0">
+            <a:spAutoFit/>
+          </a:bodyPr>
+          <a:lstStyle/>
+          <a:p>
+            <a:pPr algn="r"/>
+            <a:r>
+              <a:rPr sz="1200" b="1">
+                <a:solidFill>
+                  <a:srgbClr val="1F4E79"/>
+                </a:solidFill>
+              </a:rPr>
+              <a:t>33</a:t>
+            </a:r>
+          </a:p>
+        </p:txBody>
+      </p:sp>
+    </p:spTree>
+  </p:cSld>
+</p:sld>
+</file>
+
+<file path=ppt/slides/slide34.xml><?xml version="1.0" encoding="utf-8"?>
+<p:sld xmlns:a="http://schemas.openxmlformats.org/drawingml/2006/main" xmlns:r="http://schemas.openxmlformats.org/officeDocument/2006/relationships" xmlns:p="http://schemas.openxmlformats.org/presentationml/2006/main">
+  <p:cSld>
+    <p:spTree>
+      <p:nvGrpSpPr>
+        <p:cNvPr id="1" name=""/>
+        <p:cNvGrpSpPr/>
+        <p:nvPr/>
+      </p:nvGrpSpPr>
+      <p:grpSpPr>
+        <a:xfrm>
+          <a:off x="0" y="0"/>
+          <a:ext cx="0" cy="0"/>
+          <a:chOff x="0" y="0"/>
+          <a:chExt cx="0" cy="0"/>
+        </a:xfrm>
+      </p:grpSpPr>
+      <p:sp>
+        <p:nvSpPr>
+          <p:cNvPr id="2" name="Title 1"/>
+          <p:cNvSpPr>
+            <a:spLocks noGrp="1"/>
+          </p:cNvSpPr>
+          <p:nvPr>
+            <p:ph type="title"/>
+          </p:nvPr>
+        </p:nvSpPr>
+        <p:spPr/>
+        <p:txBody>
+          <a:bodyPr/>
+          <a:lstStyle/>
+          <a:p>
+            <a:pPr lvl="0" indent="0" marL="0">
+              <a:buNone/>
+            </a:pPr>
+            <a:r>
+              <a:rPr/>
+              <a:t>The roadmap: build now, build next, reserved</a:t>
+            </a:r>
+          </a:p>
+        </p:txBody>
+      </p:sp>
+      <p:pic>
+        <p:nvPicPr>
+          <p:cNvPr descr="assets/roadmap_diagram.png" id="0" name="Picture 1"/>
+          <p:cNvPicPr>
+            <a:picLocks noGrp="1" noChangeAspect="1"/>
+          </p:cNvPicPr>
+          <p:nvPr/>
+        </p:nvPicPr>
+        <p:blipFill>
+          <a:blip r:embed="rId2"/>
+          <a:stretch>
+            <a:fillRect/>
+          </a:stretch>
+        </p:blipFill>
+        <p:spPr bwMode="auto">
+          <a:xfrm>
+            <a:off x="876300" y="1193800"/>
+            <a:ext cx="7404100" cy="3390900"/>
+          </a:xfrm>
+          <a:prstGeom prst="rect">
+            <a:avLst/>
+          </a:prstGeom>
+          <a:noFill/>
+          <a:ln w="9525">
+            <a:noFill/>
+            <a:headEnd/>
+            <a:tailEnd/>
+          </a:ln>
+        </p:spPr>
+      </p:pic>
+      <p:sp>
+        <p:nvSpPr>
+          <p:cNvPr id="3" name="TextBox 2"/>
+          <p:cNvSpPr txBox="1"/>
+          <p:nvPr/>
+        </p:nvSpPr>
+        <p:spPr>
+          <a:xfrm>
+            <a:off x="274320" y="4777740"/>
+            <a:ext cx="5486400" cy="274320"/>
+          </a:xfrm>
+          <a:prstGeom prst="rect">
+            <a:avLst/>
+          </a:prstGeom>
+          <a:noFill/>
+        </p:spPr>
+        <p:txBody>
+          <a:bodyPr wrap="none" tIns="0" bIns="0">
+            <a:spAutoFit/>
+          </a:bodyPr>
+          <a:lstStyle/>
+          <a:p>
+            <a:pPr algn="l"/>
+            <a:r>
+              <a:rPr sz="900">
+                <a:solidFill>
+                  <a:srgbClr val="595959"/>
+                </a:solidFill>
+              </a:rPr>
+              <a:t>Copyright © 2026 Stephen Shu</a:t>
+            </a:r>
+          </a:p>
+        </p:txBody>
+      </p:sp>
+      <p:sp>
+        <p:nvSpPr>
+          <p:cNvPr id="4" name="TextBox 3"/>
+          <p:cNvSpPr txBox="1"/>
+          <p:nvPr/>
+        </p:nvSpPr>
+        <p:spPr>
+          <a:xfrm>
+            <a:off x="8321040" y="4732020"/>
+            <a:ext cx="548640" cy="320040"/>
+          </a:xfrm>
+          <a:prstGeom prst="rect">
+            <a:avLst/>
+          </a:prstGeom>
+          <a:noFill/>
+        </p:spPr>
+        <p:txBody>
+          <a:bodyPr wrap="none" tIns="0" bIns="0">
+            <a:spAutoFit/>
+          </a:bodyPr>
+          <a:lstStyle/>
+          <a:p>
+            <a:pPr algn="r"/>
+            <a:r>
+              <a:rPr sz="1200" b="1">
+                <a:solidFill>
+                  <a:srgbClr val="1F4E79"/>
+                </a:solidFill>
+              </a:rPr>
+              <a:t>34</a:t>
+            </a:r>
+          </a:p>
+        </p:txBody>
+      </p:sp>
+    </p:spTree>
+  </p:cSld>
+</p:sld>
+</file>
+
+<file path=ppt/slides/slide35.xml><?xml version="1.0" encoding="utf-8"?>
+<p:sld xmlns:a="http://schemas.openxmlformats.org/drawingml/2006/main" xmlns:r="http://schemas.openxmlformats.org/officeDocument/2006/relationships" xmlns:p="http://schemas.openxmlformats.org/presentationml/2006/main">
+  <p:cSld>
+    <p:spTree>
+      <p:nvGrpSpPr>
+        <p:cNvPr id="1" name=""/>
+        <p:cNvGrpSpPr/>
+        <p:nvPr/>
+      </p:nvGrpSpPr>
+      <p:grpSpPr>
+        <a:xfrm>
+          <a:off x="0" y="0"/>
+          <a:ext cx="0" cy="0"/>
+          <a:chOff x="0" y="0"/>
+          <a:chExt cx="0" cy="0"/>
+        </a:xfrm>
+      </p:grpSpPr>
+      <p:sp>
+        <p:nvSpPr>
+          <p:cNvPr id="2" name="Title 1"/>
+          <p:cNvSpPr>
+            <a:spLocks noGrp="1"/>
+          </p:cNvSpPr>
+          <p:nvPr>
+            <p:ph type="title"/>
+          </p:nvPr>
+        </p:nvSpPr>
+        <p:spPr/>
+        <p:txBody>
+          <a:bodyPr/>
+          <a:lstStyle/>
+          <a:p>
+            <a:pPr lvl="0" indent="0" marL="0">
+              <a:buNone/>
+            </a:pPr>
+            <a:r>
+              <a:rPr/>
+              <a:t>Make the scoping call for your own project</a:t>
+            </a:r>
+          </a:p>
+        </p:txBody>
+      </p:sp>
+      <p:sp>
+        <p:nvSpPr>
+          <p:cNvPr id="3" name="Content Placeholder 2"/>
+          <p:cNvSpPr>
+            <a:spLocks noGrp="1"/>
+          </p:cNvSpPr>
+          <p:nvPr>
+            <p:ph idx="1"/>
+          </p:nvPr>
+        </p:nvSpPr>
+        <p:spPr/>
+        <p:txBody>
+          <a:bodyPr/>
+          <a:lstStyle/>
+          <a:p>
+            <a:pPr lvl="0"/>
+            <a:r>
+              <a:rPr/>
+              <a:t>Build first the stages with the clearest inputs -&gt; outputs and the least open-ended judgment</a:t>
+            </a:r>
+          </a:p>
+          <a:p>
+            <a:pPr lvl="0"/>
+            <a:r>
+              <a:rPr/>
+              <a:t>For this project: Stages 3-4 (design -&gt; test) qualified; Stages 1, 2, 6, 8, 9 need more conversational nuance than a fixed pipeline can give yet</a:t>
+            </a:r>
+          </a:p>
+          <a:p>
+            <a:pPr lvl="0"/>
+            <a:r>
+              <a:rPr/>
+              <a:t>Stages 5 and 7 weren’t abandoned – just sequenced for </a:t>
+            </a:r>
+            <a:r>
+              <a:rPr i="1"/>
+              <a:t>after</a:t>
+            </a:r>
+            <a:r>
+              <a:rPr/>
+              <a:t> the core loop was validated</a:t>
+            </a:r>
+          </a:p>
+        </p:txBody>
+      </p:sp>
+      <p:sp>
+        <p:nvSpPr>
+          <p:cNvPr id="4" name="TextBox 3"/>
+          <p:cNvSpPr txBox="1"/>
+          <p:nvPr/>
+        </p:nvSpPr>
+        <p:spPr>
+          <a:xfrm>
+            <a:off x="274320" y="4777740"/>
+            <a:ext cx="5486400" cy="274320"/>
+          </a:xfrm>
+          <a:prstGeom prst="rect">
+            <a:avLst/>
+          </a:prstGeom>
+          <a:noFill/>
+        </p:spPr>
+        <p:txBody>
+          <a:bodyPr wrap="none" tIns="0" bIns="0">
+            <a:spAutoFit/>
+          </a:bodyPr>
+          <a:lstStyle/>
+          <a:p>
+            <a:pPr algn="l"/>
+            <a:r>
+              <a:rPr sz="900">
+                <a:solidFill>
+                  <a:srgbClr val="595959"/>
+                </a:solidFill>
+              </a:rPr>
+              <a:t>Copyright © 2026 Stephen Shu</a:t>
+            </a:r>
+          </a:p>
+        </p:txBody>
+      </p:sp>
+      <p:sp>
+        <p:nvSpPr>
+          <p:cNvPr id="5" name="TextBox 4"/>
+          <p:cNvSpPr txBox="1"/>
+          <p:nvPr/>
+        </p:nvSpPr>
+        <p:spPr>
+          <a:xfrm>
+            <a:off x="8321040" y="4732020"/>
+            <a:ext cx="548640" cy="320040"/>
+          </a:xfrm>
+          <a:prstGeom prst="rect">
+            <a:avLst/>
+          </a:prstGeom>
+          <a:noFill/>
+        </p:spPr>
+        <p:txBody>
+          <a:bodyPr wrap="none" tIns="0" bIns="0">
+            <a:spAutoFit/>
+          </a:bodyPr>
+          <a:lstStyle/>
+          <a:p>
+            <a:pPr algn="r"/>
+            <a:r>
+              <a:rPr sz="1200" b="1">
+                <a:solidFill>
+                  <a:srgbClr val="1F4E79"/>
+                </a:solidFill>
+              </a:rPr>
+              <a:t>35</a:t>
+            </a:r>
+          </a:p>
+        </p:txBody>
+      </p:sp>
+    </p:spTree>
+  </p:cSld>
+</p:sld>
+</file>
+
+<file path=ppt/slides/slide36.xml><?xml version="1.0" encoding="utf-8"?>
+<p:sld xmlns:a="http://schemas.openxmlformats.org/drawingml/2006/main" xmlns:r="http://schemas.openxmlformats.org/officeDocument/2006/relationships" xmlns:p="http://schemas.openxmlformats.org/presentationml/2006/main">
+  <p:cSld>
+    <p:spTree>
+      <p:nvGrpSpPr>
+        <p:cNvPr id="1" name=""/>
+        <p:cNvGrpSpPr/>
+        <p:nvPr/>
+      </p:nvGrpSpPr>
+      <p:grpSpPr>
+        <a:xfrm>
+          <a:off x="0" y="0"/>
+          <a:ext cx="0" cy="0"/>
+          <a:chOff x="0" y="0"/>
+          <a:chExt cx="0" cy="0"/>
+        </a:xfrm>
+      </p:grpSpPr>
+      <p:sp>
+        <p:nvSpPr>
+          <p:cNvPr id="2" name="Title 1"/>
+          <p:cNvSpPr>
+            <a:spLocks noGrp="1"/>
+          </p:cNvSpPr>
+          <p:nvPr>
+            <p:ph type="title"/>
+          </p:nvPr>
+        </p:nvSpPr>
+        <p:spPr/>
+        <p:txBody>
+          <a:bodyPr/>
+          <a:lstStyle/>
+          <a:p>
+            <a:pPr lvl="0" indent="0" marL="0">
+              <a:buNone/>
+            </a:pPr>
+            <a:r>
+              <a:rPr/>
+              <a:t>Bootstrap prompt: draft the Skill yourself</a:t>
+            </a:r>
+          </a:p>
+        </p:txBody>
+      </p:sp>
+      <p:sp>
+        <p:nvSpPr>
+          <p:cNvPr id="3" name="Content Placeholder 2"/>
+          <p:cNvSpPr>
+            <a:spLocks noGrp="1"/>
+          </p:cNvSpPr>
+          <p:nvPr>
+            <p:ph idx="1"/>
+          </p:nvPr>
+        </p:nvSpPr>
+        <p:spPr/>
+        <p:txBody>
+          <a:bodyPr/>
+          <a:lstStyle/>
+          <a:p>
+            <a:pPr lvl="0"/>
+            <a:r>
+              <a:rPr/>
+              <a:t>Point Claude Code at one of this project’s real skills as a style reference, and ask it to draft a new one for your topic</a:t>
+            </a:r>
+          </a:p>
+          <a:p>
+            <a:pPr lvl="0"/>
+            <a:r>
+              <a:rPr i="1"/>
+              <a:t>“Here’s an example SKILL.md [paste one]. Draft a new one in this style for [your stage’s inputs/outputs].”</a:t>
+            </a:r>
+          </a:p>
+          <a:p>
+            <a:pPr lvl="0"/>
+            <a:r>
+              <a:rPr b="1"/>
+              <a:t>What you get back:</a:t>
+            </a:r>
+            <a:r>
+              <a:rPr/>
+              <a:t> a draft </a:t>
+            </a:r>
+            <a:r>
+              <a:rPr>
+                <a:latin typeface="Courier New"/>
+              </a:rPr>
+              <a:t>SKILL.md</a:t>
+            </a:r>
+            <a:r>
+              <a:rPr/>
+              <a:t> – review it, adjust the required-inputs list to fit your research area, save it under </a:t>
+            </a:r>
+            <a:r>
+              <a:rPr>
+                <a:latin typeface="Courier New"/>
+              </a:rPr>
+              <a:t>.claude/skills/</a:t>
+            </a:r>
+          </a:p>
+        </p:txBody>
+      </p:sp>
+      <p:sp>
+        <p:nvSpPr>
+          <p:cNvPr id="4" name="TextBox 3"/>
+          <p:cNvSpPr txBox="1"/>
+          <p:nvPr/>
+        </p:nvSpPr>
+        <p:spPr>
+          <a:xfrm>
+            <a:off x="274320" y="4777740"/>
+            <a:ext cx="5486400" cy="274320"/>
+          </a:xfrm>
+          <a:prstGeom prst="rect">
+            <a:avLst/>
+          </a:prstGeom>
+          <a:noFill/>
+        </p:spPr>
+        <p:txBody>
+          <a:bodyPr wrap="none" tIns="0" bIns="0">
+            <a:spAutoFit/>
+          </a:bodyPr>
+          <a:lstStyle/>
+          <a:p>
+            <a:pPr algn="l"/>
+            <a:r>
+              <a:rPr sz="900">
+                <a:solidFill>
+                  <a:srgbClr val="595959"/>
+                </a:solidFill>
+              </a:rPr>
+              <a:t>Copyright © 2026 Stephen Shu</a:t>
+            </a:r>
+          </a:p>
+        </p:txBody>
+      </p:sp>
+      <p:sp>
+        <p:nvSpPr>
+          <p:cNvPr id="5" name="TextBox 4"/>
+          <p:cNvSpPr txBox="1"/>
+          <p:nvPr/>
+        </p:nvSpPr>
+        <p:spPr>
+          <a:xfrm>
+            <a:off x="8321040" y="4732020"/>
+            <a:ext cx="548640" cy="320040"/>
+          </a:xfrm>
+          <a:prstGeom prst="rect">
+            <a:avLst/>
+          </a:prstGeom>
+          <a:noFill/>
+        </p:spPr>
+        <p:txBody>
+          <a:bodyPr wrap="none" tIns="0" bIns="0">
+            <a:spAutoFit/>
+          </a:bodyPr>
+          <a:lstStyle/>
+          <a:p>
+            <a:pPr algn="r"/>
+            <a:r>
+              <a:rPr sz="1200" b="1">
+                <a:solidFill>
+                  <a:srgbClr val="1F4E79"/>
+                </a:solidFill>
+              </a:rPr>
+              <a:t>36</a:t>
+            </a:r>
+          </a:p>
+        </p:txBody>
+      </p:sp>
+    </p:spTree>
+  </p:cSld>
+</p:sld>
+</file>
+
+<file path=ppt/slides/slide37.xml><?xml version="1.0" encoding="utf-8"?>
+<p:sld xmlns:a="http://schemas.openxmlformats.org/drawingml/2006/main" xmlns:r="http://schemas.openxmlformats.org/officeDocument/2006/relationships" xmlns:p="http://schemas.openxmlformats.org/presentationml/2006/main">
+  <p:cSld>
+    <p:spTree>
+      <p:nvGrpSpPr>
+        <p:cNvPr id="1" name=""/>
+        <p:cNvGrpSpPr/>
+        <p:nvPr/>
+      </p:nvGrpSpPr>
+      <p:grpSpPr>
+        <a:xfrm>
+          <a:off x="0" y="0"/>
+          <a:ext cx="0" cy="0"/>
+          <a:chOff x="0" y="0"/>
+          <a:chExt cx="0" cy="0"/>
+        </a:xfrm>
+      </p:grpSpPr>
+      <p:sp>
+        <p:nvSpPr>
+          <p:cNvPr id="2" name="Title 1"/>
+          <p:cNvSpPr>
+            <a:spLocks noGrp="1"/>
+          </p:cNvSpPr>
+          <p:nvPr>
+            <p:ph type="title"/>
+          </p:nvPr>
+        </p:nvSpPr>
+        <p:spPr/>
+        <p:txBody>
+          <a:bodyPr/>
+          <a:lstStyle/>
+          <a:p>
+            <a:pPr lvl="0" indent="0" marL="0">
+              <a:buNone/>
+            </a:pPr>
+            <a:r>
+              <a:rPr/>
+              <a:t>Validate before you scale</a:t>
+            </a:r>
+          </a:p>
+        </p:txBody>
+      </p:sp>
+      <p:sp>
+        <p:nvSpPr>
+          <p:cNvPr id="3" name="Content Placeholder 2"/>
+          <p:cNvSpPr>
+            <a:spLocks noGrp="1"/>
+          </p:cNvSpPr>
+          <p:nvPr>
+            <p:ph idx="1"/>
+          </p:nvPr>
+        </p:nvSpPr>
+        <p:spPr/>
+        <p:txBody>
+          <a:bodyPr/>
+          <a:lstStyle/>
+          <a:p>
+            <a:pPr lvl="0"/>
+            <a:r>
+              <a:rPr/>
+              <a:t>Run a tiny throwaway example first: a made-up stimulus for a design skill, N=5-10 for a synthetic-test skill</a:t>
+            </a:r>
+          </a:p>
+          <a:p>
+            <a:pPr lvl="0"/>
+            <a:r>
+              <a:rPr/>
+              <a:t>Check the output shape before trusting it, and iterate the skill’s wording based on what comes back</a:t>
+            </a:r>
+          </a:p>
+          <a:p>
+            <a:pPr lvl="0"/>
+            <a:r>
+              <a:rPr/>
+              <a:t>Same pilot-before-scale discipline as the main study – applied one level up, to the skill itself</a:t>
+            </a:r>
+          </a:p>
+        </p:txBody>
+      </p:sp>
+      <p:sp>
+        <p:nvSpPr>
+          <p:cNvPr id="4" name="TextBox 3"/>
+          <p:cNvSpPr txBox="1"/>
+          <p:nvPr/>
+        </p:nvSpPr>
+        <p:spPr>
+          <a:xfrm>
+            <a:off x="274320" y="4777740"/>
+            <a:ext cx="5486400" cy="274320"/>
+          </a:xfrm>
+          <a:prstGeom prst="rect">
+            <a:avLst/>
+          </a:prstGeom>
+          <a:noFill/>
+        </p:spPr>
+        <p:txBody>
+          <a:bodyPr wrap="none" tIns="0" bIns="0">
+            <a:spAutoFit/>
+          </a:bodyPr>
+          <a:lstStyle/>
+          <a:p>
+            <a:pPr algn="l"/>
+            <a:r>
+              <a:rPr sz="900">
+                <a:solidFill>
+                  <a:srgbClr val="595959"/>
+                </a:solidFill>
+              </a:rPr>
+              <a:t>Copyright © 2026 Stephen Shu</a:t>
+            </a:r>
+          </a:p>
+        </p:txBody>
+      </p:sp>
+      <p:sp>
+        <p:nvSpPr>
+          <p:cNvPr id="5" name="TextBox 4"/>
+          <p:cNvSpPr txBox="1"/>
+          <p:nvPr/>
+        </p:nvSpPr>
+        <p:spPr>
+          <a:xfrm>
+            <a:off x="8321040" y="4732020"/>
+            <a:ext cx="548640" cy="320040"/>
+          </a:xfrm>
+          <a:prstGeom prst="rect">
+            <a:avLst/>
+          </a:prstGeom>
+          <a:noFill/>
+        </p:spPr>
+        <p:txBody>
+          <a:bodyPr wrap="none" tIns="0" bIns="0">
+            <a:spAutoFit/>
+          </a:bodyPr>
+          <a:lstStyle/>
+          <a:p>
+            <a:pPr algn="r"/>
+            <a:r>
+              <a:rPr sz="1200" b="1">
+                <a:solidFill>
+                  <a:srgbClr val="1F4E79"/>
+                </a:solidFill>
+              </a:rPr>
+              <a:t>37</a:t>
+            </a:r>
+          </a:p>
+        </p:txBody>
+      </p:sp>
+    </p:spTree>
+  </p:cSld>
+</p:sld>
+</file>
+
+<file path=ppt/slides/slide38.xml><?xml version="1.0" encoding="utf-8"?>
+<p:sld xmlns:a="http://schemas.openxmlformats.org/drawingml/2006/main" xmlns:r="http://schemas.openxmlformats.org/officeDocument/2006/relationships" xmlns:p="http://schemas.openxmlformats.org/presentationml/2006/main">
+  <p:cSld>
+    <p:spTree>
+      <p:nvGrpSpPr>
+        <p:cNvPr id="1" name=""/>
+        <p:cNvGrpSpPr/>
+        <p:nvPr/>
+      </p:nvGrpSpPr>
+      <p:grpSpPr>
+        <a:xfrm>
+          <a:off x="0" y="0"/>
+          <a:ext cx="0" cy="0"/>
+          <a:chOff x="0" y="0"/>
+          <a:chExt cx="0" cy="0"/>
+        </a:xfrm>
+      </p:grpSpPr>
+      <p:sp>
+        <p:nvSpPr>
+          <p:cNvPr id="2" name="Title 1"/>
+          <p:cNvSpPr>
+            <a:spLocks noGrp="1"/>
+          </p:cNvSpPr>
+          <p:nvPr>
+            <p:ph type="title"/>
+          </p:nvPr>
+        </p:nvSpPr>
+        <p:spPr/>
+        <p:txBody>
+          <a:bodyPr/>
+          <a:lstStyle/>
+          <a:p>
+            <a:pPr lvl="0" indent="0" marL="0">
+              <a:buNone/>
+            </a:pPr>
+            <a:r>
+              <a:rPr/>
+              <a:t>What happened next in this project</a:t>
+            </a:r>
+          </a:p>
+        </p:txBody>
+      </p:sp>
+      <p:sp>
+        <p:nvSpPr>
+          <p:cNvPr id="3" name="Content Placeholder 2"/>
+          <p:cNvSpPr>
+            <a:spLocks noGrp="1"/>
+          </p:cNvSpPr>
+          <p:nvPr>
+            <p:ph idx="1"/>
+          </p:nvPr>
+        </p:nvSpPr>
+        <p:spPr/>
+        <p:txBody>
+          <a:bodyPr/>
+          <a:lstStyle/>
+          <a:p>
+            <a:pPr lvl="0"/>
+            <a:r>
+              <a:rPr/>
+              <a:t>Once Stages 3-4 were validated end-to-end (the N=20 pilot, then N=400 scale-up), the same bootstrap-then-validate pattern extended the workflow to Stage 5 (analysis) and Stage 7 (writeup)</a:t>
+            </a:r>
+          </a:p>
+          <a:p>
+            <a:pPr lvl="0"/>
+            <a:r>
+              <a:rPr/>
+              <a:t>Stages 1, 2, 6, 8, 9 remain reserved – not abandoned, just not yet specified enough to automate</a:t>
+            </a:r>
+          </a:p>
+          <a:p>
+            <a:pPr lvl="0"/>
+            <a:r>
+              <a:rPr/>
+              <a:t>The lesson holds at every level of this workflow: scope small, validate, then expand</a:t>
+            </a:r>
+          </a:p>
+        </p:txBody>
+      </p:sp>
+      <p:sp>
+        <p:nvSpPr>
+          <p:cNvPr id="4" name="TextBox 3"/>
+          <p:cNvSpPr txBox="1"/>
+          <p:nvPr/>
+        </p:nvSpPr>
+        <p:spPr>
+          <a:xfrm>
+            <a:off x="274320" y="4777740"/>
+            <a:ext cx="5486400" cy="274320"/>
+          </a:xfrm>
+          <a:prstGeom prst="rect">
+            <a:avLst/>
+          </a:prstGeom>
+          <a:noFill/>
+        </p:spPr>
+        <p:txBody>
+          <a:bodyPr wrap="none" tIns="0" bIns="0">
+            <a:spAutoFit/>
+          </a:bodyPr>
+          <a:lstStyle/>
+          <a:p>
+            <a:pPr algn="l"/>
+            <a:r>
+              <a:rPr sz="900">
+                <a:solidFill>
+                  <a:srgbClr val="595959"/>
+                </a:solidFill>
+              </a:rPr>
+              <a:t>Copyright © 2026 Stephen Shu</a:t>
+            </a:r>
+          </a:p>
+        </p:txBody>
+      </p:sp>
+      <p:sp>
+        <p:nvSpPr>
+          <p:cNvPr id="5" name="TextBox 4"/>
+          <p:cNvSpPr txBox="1"/>
+          <p:nvPr/>
+        </p:nvSpPr>
+        <p:spPr>
+          <a:xfrm>
+            <a:off x="8321040" y="4732020"/>
+            <a:ext cx="548640" cy="320040"/>
+          </a:xfrm>
+          <a:prstGeom prst="rect">
+            <a:avLst/>
+          </a:prstGeom>
+          <a:noFill/>
+        </p:spPr>
+        <p:txBody>
+          <a:bodyPr wrap="none" tIns="0" bIns="0">
+            <a:spAutoFit/>
+          </a:bodyPr>
+          <a:lstStyle/>
+          <a:p>
+            <a:pPr algn="r"/>
+            <a:r>
+              <a:rPr sz="1200" b="1">
+                <a:solidFill>
+                  <a:srgbClr val="1F4E79"/>
+                </a:solidFill>
+              </a:rPr>
+              <a:t>38</a:t>
             </a:r>
           </a:p>
         </p:txBody>

--- a/presentations/2026-workshop/slides.pptx
+++ b/presentations/2026-workshop/slides.pptx
@@ -7663,8 +7663,8 @@
         </p:blipFill>
         <p:spPr bwMode="auto">
           <a:xfrm>
-            <a:off x="2082800" y="1193800"/>
-            <a:ext cx="4978400" cy="3390900"/>
+            <a:off x="2463800" y="1193800"/>
+            <a:ext cx="4229100" cy="2882900"/>
           </a:xfrm>
           <a:prstGeom prst="rect">
             <a:avLst/>
@@ -7677,6 +7677,38 @@
           </a:ln>
         </p:spPr>
       </p:pic>
+      <p:sp>
+        <p:nvSpPr>
+          <p:cNvPr id="1" name="TextBox 3"/>
+          <p:cNvSpPr txBox="1"/>
+          <p:nvPr>
+            <p:ph idx="1"/>
+          </p:nvPr>
+        </p:nvSpPr>
+        <p:spPr>
+          <a:xfrm>
+            <a:off x="457200" y="4076700"/>
+            <a:ext cx="8229600" cy="508000"/>
+          </a:xfrm>
+          <a:prstGeom prst="rect">
+            <a:avLst/>
+          </a:prstGeom>
+          <a:noFill/>
+        </p:spPr>
+        <p:txBody>
+          <a:bodyPr/>
+          <a:lstStyle/>
+          <a:p>
+            <a:pPr lvl="0" indent="0" marL="0" algn="ctr">
+              <a:buNone/>
+            </a:pPr>
+            <a:r>
+              <a:rPr sz="1600"/>
+              <a:t>Claude Code shown here – a free Google Antigravity stack maps onto this same architecture, no paid tier required (see workbook Section 7.6).</a:t>
+            </a:r>
+          </a:p>
+        </p:txBody>
+      </p:sp>
       <p:sp>
         <p:nvSpPr>
           <p:cNvPr id="3" name="TextBox 2"/>

--- a/presentations/2026-workshop/slides.pptx
+++ b/presentations/2026-workshop/slides.pptx
@@ -3188,7 +3188,7 @@
             <a:br/>
             <a:r>
               <a:rPr/>
-              <a:t>Stephen Shu</a:t>
+              <a:t>Stephen Shu – Draft: September 3, 2026</a:t>
             </a:r>
           </a:p>
         </p:txBody>
